--- a/PCA와 군집분석(강유진).pptx
+++ b/PCA와 군집분석(강유진).pptx
@@ -5,7 +5,7 @@
     <p:sldMasterId id="2147483648" r:id="rId1"/>
   </p:sldMasterIdLst>
   <p:notesMasterIdLst>
-    <p:notesMasterId r:id="rId35"/>
+    <p:notesMasterId r:id="rId36"/>
   </p:notesMasterIdLst>
   <p:sldIdLst>
     <p:sldId id="256" r:id="rId2"/>
@@ -21,26 +21,27 @@
     <p:sldId id="286" r:id="rId12"/>
     <p:sldId id="277" r:id="rId13"/>
     <p:sldId id="281" r:id="rId14"/>
-    <p:sldId id="299" r:id="rId15"/>
-    <p:sldId id="293" r:id="rId16"/>
-    <p:sldId id="294" r:id="rId17"/>
-    <p:sldId id="292" r:id="rId18"/>
-    <p:sldId id="265" r:id="rId19"/>
-    <p:sldId id="321" r:id="rId20"/>
-    <p:sldId id="322" r:id="rId21"/>
-    <p:sldId id="323" r:id="rId22"/>
-    <p:sldId id="320" r:id="rId23"/>
-    <p:sldId id="310" r:id="rId24"/>
-    <p:sldId id="288" r:id="rId25"/>
-    <p:sldId id="311" r:id="rId26"/>
-    <p:sldId id="308" r:id="rId27"/>
-    <p:sldId id="312" r:id="rId28"/>
-    <p:sldId id="268" r:id="rId29"/>
-    <p:sldId id="315" r:id="rId30"/>
-    <p:sldId id="317" r:id="rId31"/>
-    <p:sldId id="316" r:id="rId32"/>
-    <p:sldId id="318" r:id="rId33"/>
-    <p:sldId id="303" r:id="rId34"/>
+    <p:sldId id="324" r:id="rId15"/>
+    <p:sldId id="299" r:id="rId16"/>
+    <p:sldId id="293" r:id="rId17"/>
+    <p:sldId id="294" r:id="rId18"/>
+    <p:sldId id="292" r:id="rId19"/>
+    <p:sldId id="265" r:id="rId20"/>
+    <p:sldId id="321" r:id="rId21"/>
+    <p:sldId id="322" r:id="rId22"/>
+    <p:sldId id="323" r:id="rId23"/>
+    <p:sldId id="320" r:id="rId24"/>
+    <p:sldId id="310" r:id="rId25"/>
+    <p:sldId id="288" r:id="rId26"/>
+    <p:sldId id="311" r:id="rId27"/>
+    <p:sldId id="308" r:id="rId28"/>
+    <p:sldId id="312" r:id="rId29"/>
+    <p:sldId id="268" r:id="rId30"/>
+    <p:sldId id="315" r:id="rId31"/>
+    <p:sldId id="317" r:id="rId32"/>
+    <p:sldId id="316" r:id="rId33"/>
+    <p:sldId id="318" r:id="rId34"/>
+    <p:sldId id="303" r:id="rId35"/>
   </p:sldIdLst>
   <p:sldSz cx="18288000" cy="10287000"/>
   <p:notesSz cx="6858000" cy="9144000"/>
@@ -619,9 +620,7 @@
           </a:bodyPr>
           <a:lstStyle/>
           <a:p>
-            <a:endParaRPr lang="en-US" altLang="ko-KR" sz="1200" b="1" dirty="0">
-              <a:latin typeface="+mn-ea"/>
-            </a:endParaRPr>
+            <a:endParaRPr lang="ko-KR" altLang="en-US" dirty="0"/>
           </a:p>
         </p:txBody>
       </p:sp>
@@ -787,28 +786,6 @@
           </a:bodyPr>
           <a:lstStyle/>
           <a:p>
-            <a:r>
-              <a:rPr lang="ko-KR" altLang="en-US" sz="1200" dirty="0" smtClean="0"/>
-              <a:t>위쪽→이런 국가들은 아직 석탄 기반 발전 비중이 높고</a:t>
-            </a:r>
-            <a:r>
-              <a:rPr lang="en-US" altLang="ko-KR" sz="1200" dirty="0" smtClean="0"/>
-              <a:t>, </a:t>
-            </a:r>
-            <a:r>
-              <a:rPr lang="ko-KR" altLang="en-US" sz="1200" dirty="0" smtClean="0"/>
-              <a:t>친환경 전환이 느림</a:t>
-            </a:r>
-            <a:endParaRPr lang="en-US" altLang="ko-KR" sz="1200" dirty="0" smtClean="0"/>
-          </a:p>
-          <a:p>
-            <a:r>
-              <a:rPr lang="ko-KR" altLang="en-US" sz="1200" dirty="0" smtClean="0"/>
-              <a:t>아래쪽→ 선진국 중 친환경 전환 빠른　국가들</a:t>
-            </a:r>
-            <a:endParaRPr lang="en-US" altLang="ko-KR" sz="1200" dirty="0" smtClean="0"/>
-          </a:p>
-          <a:p>
             <a:endParaRPr lang="en-US" altLang="ko-KR" sz="1200" b="1" dirty="0">
               <a:latin typeface="+mn-ea"/>
             </a:endParaRPr>
@@ -894,309 +871,25 @@
           <a:lstStyle/>
           <a:p>
             <a:r>
-              <a:rPr lang="ko-KR" altLang="en-US" b="1" dirty="0" smtClean="0"/>
-              <a:t>독일</a:t>
-            </a:r>
-            <a:r>
-              <a:rPr lang="en-US" altLang="ko-KR" b="1" dirty="0" smtClean="0"/>
-              <a:t>,</a:t>
-            </a:r>
-            <a:r>
-              <a:rPr lang="ko-KR" altLang="en-US" b="1" dirty="0" smtClean="0"/>
-              <a:t>영국</a:t>
-            </a:r>
-            <a:r>
-              <a:rPr lang="en-US" altLang="ko-KR" b="1" dirty="0" smtClean="0"/>
-              <a:t>,</a:t>
-            </a:r>
-            <a:r>
-              <a:rPr lang="ko-KR" altLang="en-US" b="1" dirty="0" smtClean="0"/>
-              <a:t>프랑스</a:t>
-            </a:r>
-            <a:r>
-              <a:rPr lang="en-US" altLang="ko-KR" b="1" dirty="0" smtClean="0"/>
-              <a:t>,</a:t>
-            </a:r>
-            <a:r>
-              <a:rPr lang="ko-KR" altLang="en-US" b="1" dirty="0" smtClean="0"/>
-              <a:t>이탈리아</a:t>
-            </a:r>
-            <a:endParaRPr lang="ko-KR" altLang="en-US" dirty="0" smtClean="0"/>
-          </a:p>
-          <a:p>
-            <a:r>
-              <a:rPr lang="ko-KR" altLang="en-US" b="1" dirty="0" smtClean="0"/>
-              <a:t>유럽 선진국들</a:t>
-            </a:r>
-            <a:r>
-              <a:rPr lang="ko-KR" altLang="en-US" dirty="0" smtClean="0"/>
-              <a:t>은 대부분 </a:t>
-            </a:r>
-            <a:r>
-              <a:rPr lang="ko-KR" altLang="en-US" b="1" dirty="0" smtClean="0"/>
-              <a:t>온실가스</a:t>
-            </a:r>
-            <a:r>
-              <a:rPr lang="en-US" altLang="ko-KR" b="1" dirty="0" smtClean="0"/>
-              <a:t>·</a:t>
-            </a:r>
-            <a:r>
-              <a:rPr lang="ko-KR" altLang="en-US" b="1" dirty="0" smtClean="0"/>
-              <a:t>에너지 소비량은 </a:t>
-            </a:r>
-            <a:r>
-              <a:rPr lang="ko-KR" altLang="en-US" b="1" dirty="0" err="1" smtClean="0"/>
-              <a:t>중상위</a:t>
-            </a:r>
-            <a:r>
-              <a:rPr lang="ko-KR" altLang="en-US" b="1" dirty="0" smtClean="0"/>
-              <a:t> 수준</a:t>
-            </a:r>
-            <a:r>
-              <a:rPr lang="ko-KR" altLang="en-US" dirty="0" smtClean="0"/>
-              <a:t/>
-            </a:r>
-            <a:br>
-              <a:rPr lang="ko-KR" altLang="en-US" dirty="0" smtClean="0"/>
-            </a:br>
-            <a:r>
-              <a:rPr lang="ko-KR" altLang="en-US" dirty="0" smtClean="0"/>
-              <a:t>→ </a:t>
-            </a:r>
-            <a:r>
-              <a:rPr lang="ko-KR" altLang="en-US" b="1" dirty="0" smtClean="0"/>
-              <a:t>고효율 산업구조</a:t>
-            </a:r>
-            <a:r>
-              <a:rPr lang="en-US" altLang="ko-KR" b="1" dirty="0" smtClean="0"/>
+              <a:rPr lang="ko-KR" altLang="en-US" sz="1200" dirty="0" smtClean="0"/>
+              <a:t>위쪽→이런 국가들은 아직 석탄 기반 발전 비중이 높고</a:t>
+            </a:r>
+            <a:r>
+              <a:rPr lang="en-US" altLang="ko-KR" sz="1200" dirty="0" smtClean="0"/>
               <a:t>, </a:t>
             </a:r>
             <a:r>
-              <a:rPr lang="ko-KR" altLang="en-US" b="1" dirty="0" smtClean="0"/>
-              <a:t>안정적 에너지 사용</a:t>
-            </a:r>
-            <a:r>
-              <a:rPr lang="ko-KR" altLang="en-US" dirty="0" smtClean="0"/>
-              <a:t>으로 </a:t>
-            </a:r>
-            <a:r>
-              <a:rPr lang="en-US" altLang="ko-KR" dirty="0" smtClean="0"/>
-              <a:t>PC1</a:t>
-            </a:r>
-            <a:r>
-              <a:rPr lang="ko-KR" altLang="en-US" dirty="0" smtClean="0"/>
-              <a:t>은 높고 </a:t>
-            </a:r>
-            <a:r>
-              <a:rPr lang="en-US" altLang="ko-KR" dirty="0" smtClean="0"/>
-              <a:t>PC2</a:t>
-            </a:r>
-            <a:r>
-              <a:rPr lang="ko-KR" altLang="en-US" dirty="0" smtClean="0"/>
-              <a:t>는 상대적으로 낮음</a:t>
-            </a:r>
-          </a:p>
-          <a:p>
-            <a:endParaRPr lang="en-US" altLang="ko-KR" dirty="0" smtClean="0"/>
-          </a:p>
-          <a:p>
-            <a:r>
-              <a:rPr lang="ko-KR" altLang="en-US" b="1" dirty="0" smtClean="0"/>
-              <a:t>인도</a:t>
-            </a:r>
-            <a:r>
-              <a:rPr lang="en-US" altLang="ko-KR" b="1" dirty="0" smtClean="0"/>
-              <a:t>,</a:t>
-            </a:r>
-            <a:r>
-              <a:rPr lang="ko-KR" altLang="en-US" b="1" dirty="0" smtClean="0"/>
-              <a:t>네팔</a:t>
-            </a:r>
-            <a:r>
-              <a:rPr lang="en-US" altLang="ko-KR" b="1" dirty="0" smtClean="0"/>
-              <a:t>,</a:t>
-            </a:r>
-            <a:r>
-              <a:rPr lang="ko-KR" altLang="en-US" b="1" dirty="0" smtClean="0"/>
-              <a:t>파키스탄</a:t>
-            </a:r>
-            <a:r>
-              <a:rPr lang="en-US" altLang="ko-KR" dirty="0" smtClean="0"/>
-              <a:t>, </a:t>
-            </a:r>
-            <a:r>
-              <a:rPr lang="ko-KR" altLang="en-US" b="1" dirty="0" smtClean="0"/>
-              <a:t>방글라데시　</a:t>
-            </a:r>
-            <a:r>
-              <a:rPr lang="ko-KR" altLang="en-US" dirty="0" smtClean="0"/>
-              <a:t>등 </a:t>
-            </a:r>
-            <a:r>
-              <a:rPr lang="ko-KR" altLang="en-US" b="1" dirty="0" smtClean="0"/>
-              <a:t>아시아 개발도상국</a:t>
-            </a:r>
-            <a:r>
-              <a:rPr lang="ko-KR" altLang="en-US" dirty="0" smtClean="0"/>
-              <a:t>들</a:t>
-            </a:r>
-            <a:br>
-              <a:rPr lang="ko-KR" altLang="en-US" dirty="0" smtClean="0"/>
-            </a:br>
-            <a:r>
-              <a:rPr lang="ko-KR" altLang="en-US" dirty="0" smtClean="0"/>
-              <a:t>→ 석탄 기반 에너지원 사용 비중 높음</a:t>
-            </a:r>
-            <a:endParaRPr lang="en-US" altLang="ko-KR" dirty="0" smtClean="0"/>
-          </a:p>
-          <a:p>
-            <a:endParaRPr lang="en-US" altLang="ko-KR" dirty="0" smtClean="0"/>
-          </a:p>
-          <a:p>
-            <a:r>
-              <a:rPr lang="ko-KR" altLang="en-US" dirty="0" smtClean="0"/>
-              <a:t>아프리카 국가들 </a:t>
-            </a:r>
-            <a:r>
-              <a:rPr lang="en-US" altLang="ko-KR" dirty="0" smtClean="0"/>
-              <a:t>(</a:t>
-            </a:r>
-            <a:r>
-              <a:rPr lang="ko-KR" altLang="en-US" dirty="0" err="1" smtClean="0"/>
-              <a:t>잠비아</a:t>
-            </a:r>
-            <a:r>
-              <a:rPr lang="en-US" altLang="ko-KR" dirty="0" smtClean="0"/>
-              <a:t>, </a:t>
-            </a:r>
-            <a:r>
-              <a:rPr lang="ko-KR" altLang="en-US" dirty="0" err="1" smtClean="0"/>
-              <a:t>우간다</a:t>
-            </a:r>
-            <a:r>
-              <a:rPr lang="ko-KR" altLang="en-US" dirty="0" smtClean="0"/>
-              <a:t> 등</a:t>
-            </a:r>
-            <a:r>
-              <a:rPr lang="en-US" altLang="ko-KR" dirty="0" smtClean="0"/>
-              <a:t>), </a:t>
-            </a:r>
-            <a:r>
-              <a:rPr lang="ko-KR" altLang="en-US" dirty="0" smtClean="0"/>
-              <a:t>소국들</a:t>
-            </a:r>
-            <a:r>
-              <a:rPr lang="en-US" altLang="ko-KR" dirty="0" smtClean="0"/>
-              <a:t>(</a:t>
-            </a:r>
-            <a:r>
-              <a:rPr lang="ko-KR" altLang="en-US" dirty="0" smtClean="0"/>
-              <a:t>피지</a:t>
-            </a:r>
-            <a:r>
-              <a:rPr lang="en-US" altLang="ko-KR" dirty="0" smtClean="0"/>
-              <a:t>, </a:t>
-            </a:r>
-            <a:r>
-              <a:rPr lang="ko-KR" altLang="en-US" dirty="0" err="1" smtClean="0"/>
-              <a:t>통가</a:t>
-            </a:r>
-            <a:r>
-              <a:rPr lang="ko-KR" altLang="en-US" dirty="0" smtClean="0"/>
-              <a:t> 등</a:t>
-            </a:r>
-            <a:r>
-              <a:rPr lang="en-US" altLang="ko-KR" dirty="0" smtClean="0"/>
-              <a:t>)</a:t>
-            </a:r>
-            <a:br>
-              <a:rPr lang="en-US" altLang="ko-KR" dirty="0" smtClean="0"/>
-            </a:br>
-            <a:r>
-              <a:rPr lang="en-US" altLang="ko-KR" dirty="0" smtClean="0"/>
-              <a:t>→ </a:t>
-            </a:r>
-            <a:r>
-              <a:rPr lang="ko-KR" altLang="en-US" b="1" dirty="0" smtClean="0"/>
-              <a:t>에너지 사용 총량 낮음 </a:t>
-            </a:r>
-            <a:r>
-              <a:rPr lang="en-US" altLang="ko-KR" b="1" dirty="0" smtClean="0"/>
-              <a:t>+ </a:t>
-            </a:r>
-            <a:r>
-              <a:rPr lang="ko-KR" altLang="en-US" b="1" dirty="0" smtClean="0"/>
-              <a:t>에너지원 구성이 다양하지 않음</a:t>
-            </a:r>
-            <a:endParaRPr lang="en-US" altLang="ko-KR" b="1" dirty="0" smtClean="0"/>
-          </a:p>
-          <a:p>
-            <a:endParaRPr lang="en-US" altLang="ko-KR" b="1" dirty="0" smtClean="0"/>
-          </a:p>
-          <a:p>
-            <a:r>
-              <a:rPr lang="ko-KR" altLang="en-US" b="1" dirty="0" smtClean="0"/>
-              <a:t>사우디아라비아</a:t>
-            </a:r>
-            <a:r>
-              <a:rPr lang="en-US" altLang="ko-KR" dirty="0" smtClean="0"/>
-              <a:t>, </a:t>
-            </a:r>
-            <a:r>
-              <a:rPr lang="ko-KR" altLang="en-US" b="1" dirty="0" smtClean="0"/>
-              <a:t>러시아</a:t>
-            </a:r>
-            <a:r>
-              <a:rPr lang="en-US" altLang="ko-KR" dirty="0" smtClean="0"/>
-              <a:t>, </a:t>
-            </a:r>
-            <a:r>
-              <a:rPr lang="ko-KR" altLang="en-US" b="1" dirty="0" smtClean="0"/>
-              <a:t>카타르 </a:t>
-            </a:r>
-            <a:r>
-              <a:rPr lang="ko-KR" altLang="en-US" dirty="0" smtClean="0"/>
-              <a:t>등</a:t>
-            </a:r>
-            <a:br>
-              <a:rPr lang="ko-KR" altLang="en-US" dirty="0" smtClean="0"/>
-            </a:br>
-            <a:r>
-              <a:rPr lang="ko-KR" altLang="en-US" dirty="0" smtClean="0"/>
-              <a:t>→ </a:t>
-            </a:r>
-            <a:r>
-              <a:rPr lang="ko-KR" altLang="en-US" b="1" dirty="0" smtClean="0"/>
-              <a:t>석유</a:t>
-            </a:r>
-            <a:r>
-              <a:rPr lang="en-US" altLang="ko-KR" b="1" dirty="0" smtClean="0"/>
-              <a:t>·</a:t>
-            </a:r>
-            <a:r>
-              <a:rPr lang="ko-KR" altLang="en-US" b="1" dirty="0" smtClean="0"/>
-              <a:t>가스 중심 국가들</a:t>
-            </a:r>
-            <a:r>
-              <a:rPr lang="ko-KR" altLang="en-US" dirty="0" smtClean="0"/>
-              <a:t> → 석탄</a:t>
-            </a:r>
-            <a:r>
-              <a:rPr lang="en-US" altLang="ko-KR" dirty="0" smtClean="0"/>
-              <a:t>·</a:t>
-            </a:r>
-            <a:r>
-              <a:rPr lang="ko-KR" altLang="en-US" dirty="0" smtClean="0"/>
-              <a:t>시멘트 비중은 낮음</a:t>
-            </a:r>
-            <a:r>
-              <a:rPr lang="en-US" altLang="ko-KR" dirty="0" smtClean="0"/>
-              <a:t>, </a:t>
-            </a:r>
-            <a:r>
-              <a:rPr lang="ko-KR" altLang="en-US" dirty="0" smtClean="0"/>
-              <a:t>상대적으로 청정연료 기반 많음</a:t>
-            </a:r>
+              <a:rPr lang="ko-KR" altLang="en-US" sz="1200" dirty="0" smtClean="0"/>
+              <a:t>친환경 전환이 느림</a:t>
+            </a:r>
+            <a:endParaRPr lang="en-US" altLang="ko-KR" sz="1200" dirty="0" smtClean="0"/>
+          </a:p>
+          <a:p>
+            <a:r>
+              <a:rPr lang="ko-KR" altLang="en-US" sz="1200" dirty="0" smtClean="0"/>
+              <a:t>아래쪽→ 선진국 중 친환경 전환 빠른　국가들</a:t>
+            </a:r>
+            <a:endParaRPr lang="en-US" altLang="ko-KR" sz="1200" dirty="0" smtClean="0"/>
           </a:p>
           <a:p>
             <a:endParaRPr lang="en-US" altLang="ko-KR" sz="1200" b="1" dirty="0">
@@ -1283,42 +976,310 @@
           </a:bodyPr>
           <a:lstStyle/>
           <a:p>
-            <a:pPr marL="0" marR="0" indent="0" algn="l" defTabSz="914400" rtl="0" eaLnBrk="1" fontAlgn="auto" latinLnBrk="1" hangingPunct="1">
-              <a:lnSpc>
-                <a:spcPct val="100000"/>
-              </a:lnSpc>
-              <a:spcBef>
-                <a:spcPts val="0"/>
-              </a:spcBef>
-              <a:spcAft>
-                <a:spcPts val="0"/>
-              </a:spcAft>
-              <a:buClrTx/>
-              <a:buSzTx/>
-              <a:buFontTx/>
-              <a:buNone/>
-              <a:tabLst/>
-              <a:defRPr/>
-            </a:pPr>
-            <a:r>
-              <a:rPr lang="ko-KR" altLang="en-US" sz="1200" dirty="0" smtClean="0"/>
-              <a:t>변수 수가 많고 군집 수 최적화</a:t>
-            </a:r>
-            <a:r>
-              <a:rPr lang="en-US" altLang="ko-KR" sz="1200" b="1" dirty="0" smtClean="0">
-                <a:latin typeface="NanumBarunGothic Light" panose="020B0603020101020101" pitchFamily="34" charset="-127"/>
-                <a:ea typeface="NanumBarunGothic Light" panose="020B0603020101020101" pitchFamily="34" charset="-127"/>
-              </a:rPr>
-              <a:t>=&gt; </a:t>
-            </a:r>
-            <a:r>
-              <a:rPr lang="ko-KR" altLang="en-US" sz="1200" b="1" dirty="0" smtClean="0">
-                <a:latin typeface="NanumBarunGothic Light" panose="020B0603020101020101" pitchFamily="34" charset="-127"/>
-                <a:ea typeface="NanumBarunGothic Light" panose="020B0603020101020101" pitchFamily="34" charset="-127"/>
-              </a:rPr>
-              <a:t>비계층적　군집분석（Ｋｍｅａｎｓ）　수행</a:t>
-            </a:r>
-            <a:endParaRPr lang="ko-KR" altLang="en-US" sz="1200" dirty="0" smtClean="0"/>
+            <a:r>
+              <a:rPr lang="ko-KR" altLang="en-US" b="1" dirty="0" smtClean="0"/>
+              <a:t>독일</a:t>
+            </a:r>
+            <a:r>
+              <a:rPr lang="en-US" altLang="ko-KR" b="1" dirty="0" smtClean="0"/>
+              <a:t>,</a:t>
+            </a:r>
+            <a:r>
+              <a:rPr lang="ko-KR" altLang="en-US" b="1" dirty="0" smtClean="0"/>
+              <a:t>영국</a:t>
+            </a:r>
+            <a:r>
+              <a:rPr lang="en-US" altLang="ko-KR" b="1" dirty="0" smtClean="0"/>
+              <a:t>,</a:t>
+            </a:r>
+            <a:r>
+              <a:rPr lang="ko-KR" altLang="en-US" b="1" dirty="0" smtClean="0"/>
+              <a:t>프랑스</a:t>
+            </a:r>
+            <a:r>
+              <a:rPr lang="en-US" altLang="ko-KR" b="1" dirty="0" smtClean="0"/>
+              <a:t>,</a:t>
+            </a:r>
+            <a:r>
+              <a:rPr lang="ko-KR" altLang="en-US" b="1" dirty="0" smtClean="0"/>
+              <a:t>이탈리아</a:t>
+            </a:r>
+            <a:endParaRPr lang="ko-KR" altLang="en-US" dirty="0" smtClean="0"/>
+          </a:p>
+          <a:p>
+            <a:r>
+              <a:rPr lang="ko-KR" altLang="en-US" b="1" dirty="0" smtClean="0"/>
+              <a:t>유럽 선진국들</a:t>
+            </a:r>
+            <a:r>
+              <a:rPr lang="ko-KR" altLang="en-US" dirty="0" smtClean="0"/>
+              <a:t>은 대부분 </a:t>
+            </a:r>
+            <a:r>
+              <a:rPr lang="ko-KR" altLang="en-US" b="1" dirty="0" smtClean="0"/>
+              <a:t>온실가스</a:t>
+            </a:r>
+            <a:r>
+              <a:rPr lang="en-US" altLang="ko-KR" b="1" dirty="0" smtClean="0"/>
+              <a:t>·</a:t>
+            </a:r>
+            <a:r>
+              <a:rPr lang="ko-KR" altLang="en-US" b="1" dirty="0" smtClean="0"/>
+              <a:t>에너지 소비량은 </a:t>
+            </a:r>
+            <a:r>
+              <a:rPr lang="ko-KR" altLang="en-US" b="1" dirty="0" err="1" smtClean="0"/>
+              <a:t>중상위</a:t>
+            </a:r>
+            <a:r>
+              <a:rPr lang="ko-KR" altLang="en-US" b="1" dirty="0" smtClean="0"/>
+              <a:t> 수준</a:t>
+            </a:r>
+            <a:r>
+              <a:rPr lang="ko-KR" altLang="en-US" dirty="0" smtClean="0"/>
+              <a:t/>
+            </a:r>
+            <a:br>
+              <a:rPr lang="ko-KR" altLang="en-US" dirty="0" smtClean="0"/>
+            </a:br>
+            <a:r>
+              <a:rPr lang="ko-KR" altLang="en-US" dirty="0" smtClean="0"/>
+              <a:t>→ </a:t>
+            </a:r>
+            <a:r>
+              <a:rPr lang="ko-KR" altLang="en-US" b="1" dirty="0" smtClean="0"/>
+              <a:t>고효율 산업구조</a:t>
+            </a:r>
+            <a:r>
+              <a:rPr lang="en-US" altLang="ko-KR" b="1" dirty="0" smtClean="0"/>
+              <a:t>, </a:t>
+            </a:r>
+            <a:r>
+              <a:rPr lang="ko-KR" altLang="en-US" b="1" dirty="0" smtClean="0"/>
+              <a:t>안정적 에너지 사용</a:t>
+            </a:r>
+            <a:r>
+              <a:rPr lang="ko-KR" altLang="en-US" dirty="0" smtClean="0"/>
+              <a:t>으로 </a:t>
+            </a:r>
+            <a:r>
+              <a:rPr lang="en-US" altLang="ko-KR" dirty="0" smtClean="0"/>
+              <a:t>PC1</a:t>
+            </a:r>
+            <a:r>
+              <a:rPr lang="ko-KR" altLang="en-US" dirty="0" smtClean="0"/>
+              <a:t>은 높고 </a:t>
+            </a:r>
+            <a:r>
+              <a:rPr lang="en-US" altLang="ko-KR" dirty="0" smtClean="0"/>
+              <a:t>PC2</a:t>
+            </a:r>
+            <a:r>
+              <a:rPr lang="ko-KR" altLang="en-US" dirty="0" smtClean="0"/>
+              <a:t>는 상대적으로 낮음</a:t>
+            </a:r>
+          </a:p>
+          <a:p>
+            <a:endParaRPr lang="en-US" altLang="ko-KR" dirty="0" smtClean="0"/>
+          </a:p>
+          <a:p>
+            <a:r>
+              <a:rPr lang="ko-KR" altLang="en-US" b="1" dirty="0" smtClean="0"/>
+              <a:t>인도</a:t>
+            </a:r>
+            <a:r>
+              <a:rPr lang="en-US" altLang="ko-KR" b="1" dirty="0" smtClean="0"/>
+              <a:t>,</a:t>
+            </a:r>
+            <a:r>
+              <a:rPr lang="ko-KR" altLang="en-US" b="1" dirty="0" smtClean="0"/>
+              <a:t>네팔</a:t>
+            </a:r>
+            <a:r>
+              <a:rPr lang="en-US" altLang="ko-KR" b="1" dirty="0" smtClean="0"/>
+              <a:t>,</a:t>
+            </a:r>
+            <a:r>
+              <a:rPr lang="ko-KR" altLang="en-US" b="1" dirty="0" smtClean="0"/>
+              <a:t>파키스탄</a:t>
+            </a:r>
+            <a:r>
+              <a:rPr lang="en-US" altLang="ko-KR" dirty="0" smtClean="0"/>
+              <a:t>, </a:t>
+            </a:r>
+            <a:r>
+              <a:rPr lang="ko-KR" altLang="en-US" b="1" dirty="0" smtClean="0"/>
+              <a:t>방글라데시　</a:t>
+            </a:r>
+            <a:r>
+              <a:rPr lang="ko-KR" altLang="en-US" dirty="0" smtClean="0"/>
+              <a:t>등 </a:t>
+            </a:r>
+            <a:r>
+              <a:rPr lang="ko-KR" altLang="en-US" b="1" dirty="0" smtClean="0"/>
+              <a:t>아시아 개발도상국</a:t>
+            </a:r>
+            <a:r>
+              <a:rPr lang="ko-KR" altLang="en-US" dirty="0" smtClean="0"/>
+              <a:t>들</a:t>
+            </a:r>
+            <a:br>
+              <a:rPr lang="ko-KR" altLang="en-US" dirty="0" smtClean="0"/>
+            </a:br>
+            <a:r>
+              <a:rPr lang="ko-KR" altLang="en-US" dirty="0" smtClean="0"/>
+              <a:t>→ 석탄 기반 에너지원 사용 비중 높음</a:t>
+            </a:r>
+            <a:endParaRPr lang="en-US" altLang="ko-KR" dirty="0" smtClean="0"/>
+          </a:p>
+          <a:p>
+            <a:endParaRPr lang="en-US" altLang="ko-KR" dirty="0" smtClean="0"/>
+          </a:p>
+          <a:p>
+            <a:r>
+              <a:rPr lang="ko-KR" altLang="en-US" dirty="0" smtClean="0"/>
+              <a:t>아프리카 국가들 </a:t>
+            </a:r>
+            <a:r>
+              <a:rPr lang="en-US" altLang="ko-KR" dirty="0" smtClean="0"/>
+              <a:t>(</a:t>
+            </a:r>
+            <a:r>
+              <a:rPr lang="ko-KR" altLang="en-US" dirty="0" err="1" smtClean="0"/>
+              <a:t>잠비아</a:t>
+            </a:r>
+            <a:r>
+              <a:rPr lang="en-US" altLang="ko-KR" dirty="0" smtClean="0"/>
+              <a:t>, </a:t>
+            </a:r>
+            <a:r>
+              <a:rPr lang="ko-KR" altLang="en-US" dirty="0" err="1" smtClean="0"/>
+              <a:t>우간다</a:t>
+            </a:r>
+            <a:r>
+              <a:rPr lang="ko-KR" altLang="en-US" dirty="0" smtClean="0"/>
+              <a:t> 등</a:t>
+            </a:r>
+            <a:r>
+              <a:rPr lang="en-US" altLang="ko-KR" dirty="0" smtClean="0"/>
+              <a:t>), </a:t>
+            </a:r>
+            <a:r>
+              <a:rPr lang="ko-KR" altLang="en-US" dirty="0" smtClean="0"/>
+              <a:t>소국들</a:t>
+            </a:r>
+            <a:r>
+              <a:rPr lang="en-US" altLang="ko-KR" dirty="0" smtClean="0"/>
+              <a:t>(</a:t>
+            </a:r>
+            <a:r>
+              <a:rPr lang="ko-KR" altLang="en-US" dirty="0" smtClean="0"/>
+              <a:t>피지</a:t>
+            </a:r>
+            <a:r>
+              <a:rPr lang="en-US" altLang="ko-KR" dirty="0" smtClean="0"/>
+              <a:t>, </a:t>
+            </a:r>
+            <a:r>
+              <a:rPr lang="ko-KR" altLang="en-US" dirty="0" err="1" smtClean="0"/>
+              <a:t>통가</a:t>
+            </a:r>
+            <a:r>
+              <a:rPr lang="ko-KR" altLang="en-US" dirty="0" smtClean="0"/>
+              <a:t> 등</a:t>
+            </a:r>
+            <a:r>
+              <a:rPr lang="en-US" altLang="ko-KR" dirty="0" smtClean="0"/>
+              <a:t>)</a:t>
+            </a:r>
+            <a:br>
+              <a:rPr lang="en-US" altLang="ko-KR" dirty="0" smtClean="0"/>
+            </a:br>
+            <a:r>
+              <a:rPr lang="en-US" altLang="ko-KR" dirty="0" smtClean="0"/>
+              <a:t>→ </a:t>
+            </a:r>
+            <a:r>
+              <a:rPr lang="ko-KR" altLang="en-US" b="1" dirty="0" smtClean="0"/>
+              <a:t>에너지 사용 총량 낮음 </a:t>
+            </a:r>
+            <a:r>
+              <a:rPr lang="en-US" altLang="ko-KR" b="1" dirty="0" smtClean="0"/>
+              <a:t>+ </a:t>
+            </a:r>
+            <a:r>
+              <a:rPr lang="ko-KR" altLang="en-US" b="1" dirty="0" smtClean="0"/>
+              <a:t>에너지원 구성이 다양하지 않음</a:t>
+            </a:r>
+            <a:endParaRPr lang="en-US" altLang="ko-KR" b="1" dirty="0" smtClean="0"/>
+          </a:p>
+          <a:p>
+            <a:endParaRPr lang="en-US" altLang="ko-KR" b="1" dirty="0" smtClean="0"/>
+          </a:p>
+          <a:p>
+            <a:r>
+              <a:rPr lang="ko-KR" altLang="en-US" b="1" dirty="0" smtClean="0"/>
+              <a:t>사우디아라비아</a:t>
+            </a:r>
+            <a:r>
+              <a:rPr lang="en-US" altLang="ko-KR" dirty="0" smtClean="0"/>
+              <a:t>, </a:t>
+            </a:r>
+            <a:r>
+              <a:rPr lang="ko-KR" altLang="en-US" b="1" dirty="0" smtClean="0"/>
+              <a:t>러시아</a:t>
+            </a:r>
+            <a:r>
+              <a:rPr lang="en-US" altLang="ko-KR" dirty="0" smtClean="0"/>
+              <a:t>, </a:t>
+            </a:r>
+            <a:r>
+              <a:rPr lang="ko-KR" altLang="en-US" b="1" dirty="0" smtClean="0"/>
+              <a:t>카타르 </a:t>
+            </a:r>
+            <a:r>
+              <a:rPr lang="ko-KR" altLang="en-US" dirty="0" smtClean="0"/>
+              <a:t>등</a:t>
+            </a:r>
+            <a:br>
+              <a:rPr lang="ko-KR" altLang="en-US" dirty="0" smtClean="0"/>
+            </a:br>
+            <a:r>
+              <a:rPr lang="ko-KR" altLang="en-US" dirty="0" smtClean="0"/>
+              <a:t>→ </a:t>
+            </a:r>
+            <a:r>
+              <a:rPr lang="ko-KR" altLang="en-US" b="1" dirty="0" smtClean="0"/>
+              <a:t>석유</a:t>
+            </a:r>
+            <a:r>
+              <a:rPr lang="en-US" altLang="ko-KR" b="1" dirty="0" smtClean="0"/>
+              <a:t>·</a:t>
+            </a:r>
+            <a:r>
+              <a:rPr lang="ko-KR" altLang="en-US" b="1" dirty="0" smtClean="0"/>
+              <a:t>가스 중심 국가들</a:t>
+            </a:r>
+            <a:r>
+              <a:rPr lang="ko-KR" altLang="en-US" dirty="0" smtClean="0"/>
+              <a:t> → 석탄</a:t>
+            </a:r>
+            <a:r>
+              <a:rPr lang="en-US" altLang="ko-KR" dirty="0" smtClean="0"/>
+              <a:t>·</a:t>
+            </a:r>
+            <a:r>
+              <a:rPr lang="ko-KR" altLang="en-US" dirty="0" smtClean="0"/>
+              <a:t>시멘트 비중은 낮음</a:t>
+            </a:r>
+            <a:r>
+              <a:rPr lang="en-US" altLang="ko-KR" dirty="0" smtClean="0"/>
+              <a:t>, </a:t>
+            </a:r>
+            <a:r>
+              <a:rPr lang="ko-KR" altLang="en-US" dirty="0" smtClean="0"/>
+              <a:t>상대적으로 청정연료 기반 많음</a:t>
+            </a:r>
           </a:p>
           <a:p>
             <a:endParaRPr lang="en-US" altLang="ko-KR" sz="1200" b="1" dirty="0">
@@ -1405,7 +1366,47 @@
           </a:bodyPr>
           <a:lstStyle/>
           <a:p>
-            <a:endParaRPr lang="ko-KR" altLang="en-US" dirty="0"/>
+            <a:pPr marL="0" marR="0" indent="0" algn="l" defTabSz="914400" rtl="0" eaLnBrk="1" fontAlgn="auto" latinLnBrk="1" hangingPunct="1">
+              <a:lnSpc>
+                <a:spcPct val="100000"/>
+              </a:lnSpc>
+              <a:spcBef>
+                <a:spcPts val="0"/>
+              </a:spcBef>
+              <a:spcAft>
+                <a:spcPts val="0"/>
+              </a:spcAft>
+              <a:buClrTx/>
+              <a:buSzTx/>
+              <a:buFontTx/>
+              <a:buNone/>
+              <a:tabLst/>
+              <a:defRPr/>
+            </a:pPr>
+            <a:r>
+              <a:rPr lang="ko-KR" altLang="en-US" sz="1200" dirty="0" smtClean="0"/>
+              <a:t>변수 수가 많고 군집 수 최적화</a:t>
+            </a:r>
+            <a:r>
+              <a:rPr lang="en-US" altLang="ko-KR" sz="1200" b="1" dirty="0" smtClean="0">
+                <a:latin typeface="NanumBarunGothic Light" panose="020B0603020101020101" pitchFamily="34" charset="-127"/>
+                <a:ea typeface="NanumBarunGothic Light" panose="020B0603020101020101" pitchFamily="34" charset="-127"/>
+              </a:rPr>
+              <a:t>=&gt; </a:t>
+            </a:r>
+            <a:r>
+              <a:rPr lang="ko-KR" altLang="en-US" sz="1200" b="1" dirty="0" smtClean="0">
+                <a:latin typeface="NanumBarunGothic Light" panose="020B0603020101020101" pitchFamily="34" charset="-127"/>
+                <a:ea typeface="NanumBarunGothic Light" panose="020B0603020101020101" pitchFamily="34" charset="-127"/>
+              </a:rPr>
+              <a:t>비계층적　군집분석（Ｋｍｅａｎｓ）　수행</a:t>
+            </a:r>
+            <a:endParaRPr lang="ko-KR" altLang="en-US" sz="1200" dirty="0" smtClean="0"/>
+          </a:p>
+          <a:p>
+            <a:endParaRPr lang="en-US" altLang="ko-KR" sz="1200" b="1" dirty="0">
+              <a:latin typeface="+mn-ea"/>
+            </a:endParaRPr>
           </a:p>
         </p:txBody>
       </p:sp>
@@ -1487,117 +1488,7 @@
           </a:bodyPr>
           <a:lstStyle/>
           <a:p>
-            <a:r>
-              <a:rPr lang="ko-KR" altLang="en-US" dirty="0" smtClean="0"/>
-              <a:t>실루엣계수는 </a:t>
-            </a:r>
-            <a:r>
-              <a:rPr lang="en-US" altLang="ko-KR" dirty="0" smtClean="0"/>
-              <a:t>1</a:t>
-            </a:r>
-            <a:r>
-              <a:rPr lang="ko-KR" altLang="en-US" dirty="0" smtClean="0"/>
-              <a:t>에 가까울수록</a:t>
-            </a:r>
-            <a:r>
-              <a:rPr lang="en-US" altLang="ko-KR" dirty="0" smtClean="0"/>
-              <a:t>, SSE(</a:t>
-            </a:r>
-            <a:r>
-              <a:rPr lang="ko-KR" altLang="en-US" dirty="0" err="1" smtClean="0"/>
-              <a:t>군집내</a:t>
-            </a:r>
-            <a:r>
-              <a:rPr lang="ko-KR" altLang="en-US" dirty="0" smtClean="0"/>
-              <a:t> </a:t>
-            </a:r>
-            <a:r>
-              <a:rPr lang="ko-KR" altLang="en-US" dirty="0" err="1" smtClean="0"/>
-              <a:t>제곱합</a:t>
-            </a:r>
-            <a:r>
-              <a:rPr lang="en-US" altLang="ko-KR" dirty="0" smtClean="0"/>
-              <a:t>)E</a:t>
-            </a:r>
-            <a:r>
-              <a:rPr lang="ko-KR" altLang="en-US" dirty="0" smtClean="0"/>
-              <a:t>는 작을수록 좋은데 적절한 부분이 군집수가 </a:t>
-            </a:r>
-            <a:r>
-              <a:rPr lang="en-US" altLang="ko-KR" dirty="0" smtClean="0"/>
-              <a:t>4,8</a:t>
-            </a:r>
-            <a:r>
-              <a:rPr lang="ko-KR" altLang="en-US" dirty="0" smtClean="0"/>
-              <a:t>일 때 </a:t>
-            </a:r>
-            <a:r>
-              <a:rPr lang="en-US" altLang="ko-KR" dirty="0" smtClean="0"/>
-              <a:t>2</a:t>
-            </a:r>
-            <a:r>
-              <a:rPr lang="ko-KR" altLang="en-US" dirty="0" smtClean="0"/>
-              <a:t>군데 보임</a:t>
-            </a:r>
-            <a:endParaRPr lang="en-US" altLang="ko-KR" dirty="0" smtClean="0"/>
-          </a:p>
-          <a:p>
-            <a:r>
-              <a:rPr lang="ko-KR" altLang="en-US" dirty="0" err="1" smtClean="0"/>
-              <a:t>앞서한</a:t>
-            </a:r>
-            <a:r>
-              <a:rPr lang="ko-KR" altLang="en-US" dirty="0" smtClean="0"/>
-              <a:t> </a:t>
-            </a:r>
-            <a:r>
-              <a:rPr lang="en-US" altLang="ko-KR" dirty="0" err="1" smtClean="0"/>
-              <a:t>Cnvalidity</a:t>
-            </a:r>
-            <a:r>
-              <a:rPr lang="ko-KR" altLang="en-US" dirty="0" smtClean="0"/>
-              <a:t>와도 일치</a:t>
-            </a:r>
-            <a:endParaRPr lang="en-US" altLang="ko-KR" dirty="0" smtClean="0"/>
-          </a:p>
-          <a:p>
-            <a:r>
-              <a:rPr lang="ko-KR" altLang="en-US" dirty="0" smtClean="0"/>
-              <a:t>하지만 군집수가 </a:t>
-            </a:r>
-            <a:r>
-              <a:rPr lang="en-US" altLang="ko-KR" dirty="0" smtClean="0"/>
-              <a:t>9</a:t>
-            </a:r>
-            <a:r>
-              <a:rPr lang="ko-KR" altLang="en-US" dirty="0" smtClean="0"/>
-              <a:t>일 때는 실루엣 계수가 </a:t>
-            </a:r>
-            <a:r>
-              <a:rPr lang="en-US" altLang="ko-KR" dirty="0" smtClean="0"/>
-              <a:t>0.5</a:t>
-            </a:r>
-            <a:r>
-              <a:rPr lang="ko-KR" altLang="en-US" dirty="0" smtClean="0"/>
-              <a:t>보다도 낮아 </a:t>
-            </a:r>
-            <a:r>
-              <a:rPr lang="ko-KR" altLang="en-US" dirty="0" err="1" smtClean="0"/>
-              <a:t>군집수</a:t>
-            </a:r>
-            <a:r>
-              <a:rPr lang="ko-KR" altLang="en-US" dirty="0" smtClean="0"/>
-              <a:t> </a:t>
-            </a:r>
-            <a:r>
-              <a:rPr lang="en-US" altLang="ko-KR" dirty="0" smtClean="0"/>
-              <a:t>4</a:t>
-            </a:r>
-            <a:r>
-              <a:rPr lang="ko-KR" altLang="en-US" dirty="0" smtClean="0"/>
-              <a:t>인 경우만 진행해보기로 함 </a:t>
-            </a:r>
-            <a:endParaRPr lang="en-US" altLang="ko-KR" dirty="0" smtClean="0"/>
+            <a:endParaRPr lang="ko-KR" altLang="en-US" dirty="0"/>
           </a:p>
         </p:txBody>
       </p:sp>
@@ -1619,7 +1510,7 @@
             <a:fld id="{8F9ABC49-ED13-4F77-8E53-C82C693642DC}" type="slidenum">
               <a:rPr lang="ko-KR" altLang="en-US" smtClean="0"/>
               <a:pPr/>
-              <a:t>25</a:t>
+              <a:t>24</a:t>
             </a:fld>
             <a:endParaRPr lang="ko-KR" altLang="en-US"/>
           </a:p>
@@ -1681,19 +1572,23 @@
           <a:p>
             <a:r>
               <a:rPr lang="ko-KR" altLang="en-US" dirty="0" smtClean="0"/>
-              <a:t>명확한 해석을 위해 중심화된 </a:t>
+              <a:t>실루엣계수는 </a:t>
+            </a:r>
+            <a:r>
+              <a:rPr lang="en-US" altLang="ko-KR" dirty="0" smtClean="0"/>
+              <a:t>1</a:t>
+            </a:r>
+            <a:r>
+              <a:rPr lang="ko-KR" altLang="en-US" dirty="0" smtClean="0"/>
+              <a:t>에 가까울수록</a:t>
+            </a:r>
+            <a:r>
+              <a:rPr lang="en-US" altLang="ko-KR" dirty="0" smtClean="0"/>
+              <a:t>, SSE(</a:t>
             </a:r>
             <a:r>
               <a:rPr lang="ko-KR" altLang="en-US" dirty="0" err="1" smtClean="0"/>
-              <a:t>변화량</a:t>
-            </a:r>
-            <a:r>
-              <a:rPr lang="ko-KR" altLang="en-US" dirty="0" smtClean="0"/>
-              <a:t> 데이터와 주성분 </a:t>
-            </a:r>
-            <a:r>
-              <a:rPr lang="ko-KR" altLang="en-US" dirty="0" err="1" smtClean="0"/>
-              <a:t>적재값을</a:t>
+              <a:t>군집내</a:t>
             </a:r>
             <a:r>
               <a:rPr lang="ko-KR" altLang="en-US" dirty="0" smtClean="0"/>
@@ -1701,13 +1596,91 @@
             </a:r>
             <a:r>
               <a:rPr lang="ko-KR" altLang="en-US" dirty="0" err="1" smtClean="0"/>
-              <a:t>내적하여</a:t>
+              <a:t>제곱합</a:t>
+            </a:r>
+            <a:r>
+              <a:rPr lang="en-US" altLang="ko-KR" dirty="0" smtClean="0"/>
+              <a:t>)E</a:t>
             </a:r>
             <a:r>
               <a:rPr lang="ko-KR" altLang="en-US" dirty="0" smtClean="0"/>
-              <a:t> 주성분 점수 표 생성</a:t>
-            </a:r>
-            <a:endParaRPr lang="ko-KR" altLang="en-US" dirty="0"/>
+              <a:t>는 작을수록 좋은데 적절한 부분이 군집수가 </a:t>
+            </a:r>
+            <a:r>
+              <a:rPr lang="en-US" altLang="ko-KR" dirty="0" smtClean="0"/>
+              <a:t>4,8</a:t>
+            </a:r>
+            <a:r>
+              <a:rPr lang="ko-KR" altLang="en-US" dirty="0" smtClean="0"/>
+              <a:t>일 때 </a:t>
+            </a:r>
+            <a:r>
+              <a:rPr lang="en-US" altLang="ko-KR" dirty="0" smtClean="0"/>
+              <a:t>2</a:t>
+            </a:r>
+            <a:r>
+              <a:rPr lang="ko-KR" altLang="en-US" dirty="0" smtClean="0"/>
+              <a:t>군데 보임</a:t>
+            </a:r>
+            <a:endParaRPr lang="en-US" altLang="ko-KR" dirty="0" smtClean="0"/>
+          </a:p>
+          <a:p>
+            <a:r>
+              <a:rPr lang="ko-KR" altLang="en-US" dirty="0" err="1" smtClean="0"/>
+              <a:t>앞서한</a:t>
+            </a:r>
+            <a:r>
+              <a:rPr lang="ko-KR" altLang="en-US" dirty="0" smtClean="0"/>
+              <a:t> </a:t>
+            </a:r>
+            <a:r>
+              <a:rPr lang="en-US" altLang="ko-KR" dirty="0" err="1" smtClean="0"/>
+              <a:t>Cnvalidity</a:t>
+            </a:r>
+            <a:r>
+              <a:rPr lang="ko-KR" altLang="en-US" dirty="0" smtClean="0"/>
+              <a:t>와도 일치</a:t>
+            </a:r>
+            <a:endParaRPr lang="en-US" altLang="ko-KR" dirty="0" smtClean="0"/>
+          </a:p>
+          <a:p>
+            <a:r>
+              <a:rPr lang="ko-KR" altLang="en-US" dirty="0" smtClean="0"/>
+              <a:t>하지만 군집수가 </a:t>
+            </a:r>
+            <a:r>
+              <a:rPr lang="en-US" altLang="ko-KR" dirty="0" smtClean="0"/>
+              <a:t>9</a:t>
+            </a:r>
+            <a:r>
+              <a:rPr lang="ko-KR" altLang="en-US" dirty="0" smtClean="0"/>
+              <a:t>일 때는 실루엣 계수가 </a:t>
+            </a:r>
+            <a:r>
+              <a:rPr lang="en-US" altLang="ko-KR" dirty="0" smtClean="0"/>
+              <a:t>0.5</a:t>
+            </a:r>
+            <a:r>
+              <a:rPr lang="ko-KR" altLang="en-US" dirty="0" smtClean="0"/>
+              <a:t>보다도 낮아 </a:t>
+            </a:r>
+            <a:r>
+              <a:rPr lang="ko-KR" altLang="en-US" dirty="0" err="1" smtClean="0"/>
+              <a:t>군집수</a:t>
+            </a:r>
+            <a:r>
+              <a:rPr lang="ko-KR" altLang="en-US" dirty="0" smtClean="0"/>
+              <a:t> </a:t>
+            </a:r>
+            <a:r>
+              <a:rPr lang="en-US" altLang="ko-KR" dirty="0" smtClean="0"/>
+              <a:t>4</a:t>
+            </a:r>
+            <a:r>
+              <a:rPr lang="ko-KR" altLang="en-US" dirty="0" smtClean="0"/>
+              <a:t>인 경우만 진행해보기로 함 </a:t>
+            </a:r>
+            <a:endParaRPr lang="en-US" altLang="ko-KR" dirty="0" smtClean="0"/>
           </a:p>
         </p:txBody>
       </p:sp>
@@ -1729,7 +1702,7 @@
             <a:fld id="{8F9ABC49-ED13-4F77-8E53-C82C693642DC}" type="slidenum">
               <a:rPr lang="ko-KR" altLang="en-US" smtClean="0"/>
               <a:pPr/>
-              <a:t>27</a:t>
+              <a:t>26</a:t>
             </a:fld>
             <a:endParaRPr lang="ko-KR" altLang="en-US"/>
           </a:p>
@@ -1785,427 +1758,38 @@
         <p:spPr/>
         <p:txBody>
           <a:bodyPr>
-            <a:normAutofit fontScale="92500" lnSpcReduction="20000"/>
+            <a:normAutofit/>
           </a:bodyPr>
           <a:lstStyle/>
           <a:p>
             <a:r>
-              <a:rPr lang="en-US" altLang="ko-KR" b="1" dirty="0" smtClean="0"/>
-              <a:t>Cluster 1</a:t>
-            </a:r>
-            <a:r>
               <a:rPr lang="ko-KR" altLang="en-US" dirty="0" smtClean="0"/>
-              <a:t>은 </a:t>
-            </a:r>
-            <a:r>
-              <a:rPr lang="ko-KR" altLang="en-US" i="1" dirty="0" smtClean="0"/>
-              <a:t>중국 단독 클러스터</a:t>
+              <a:t>명확한 해석을 위해 중심화된 </a:t>
+            </a:r>
+            <a:r>
+              <a:rPr lang="ko-KR" altLang="en-US" dirty="0" err="1" smtClean="0"/>
+              <a:t>변화량</a:t>
             </a:r>
             <a:r>
               <a:rPr lang="ko-KR" altLang="en-US" dirty="0" smtClean="0"/>
-              <a:t>입니다</a:t>
-            </a:r>
-            <a:r>
-              <a:rPr lang="en-US" altLang="ko-KR" dirty="0" smtClean="0"/>
-              <a:t>.</a:t>
-            </a:r>
-            <a:br>
-              <a:rPr lang="en-US" altLang="ko-KR" dirty="0" smtClean="0"/>
-            </a:br>
+              <a:t> 데이터와 주성분 </a:t>
+            </a:r>
+            <a:r>
+              <a:rPr lang="ko-KR" altLang="en-US" dirty="0" err="1" smtClean="0"/>
+              <a:t>적재값을</a:t>
+            </a:r>
             <a:r>
               <a:rPr lang="ko-KR" altLang="en-US" dirty="0" smtClean="0"/>
-              <a:t>중국은 최근 </a:t>
-            </a:r>
-            <a:r>
-              <a:rPr lang="en-US" altLang="ko-KR" dirty="0" smtClean="0"/>
-              <a:t>20</a:t>
+              <a:t> </a:t>
+            </a:r>
+            <a:r>
+              <a:rPr lang="ko-KR" altLang="en-US" dirty="0" err="1" smtClean="0"/>
+              <a:t>내적하여</a:t>
             </a:r>
             <a:r>
               <a:rPr lang="ko-KR" altLang="en-US" dirty="0" smtClean="0"/>
-              <a:t>년간 에너지 소비와 온실가스 배출이 압도적으로 증가했으며</a:t>
-            </a:r>
-            <a:r>
-              <a:rPr lang="en-US" altLang="ko-KR" dirty="0" smtClean="0"/>
-              <a:t>, </a:t>
-            </a:r>
-            <a:r>
-              <a:rPr lang="ko-KR" altLang="en-US" dirty="0" smtClean="0"/>
-              <a:t>특히 석탄 기반 에너지원 사용 비중이 높아지는 특징을 보입니다</a:t>
-            </a:r>
-            <a:r>
-              <a:rPr lang="en-US" altLang="ko-KR" dirty="0" smtClean="0"/>
-              <a:t>.</a:t>
-            </a:r>
-            <a:br>
-              <a:rPr lang="en-US" altLang="ko-KR" dirty="0" smtClean="0"/>
-            </a:br>
-            <a:r>
-              <a:rPr lang="ko-KR" altLang="en-US" dirty="0" smtClean="0"/>
-              <a:t>또한</a:t>
-            </a:r>
-            <a:r>
-              <a:rPr lang="en-US" altLang="ko-KR" dirty="0" smtClean="0"/>
-              <a:t>, 1</a:t>
-            </a:r>
-            <a:r>
-              <a:rPr lang="ko-KR" altLang="en-US" dirty="0" smtClean="0"/>
-              <a:t>인당 배출량도 높은 수준입니다</a:t>
-            </a:r>
-            <a:r>
-              <a:rPr lang="en-US" altLang="ko-KR" dirty="0" smtClean="0"/>
-              <a:t>.</a:t>
-            </a:r>
-            <a:br>
-              <a:rPr lang="en-US" altLang="ko-KR" dirty="0" smtClean="0"/>
-            </a:br>
-            <a:r>
-              <a:rPr lang="ko-KR" altLang="en-US" dirty="0" smtClean="0"/>
-              <a:t>이러한 극단적인 변화로 인해 다른 국가들과 구별되어 단독 클러스터로 형성되었습니다</a:t>
-            </a:r>
-            <a:r>
-              <a:rPr lang="en-US" altLang="ko-KR" dirty="0" smtClean="0"/>
-              <a:t>.</a:t>
-            </a:r>
-          </a:p>
-          <a:p>
-            <a:r>
-              <a:rPr lang="en-US" altLang="ko-KR" b="1" dirty="0" smtClean="0"/>
-              <a:t>Cluster 2</a:t>
-            </a:r>
-            <a:r>
-              <a:rPr lang="ko-KR" altLang="en-US" dirty="0" smtClean="0"/>
-              <a:t>는 </a:t>
-            </a:r>
-            <a:r>
-              <a:rPr lang="ko-KR" altLang="en-US" i="1" dirty="0" smtClean="0"/>
-              <a:t>가장 많은 국가가 포함된 클러스터</a:t>
-            </a:r>
-            <a:r>
-              <a:rPr lang="ko-KR" altLang="en-US" dirty="0" smtClean="0"/>
-              <a:t>입니다</a:t>
-            </a:r>
-            <a:r>
-              <a:rPr lang="en-US" altLang="ko-KR" dirty="0" smtClean="0"/>
-              <a:t>.</a:t>
-            </a:r>
-            <a:br>
-              <a:rPr lang="en-US" altLang="ko-KR" dirty="0" smtClean="0"/>
-            </a:br>
-            <a:r>
-              <a:rPr lang="ko-KR" altLang="en-US" dirty="0" smtClean="0"/>
-              <a:t>유럽 선진국</a:t>
-            </a:r>
-            <a:r>
-              <a:rPr lang="en-US" altLang="ko-KR" dirty="0" smtClean="0"/>
-              <a:t>, </a:t>
-            </a:r>
-            <a:r>
-              <a:rPr lang="ko-KR" altLang="en-US" dirty="0" smtClean="0"/>
-              <a:t>일본</a:t>
-            </a:r>
-            <a:r>
-              <a:rPr lang="en-US" altLang="ko-KR" dirty="0" smtClean="0"/>
-              <a:t>, </a:t>
-            </a:r>
-            <a:r>
-              <a:rPr lang="ko-KR" altLang="en-US" dirty="0" smtClean="0"/>
-              <a:t>한국</a:t>
-            </a:r>
-            <a:r>
-              <a:rPr lang="en-US" altLang="ko-KR" dirty="0" smtClean="0"/>
-              <a:t>, </a:t>
-            </a:r>
-            <a:r>
-              <a:rPr lang="ko-KR" altLang="en-US" dirty="0" smtClean="0"/>
-              <a:t>그 외 다양한 개발도상국들이 포함됩니다</a:t>
-            </a:r>
-            <a:r>
-              <a:rPr lang="en-US" altLang="ko-KR" dirty="0" smtClean="0"/>
-              <a:t>.</a:t>
-            </a:r>
-            <a:br>
-              <a:rPr lang="en-US" altLang="ko-KR" dirty="0" smtClean="0"/>
-            </a:br>
-            <a:r>
-              <a:rPr lang="ko-KR" altLang="en-US" dirty="0" smtClean="0"/>
-              <a:t>이 클러스터는 전반적으로 에너지 소비와 온실가스 배출 변화량이 크지 않고 안정적인 국가들입니다</a:t>
-            </a:r>
-            <a:r>
-              <a:rPr lang="en-US" altLang="ko-KR" dirty="0" smtClean="0"/>
-              <a:t>.</a:t>
-            </a:r>
-            <a:br>
-              <a:rPr lang="en-US" altLang="ko-KR" dirty="0" smtClean="0"/>
-            </a:br>
-            <a:r>
-              <a:rPr lang="ko-KR" altLang="en-US" dirty="0" smtClean="0"/>
-              <a:t>또한</a:t>
-            </a:r>
-            <a:r>
-              <a:rPr lang="en-US" altLang="ko-KR" dirty="0" smtClean="0"/>
-              <a:t>, </a:t>
-            </a:r>
-            <a:r>
-              <a:rPr lang="ko-KR" altLang="en-US" dirty="0" smtClean="0"/>
-              <a:t>석탄 사용이 약간 증가하긴 했지만 전체적으로 큰 변화 없이 정책적 관리가 잘 이루어지고 있는 국가군입니다</a:t>
-            </a:r>
-            <a:r>
-              <a:rPr lang="en-US" altLang="ko-KR" dirty="0" smtClean="0"/>
-              <a:t>.</a:t>
-            </a:r>
-          </a:p>
-          <a:p>
-            <a:r>
-              <a:rPr lang="en-US" altLang="ko-KR" b="1" dirty="0" smtClean="0"/>
-              <a:t>Cluster 3</a:t>
-            </a:r>
-            <a:r>
-              <a:rPr lang="ko-KR" altLang="en-US" dirty="0" smtClean="0"/>
-              <a:t>는 </a:t>
-            </a:r>
-            <a:r>
-              <a:rPr lang="ko-KR" altLang="en-US" i="1" dirty="0" smtClean="0"/>
-              <a:t>브라질</a:t>
-            </a:r>
-            <a:r>
-              <a:rPr lang="en-US" altLang="ko-KR" i="1" dirty="0" smtClean="0"/>
-              <a:t>, </a:t>
-            </a:r>
-            <a:r>
-              <a:rPr lang="ko-KR" altLang="en-US" i="1" dirty="0" smtClean="0"/>
-              <a:t>인도</a:t>
-            </a:r>
-            <a:r>
-              <a:rPr lang="en-US" altLang="ko-KR" i="1" dirty="0" smtClean="0"/>
-              <a:t>, </a:t>
-            </a:r>
-            <a:r>
-              <a:rPr lang="ko-KR" altLang="en-US" i="1" dirty="0" smtClean="0"/>
-              <a:t>사우디아라비아</a:t>
-            </a:r>
-            <a:r>
-              <a:rPr lang="en-US" altLang="ko-KR" i="1" dirty="0" smtClean="0"/>
-              <a:t>, </a:t>
-            </a:r>
-            <a:r>
-              <a:rPr lang="ko-KR" altLang="en-US" i="1" dirty="0" smtClean="0"/>
-              <a:t>카타르</a:t>
-            </a:r>
-            <a:r>
-              <a:rPr lang="en-US" altLang="ko-KR" i="1" dirty="0" smtClean="0"/>
-              <a:t>, </a:t>
-            </a:r>
-            <a:r>
-              <a:rPr lang="ko-KR" altLang="en-US" i="1" dirty="0" smtClean="0"/>
-              <a:t>아랍에미리트</a:t>
-            </a:r>
-            <a:r>
-              <a:rPr lang="ko-KR" altLang="en-US" dirty="0" smtClean="0"/>
-              <a:t> 등 에너지 수출국과 개발도상국들이 주로 포함되어 있습니다</a:t>
-            </a:r>
-            <a:r>
-              <a:rPr lang="en-US" altLang="ko-KR" dirty="0" smtClean="0"/>
-              <a:t>.</a:t>
-            </a:r>
-            <a:br>
-              <a:rPr lang="en-US" altLang="ko-KR" dirty="0" smtClean="0"/>
-            </a:br>
-            <a:r>
-              <a:rPr lang="ko-KR" altLang="en-US" dirty="0" smtClean="0"/>
-              <a:t>이 국가들은 최근 에너지 소비와 배출량이 증가하는 추세이며</a:t>
-            </a:r>
-            <a:r>
-              <a:rPr lang="en-US" altLang="ko-KR" dirty="0" smtClean="0"/>
-              <a:t>, </a:t>
-            </a:r>
-            <a:r>
-              <a:rPr lang="ko-KR" altLang="en-US" dirty="0" smtClean="0"/>
-              <a:t>특히 석유</a:t>
-            </a:r>
-            <a:r>
-              <a:rPr lang="en-US" altLang="ko-KR" dirty="0" smtClean="0"/>
-              <a:t>·</a:t>
-            </a:r>
-            <a:r>
-              <a:rPr lang="ko-KR" altLang="en-US" dirty="0" smtClean="0"/>
-              <a:t>가스 기반 에너지 사용이 많이 증가한 특징을 보입니다</a:t>
-            </a:r>
-            <a:r>
-              <a:rPr lang="en-US" altLang="ko-KR" dirty="0" smtClean="0"/>
-              <a:t>.</a:t>
-            </a:r>
-            <a:br>
-              <a:rPr lang="en-US" altLang="ko-KR" dirty="0" smtClean="0"/>
-            </a:br>
-            <a:r>
-              <a:rPr lang="ko-KR" altLang="en-US" dirty="0" smtClean="0"/>
-              <a:t>반면</a:t>
-            </a:r>
-            <a:r>
-              <a:rPr lang="en-US" altLang="ko-KR" dirty="0" smtClean="0"/>
-              <a:t>, 1</a:t>
-            </a:r>
-            <a:r>
-              <a:rPr lang="ko-KR" altLang="en-US" dirty="0" smtClean="0"/>
-              <a:t>인당 배출량은 오히려 증가한 국가들이 많아 효율성 측면에서는 상대적으로 낮은 편입니다</a:t>
-            </a:r>
-            <a:r>
-              <a:rPr lang="en-US" altLang="ko-KR" dirty="0" smtClean="0"/>
-              <a:t>.</a:t>
-            </a:r>
-          </a:p>
-          <a:p>
-            <a:r>
-              <a:rPr lang="en-US" altLang="ko-KR" b="1" dirty="0" smtClean="0"/>
-              <a:t>Cluster 4</a:t>
-            </a:r>
-            <a:r>
-              <a:rPr lang="ko-KR" altLang="en-US" dirty="0" smtClean="0"/>
-              <a:t>는 </a:t>
-            </a:r>
-            <a:r>
-              <a:rPr lang="ko-KR" altLang="en-US" i="1" dirty="0" smtClean="0"/>
-              <a:t>미국 단독 클러스터</a:t>
-            </a:r>
-            <a:r>
-              <a:rPr lang="ko-KR" altLang="en-US" dirty="0" smtClean="0"/>
-              <a:t>입니다</a:t>
-            </a:r>
-            <a:r>
-              <a:rPr lang="en-US" altLang="ko-KR" dirty="0" smtClean="0"/>
-              <a:t>.</a:t>
-            </a:r>
-            <a:br>
-              <a:rPr lang="en-US" altLang="ko-KR" dirty="0" smtClean="0"/>
-            </a:br>
-            <a:r>
-              <a:rPr lang="ko-KR" altLang="en-US" dirty="0" smtClean="0"/>
-              <a:t>미국은 전체 에너지 소비와 온실가스 배출이 증가한 국가이지만</a:t>
-            </a:r>
-            <a:r>
-              <a:rPr lang="en-US" altLang="ko-KR" dirty="0" smtClean="0"/>
-              <a:t>, </a:t>
-            </a:r>
-            <a:r>
-              <a:rPr lang="ko-KR" altLang="en-US" dirty="0" smtClean="0"/>
-              <a:t>에너지 효율화 정책으로 인해 </a:t>
-            </a:r>
-            <a:r>
-              <a:rPr lang="en-US" altLang="ko-KR" dirty="0" smtClean="0"/>
-              <a:t>1</a:t>
-            </a:r>
-            <a:r>
-              <a:rPr lang="ko-KR" altLang="en-US" dirty="0" smtClean="0"/>
-              <a:t>인당 배출량은 오히려 감소한 특징을 보입니다</a:t>
-            </a:r>
-            <a:r>
-              <a:rPr lang="en-US" altLang="ko-KR" dirty="0" smtClean="0"/>
-              <a:t>.</a:t>
-            </a:r>
-            <a:br>
-              <a:rPr lang="en-US" altLang="ko-KR" dirty="0" smtClean="0"/>
-            </a:br>
-            <a:r>
-              <a:rPr lang="ko-KR" altLang="en-US" dirty="0" smtClean="0"/>
-              <a:t>또한</a:t>
-            </a:r>
-            <a:r>
-              <a:rPr lang="en-US" altLang="ko-KR" dirty="0" smtClean="0"/>
-              <a:t>, </a:t>
-            </a:r>
-            <a:r>
-              <a:rPr lang="ko-KR" altLang="en-US" dirty="0" smtClean="0"/>
-              <a:t>석유</a:t>
-            </a:r>
-            <a:r>
-              <a:rPr lang="en-US" altLang="ko-KR" dirty="0" smtClean="0"/>
-              <a:t>·</a:t>
-            </a:r>
-            <a:r>
-              <a:rPr lang="ko-KR" altLang="en-US" dirty="0" smtClean="0"/>
-              <a:t>가스</a:t>
-            </a:r>
-            <a:r>
-              <a:rPr lang="en-US" altLang="ko-KR" dirty="0" smtClean="0"/>
-              <a:t>·</a:t>
-            </a:r>
-            <a:r>
-              <a:rPr lang="ko-KR" altLang="en-US" dirty="0" smtClean="0"/>
-              <a:t>원자력 기반 에너지 사용이 증가하면서 독자적인 에너지 구조를 보이기 때문에 단독 클러스터로 분류되었습니다</a:t>
-            </a:r>
-            <a:r>
-              <a:rPr lang="en-US" altLang="ko-KR" dirty="0" smtClean="0"/>
-              <a:t>.</a:t>
-            </a:r>
-          </a:p>
-          <a:p>
-            <a:r>
-              <a:rPr lang="ko-KR" altLang="en-US" b="1" dirty="0" smtClean="0"/>
-              <a:t>요약하면</a:t>
-            </a:r>
-            <a:r>
-              <a:rPr lang="en-US" altLang="ko-KR" dirty="0" smtClean="0"/>
-              <a:t>,</a:t>
-            </a:r>
-            <a:br>
-              <a:rPr lang="en-US" altLang="ko-KR" dirty="0" smtClean="0"/>
-            </a:br>
-            <a:r>
-              <a:rPr lang="ko-KR" altLang="en-US" dirty="0" smtClean="0"/>
-              <a:t>중국은 초고속 성장과 석탄 중심 에너지 구조로 독자적인 변화를 보이고 있고</a:t>
-            </a:r>
-            <a:r>
-              <a:rPr lang="en-US" altLang="ko-KR" dirty="0" smtClean="0"/>
-              <a:t>,</a:t>
-            </a:r>
-            <a:br>
-              <a:rPr lang="en-US" altLang="ko-KR" dirty="0" smtClean="0"/>
-            </a:br>
-            <a:r>
-              <a:rPr lang="ko-KR" altLang="en-US" dirty="0" smtClean="0"/>
-              <a:t>미국은 고효율 </a:t>
-            </a:r>
-            <a:r>
-              <a:rPr lang="ko-KR" altLang="en-US" dirty="0" err="1" smtClean="0"/>
-              <a:t>고소비</a:t>
-            </a:r>
-            <a:r>
-              <a:rPr lang="ko-KR" altLang="en-US" dirty="0" smtClean="0"/>
-              <a:t> 구조를 가지며 독립된 특성을 보이고 있습니다</a:t>
-            </a:r>
-            <a:r>
-              <a:rPr lang="en-US" altLang="ko-KR" dirty="0" smtClean="0"/>
-              <a:t>.</a:t>
-            </a:r>
-            <a:br>
-              <a:rPr lang="en-US" altLang="ko-KR" dirty="0" smtClean="0"/>
-            </a:br>
-            <a:r>
-              <a:rPr lang="ko-KR" altLang="en-US" dirty="0" smtClean="0"/>
-              <a:t>그 외 대부분의 선진국들은 변화가 안정적이며</a:t>
-            </a:r>
-            <a:r>
-              <a:rPr lang="en-US" altLang="ko-KR" dirty="0" smtClean="0"/>
-              <a:t>, </a:t>
-            </a:r>
-            <a:r>
-              <a:rPr lang="ko-KR" altLang="en-US" dirty="0" smtClean="0"/>
-              <a:t>개발도상국 및 에너지 수출국들은 석유</a:t>
-            </a:r>
-            <a:r>
-              <a:rPr lang="en-US" altLang="ko-KR" dirty="0" smtClean="0"/>
-              <a:t>·</a:t>
-            </a:r>
-            <a:r>
-              <a:rPr lang="ko-KR" altLang="en-US" dirty="0" smtClean="0"/>
-              <a:t>가스 중심으로 변화하는 특징이 있습니다</a:t>
-            </a:r>
-            <a:r>
-              <a:rPr lang="en-US" altLang="ko-KR" dirty="0" smtClean="0"/>
-              <a:t>.</a:t>
-            </a:r>
-          </a:p>
-          <a:p>
+              <a:t> 주성분 점수 표 생성</a:t>
+            </a:r>
             <a:endParaRPr lang="ko-KR" altLang="en-US" dirty="0"/>
           </a:p>
         </p:txBody>
@@ -2228,7 +1812,7 @@
             <a:fld id="{8F9ABC49-ED13-4F77-8E53-C82C693642DC}" type="slidenum">
               <a:rPr lang="ko-KR" altLang="en-US" smtClean="0"/>
               <a:pPr/>
-              <a:t>29</a:t>
+              <a:t>28</a:t>
             </a:fld>
             <a:endParaRPr lang="ko-KR" altLang="en-US"/>
           </a:p>
@@ -2284,27 +1868,427 @@
         <p:spPr/>
         <p:txBody>
           <a:bodyPr>
-            <a:normAutofit/>
+            <a:normAutofit fontScale="92500" lnSpcReduction="20000"/>
           </a:bodyPr>
           <a:lstStyle/>
           <a:p>
-            <a:pPr marL="0" marR="0" indent="0" algn="l" defTabSz="914400" rtl="0" eaLnBrk="1" fontAlgn="auto" latinLnBrk="1" hangingPunct="1">
-              <a:lnSpc>
-                <a:spcPct val="100000"/>
-              </a:lnSpc>
-              <a:spcBef>
-                <a:spcPts val="0"/>
-              </a:spcBef>
-              <a:spcAft>
-                <a:spcPts val="0"/>
-              </a:spcAft>
-              <a:buClrTx/>
-              <a:buSzTx/>
-              <a:buFontTx/>
-              <a:buNone/>
-              <a:tabLst/>
-              <a:defRPr/>
-            </a:pPr>
+            <a:r>
+              <a:rPr lang="en-US" altLang="ko-KR" b="1" dirty="0" smtClean="0"/>
+              <a:t>Cluster 1</a:t>
+            </a:r>
+            <a:r>
+              <a:rPr lang="ko-KR" altLang="en-US" dirty="0" smtClean="0"/>
+              <a:t>은 </a:t>
+            </a:r>
+            <a:r>
+              <a:rPr lang="ko-KR" altLang="en-US" i="1" dirty="0" smtClean="0"/>
+              <a:t>중국 단독 클러스터</a:t>
+            </a:r>
+            <a:r>
+              <a:rPr lang="ko-KR" altLang="en-US" dirty="0" smtClean="0"/>
+              <a:t>입니다</a:t>
+            </a:r>
+            <a:r>
+              <a:rPr lang="en-US" altLang="ko-KR" dirty="0" smtClean="0"/>
+              <a:t>.</a:t>
+            </a:r>
+            <a:br>
+              <a:rPr lang="en-US" altLang="ko-KR" dirty="0" smtClean="0"/>
+            </a:br>
+            <a:r>
+              <a:rPr lang="ko-KR" altLang="en-US" dirty="0" smtClean="0"/>
+              <a:t>중국은 최근 </a:t>
+            </a:r>
+            <a:r>
+              <a:rPr lang="en-US" altLang="ko-KR" dirty="0" smtClean="0"/>
+              <a:t>20</a:t>
+            </a:r>
+            <a:r>
+              <a:rPr lang="ko-KR" altLang="en-US" dirty="0" smtClean="0"/>
+              <a:t>년간 에너지 소비와 온실가스 배출이 압도적으로 증가했으며</a:t>
+            </a:r>
+            <a:r>
+              <a:rPr lang="en-US" altLang="ko-KR" dirty="0" smtClean="0"/>
+              <a:t>, </a:t>
+            </a:r>
+            <a:r>
+              <a:rPr lang="ko-KR" altLang="en-US" dirty="0" smtClean="0"/>
+              <a:t>특히 석탄 기반 에너지원 사용 비중이 높아지는 특징을 보입니다</a:t>
+            </a:r>
+            <a:r>
+              <a:rPr lang="en-US" altLang="ko-KR" dirty="0" smtClean="0"/>
+              <a:t>.</a:t>
+            </a:r>
+            <a:br>
+              <a:rPr lang="en-US" altLang="ko-KR" dirty="0" smtClean="0"/>
+            </a:br>
+            <a:r>
+              <a:rPr lang="ko-KR" altLang="en-US" dirty="0" smtClean="0"/>
+              <a:t>또한</a:t>
+            </a:r>
+            <a:r>
+              <a:rPr lang="en-US" altLang="ko-KR" dirty="0" smtClean="0"/>
+              <a:t>, 1</a:t>
+            </a:r>
+            <a:r>
+              <a:rPr lang="ko-KR" altLang="en-US" dirty="0" smtClean="0"/>
+              <a:t>인당 배출량도 높은 수준입니다</a:t>
+            </a:r>
+            <a:r>
+              <a:rPr lang="en-US" altLang="ko-KR" dirty="0" smtClean="0"/>
+              <a:t>.</a:t>
+            </a:r>
+            <a:br>
+              <a:rPr lang="en-US" altLang="ko-KR" dirty="0" smtClean="0"/>
+            </a:br>
+            <a:r>
+              <a:rPr lang="ko-KR" altLang="en-US" dirty="0" smtClean="0"/>
+              <a:t>이러한 극단적인 변화로 인해 다른 국가들과 구별되어 단독 클러스터로 형성되었습니다</a:t>
+            </a:r>
+            <a:r>
+              <a:rPr lang="en-US" altLang="ko-KR" dirty="0" smtClean="0"/>
+              <a:t>.</a:t>
+            </a:r>
+          </a:p>
+          <a:p>
+            <a:r>
+              <a:rPr lang="en-US" altLang="ko-KR" b="1" dirty="0" smtClean="0"/>
+              <a:t>Cluster 2</a:t>
+            </a:r>
+            <a:r>
+              <a:rPr lang="ko-KR" altLang="en-US" dirty="0" smtClean="0"/>
+              <a:t>는 </a:t>
+            </a:r>
+            <a:r>
+              <a:rPr lang="ko-KR" altLang="en-US" i="1" dirty="0" smtClean="0"/>
+              <a:t>가장 많은 국가가 포함된 클러스터</a:t>
+            </a:r>
+            <a:r>
+              <a:rPr lang="ko-KR" altLang="en-US" dirty="0" smtClean="0"/>
+              <a:t>입니다</a:t>
+            </a:r>
+            <a:r>
+              <a:rPr lang="en-US" altLang="ko-KR" dirty="0" smtClean="0"/>
+              <a:t>.</a:t>
+            </a:r>
+            <a:br>
+              <a:rPr lang="en-US" altLang="ko-KR" dirty="0" smtClean="0"/>
+            </a:br>
+            <a:r>
+              <a:rPr lang="ko-KR" altLang="en-US" dirty="0" smtClean="0"/>
+              <a:t>유럽 선진국</a:t>
+            </a:r>
+            <a:r>
+              <a:rPr lang="en-US" altLang="ko-KR" dirty="0" smtClean="0"/>
+              <a:t>, </a:t>
+            </a:r>
+            <a:r>
+              <a:rPr lang="ko-KR" altLang="en-US" dirty="0" smtClean="0"/>
+              <a:t>일본</a:t>
+            </a:r>
+            <a:r>
+              <a:rPr lang="en-US" altLang="ko-KR" dirty="0" smtClean="0"/>
+              <a:t>, </a:t>
+            </a:r>
+            <a:r>
+              <a:rPr lang="ko-KR" altLang="en-US" dirty="0" smtClean="0"/>
+              <a:t>한국</a:t>
+            </a:r>
+            <a:r>
+              <a:rPr lang="en-US" altLang="ko-KR" dirty="0" smtClean="0"/>
+              <a:t>, </a:t>
+            </a:r>
+            <a:r>
+              <a:rPr lang="ko-KR" altLang="en-US" dirty="0" smtClean="0"/>
+              <a:t>그 외 다양한 개발도상국들이 포함됩니다</a:t>
+            </a:r>
+            <a:r>
+              <a:rPr lang="en-US" altLang="ko-KR" dirty="0" smtClean="0"/>
+              <a:t>.</a:t>
+            </a:r>
+            <a:br>
+              <a:rPr lang="en-US" altLang="ko-KR" dirty="0" smtClean="0"/>
+            </a:br>
+            <a:r>
+              <a:rPr lang="ko-KR" altLang="en-US" dirty="0" smtClean="0"/>
+              <a:t>이 클러스터는 전반적으로 에너지 소비와 온실가스 배출 변화량이 크지 않고 안정적인 국가들입니다</a:t>
+            </a:r>
+            <a:r>
+              <a:rPr lang="en-US" altLang="ko-KR" dirty="0" smtClean="0"/>
+              <a:t>.</a:t>
+            </a:r>
+            <a:br>
+              <a:rPr lang="en-US" altLang="ko-KR" dirty="0" smtClean="0"/>
+            </a:br>
+            <a:r>
+              <a:rPr lang="ko-KR" altLang="en-US" dirty="0" smtClean="0"/>
+              <a:t>또한</a:t>
+            </a:r>
+            <a:r>
+              <a:rPr lang="en-US" altLang="ko-KR" dirty="0" smtClean="0"/>
+              <a:t>, </a:t>
+            </a:r>
+            <a:r>
+              <a:rPr lang="ko-KR" altLang="en-US" dirty="0" smtClean="0"/>
+              <a:t>석탄 사용이 약간 증가하긴 했지만 전체적으로 큰 변화 없이 정책적 관리가 잘 이루어지고 있는 국가군입니다</a:t>
+            </a:r>
+            <a:r>
+              <a:rPr lang="en-US" altLang="ko-KR" dirty="0" smtClean="0"/>
+              <a:t>.</a:t>
+            </a:r>
+          </a:p>
+          <a:p>
+            <a:r>
+              <a:rPr lang="en-US" altLang="ko-KR" b="1" dirty="0" smtClean="0"/>
+              <a:t>Cluster 3</a:t>
+            </a:r>
+            <a:r>
+              <a:rPr lang="ko-KR" altLang="en-US" dirty="0" smtClean="0"/>
+              <a:t>는 </a:t>
+            </a:r>
+            <a:r>
+              <a:rPr lang="ko-KR" altLang="en-US" i="1" dirty="0" smtClean="0"/>
+              <a:t>브라질</a:t>
+            </a:r>
+            <a:r>
+              <a:rPr lang="en-US" altLang="ko-KR" i="1" dirty="0" smtClean="0"/>
+              <a:t>, </a:t>
+            </a:r>
+            <a:r>
+              <a:rPr lang="ko-KR" altLang="en-US" i="1" dirty="0" smtClean="0"/>
+              <a:t>인도</a:t>
+            </a:r>
+            <a:r>
+              <a:rPr lang="en-US" altLang="ko-KR" i="1" dirty="0" smtClean="0"/>
+              <a:t>, </a:t>
+            </a:r>
+            <a:r>
+              <a:rPr lang="ko-KR" altLang="en-US" i="1" dirty="0" smtClean="0"/>
+              <a:t>사우디아라비아</a:t>
+            </a:r>
+            <a:r>
+              <a:rPr lang="en-US" altLang="ko-KR" i="1" dirty="0" smtClean="0"/>
+              <a:t>, </a:t>
+            </a:r>
+            <a:r>
+              <a:rPr lang="ko-KR" altLang="en-US" i="1" dirty="0" smtClean="0"/>
+              <a:t>카타르</a:t>
+            </a:r>
+            <a:r>
+              <a:rPr lang="en-US" altLang="ko-KR" i="1" dirty="0" smtClean="0"/>
+              <a:t>, </a:t>
+            </a:r>
+            <a:r>
+              <a:rPr lang="ko-KR" altLang="en-US" i="1" dirty="0" smtClean="0"/>
+              <a:t>아랍에미리트</a:t>
+            </a:r>
+            <a:r>
+              <a:rPr lang="ko-KR" altLang="en-US" dirty="0" smtClean="0"/>
+              <a:t> 등 에너지 수출국과 개발도상국들이 주로 포함되어 있습니다</a:t>
+            </a:r>
+            <a:r>
+              <a:rPr lang="en-US" altLang="ko-KR" dirty="0" smtClean="0"/>
+              <a:t>.</a:t>
+            </a:r>
+            <a:br>
+              <a:rPr lang="en-US" altLang="ko-KR" dirty="0" smtClean="0"/>
+            </a:br>
+            <a:r>
+              <a:rPr lang="ko-KR" altLang="en-US" dirty="0" smtClean="0"/>
+              <a:t>이 국가들은 최근 에너지 소비와 배출량이 증가하는 추세이며</a:t>
+            </a:r>
+            <a:r>
+              <a:rPr lang="en-US" altLang="ko-KR" dirty="0" smtClean="0"/>
+              <a:t>, </a:t>
+            </a:r>
+            <a:r>
+              <a:rPr lang="ko-KR" altLang="en-US" dirty="0" smtClean="0"/>
+              <a:t>특히 석유</a:t>
+            </a:r>
+            <a:r>
+              <a:rPr lang="en-US" altLang="ko-KR" dirty="0" smtClean="0"/>
+              <a:t>·</a:t>
+            </a:r>
+            <a:r>
+              <a:rPr lang="ko-KR" altLang="en-US" dirty="0" smtClean="0"/>
+              <a:t>가스 기반 에너지 사용이 많이 증가한 특징을 보입니다</a:t>
+            </a:r>
+            <a:r>
+              <a:rPr lang="en-US" altLang="ko-KR" dirty="0" smtClean="0"/>
+              <a:t>.</a:t>
+            </a:r>
+            <a:br>
+              <a:rPr lang="en-US" altLang="ko-KR" dirty="0" smtClean="0"/>
+            </a:br>
+            <a:r>
+              <a:rPr lang="ko-KR" altLang="en-US" dirty="0" smtClean="0"/>
+              <a:t>반면</a:t>
+            </a:r>
+            <a:r>
+              <a:rPr lang="en-US" altLang="ko-KR" dirty="0" smtClean="0"/>
+              <a:t>, 1</a:t>
+            </a:r>
+            <a:r>
+              <a:rPr lang="ko-KR" altLang="en-US" dirty="0" smtClean="0"/>
+              <a:t>인당 배출량은 오히려 증가한 국가들이 많아 효율성 측면에서는 상대적으로 낮은 편입니다</a:t>
+            </a:r>
+            <a:r>
+              <a:rPr lang="en-US" altLang="ko-KR" dirty="0" smtClean="0"/>
+              <a:t>.</a:t>
+            </a:r>
+          </a:p>
+          <a:p>
+            <a:r>
+              <a:rPr lang="en-US" altLang="ko-KR" b="1" dirty="0" smtClean="0"/>
+              <a:t>Cluster 4</a:t>
+            </a:r>
+            <a:r>
+              <a:rPr lang="ko-KR" altLang="en-US" dirty="0" smtClean="0"/>
+              <a:t>는 </a:t>
+            </a:r>
+            <a:r>
+              <a:rPr lang="ko-KR" altLang="en-US" i="1" dirty="0" smtClean="0"/>
+              <a:t>미국 단독 클러스터</a:t>
+            </a:r>
+            <a:r>
+              <a:rPr lang="ko-KR" altLang="en-US" dirty="0" smtClean="0"/>
+              <a:t>입니다</a:t>
+            </a:r>
+            <a:r>
+              <a:rPr lang="en-US" altLang="ko-KR" dirty="0" smtClean="0"/>
+              <a:t>.</a:t>
+            </a:r>
+            <a:br>
+              <a:rPr lang="en-US" altLang="ko-KR" dirty="0" smtClean="0"/>
+            </a:br>
+            <a:r>
+              <a:rPr lang="ko-KR" altLang="en-US" dirty="0" smtClean="0"/>
+              <a:t>미국은 전체 에너지 소비와 온실가스 배출이 증가한 국가이지만</a:t>
+            </a:r>
+            <a:r>
+              <a:rPr lang="en-US" altLang="ko-KR" dirty="0" smtClean="0"/>
+              <a:t>, </a:t>
+            </a:r>
+            <a:r>
+              <a:rPr lang="ko-KR" altLang="en-US" dirty="0" smtClean="0"/>
+              <a:t>에너지 효율화 정책으로 인해 </a:t>
+            </a:r>
+            <a:r>
+              <a:rPr lang="en-US" altLang="ko-KR" dirty="0" smtClean="0"/>
+              <a:t>1</a:t>
+            </a:r>
+            <a:r>
+              <a:rPr lang="ko-KR" altLang="en-US" dirty="0" smtClean="0"/>
+              <a:t>인당 배출량은 오히려 감소한 특징을 보입니다</a:t>
+            </a:r>
+            <a:r>
+              <a:rPr lang="en-US" altLang="ko-KR" dirty="0" smtClean="0"/>
+              <a:t>.</a:t>
+            </a:r>
+            <a:br>
+              <a:rPr lang="en-US" altLang="ko-KR" dirty="0" smtClean="0"/>
+            </a:br>
+            <a:r>
+              <a:rPr lang="ko-KR" altLang="en-US" dirty="0" smtClean="0"/>
+              <a:t>또한</a:t>
+            </a:r>
+            <a:r>
+              <a:rPr lang="en-US" altLang="ko-KR" dirty="0" smtClean="0"/>
+              <a:t>, </a:t>
+            </a:r>
+            <a:r>
+              <a:rPr lang="ko-KR" altLang="en-US" dirty="0" smtClean="0"/>
+              <a:t>석유</a:t>
+            </a:r>
+            <a:r>
+              <a:rPr lang="en-US" altLang="ko-KR" dirty="0" smtClean="0"/>
+              <a:t>·</a:t>
+            </a:r>
+            <a:r>
+              <a:rPr lang="ko-KR" altLang="en-US" dirty="0" smtClean="0"/>
+              <a:t>가스</a:t>
+            </a:r>
+            <a:r>
+              <a:rPr lang="en-US" altLang="ko-KR" dirty="0" smtClean="0"/>
+              <a:t>·</a:t>
+            </a:r>
+            <a:r>
+              <a:rPr lang="ko-KR" altLang="en-US" dirty="0" smtClean="0"/>
+              <a:t>원자력 기반 에너지 사용이 증가하면서 독자적인 에너지 구조를 보이기 때문에 단독 클러스터로 분류되었습니다</a:t>
+            </a:r>
+            <a:r>
+              <a:rPr lang="en-US" altLang="ko-KR" dirty="0" smtClean="0"/>
+              <a:t>.</a:t>
+            </a:r>
+          </a:p>
+          <a:p>
+            <a:r>
+              <a:rPr lang="ko-KR" altLang="en-US" b="1" dirty="0" smtClean="0"/>
+              <a:t>요약하면</a:t>
+            </a:r>
+            <a:r>
+              <a:rPr lang="en-US" altLang="ko-KR" dirty="0" smtClean="0"/>
+              <a:t>,</a:t>
+            </a:r>
+            <a:br>
+              <a:rPr lang="en-US" altLang="ko-KR" dirty="0" smtClean="0"/>
+            </a:br>
+            <a:r>
+              <a:rPr lang="ko-KR" altLang="en-US" dirty="0" smtClean="0"/>
+              <a:t>중국은 초고속 성장과 석탄 중심 에너지 구조로 독자적인 변화를 보이고 있고</a:t>
+            </a:r>
+            <a:r>
+              <a:rPr lang="en-US" altLang="ko-KR" dirty="0" smtClean="0"/>
+              <a:t>,</a:t>
+            </a:r>
+            <a:br>
+              <a:rPr lang="en-US" altLang="ko-KR" dirty="0" smtClean="0"/>
+            </a:br>
+            <a:r>
+              <a:rPr lang="ko-KR" altLang="en-US" dirty="0" smtClean="0"/>
+              <a:t>미국은 고효율 </a:t>
+            </a:r>
+            <a:r>
+              <a:rPr lang="ko-KR" altLang="en-US" dirty="0" err="1" smtClean="0"/>
+              <a:t>고소비</a:t>
+            </a:r>
+            <a:r>
+              <a:rPr lang="ko-KR" altLang="en-US" dirty="0" smtClean="0"/>
+              <a:t> 구조를 가지며 독립된 특성을 보이고 있습니다</a:t>
+            </a:r>
+            <a:r>
+              <a:rPr lang="en-US" altLang="ko-KR" dirty="0" smtClean="0"/>
+              <a:t>.</a:t>
+            </a:r>
+            <a:br>
+              <a:rPr lang="en-US" altLang="ko-KR" dirty="0" smtClean="0"/>
+            </a:br>
+            <a:r>
+              <a:rPr lang="ko-KR" altLang="en-US" dirty="0" smtClean="0"/>
+              <a:t>그 외 대부분의 선진국들은 변화가 안정적이며</a:t>
+            </a:r>
+            <a:r>
+              <a:rPr lang="en-US" altLang="ko-KR" dirty="0" smtClean="0"/>
+              <a:t>, </a:t>
+            </a:r>
+            <a:r>
+              <a:rPr lang="ko-KR" altLang="en-US" dirty="0" smtClean="0"/>
+              <a:t>개발도상국 및 에너지 수출국들은 석유</a:t>
+            </a:r>
+            <a:r>
+              <a:rPr lang="en-US" altLang="ko-KR" dirty="0" smtClean="0"/>
+              <a:t>·</a:t>
+            </a:r>
+            <a:r>
+              <a:rPr lang="ko-KR" altLang="en-US" dirty="0" smtClean="0"/>
+              <a:t>가스 중심으로 변화하는 특징이 있습니다</a:t>
+            </a:r>
+            <a:r>
+              <a:rPr lang="en-US" altLang="ko-KR" dirty="0" smtClean="0"/>
+              <a:t>.</a:t>
+            </a:r>
+          </a:p>
+          <a:p>
             <a:endParaRPr lang="ko-KR" altLang="en-US" dirty="0"/>
           </a:p>
         </p:txBody>
@@ -2327,7 +2311,7 @@
             <a:fld id="{8F9ABC49-ED13-4F77-8E53-C82C693642DC}" type="slidenum">
               <a:rPr lang="ko-KR" altLang="en-US" smtClean="0"/>
               <a:pPr/>
-              <a:t>31</a:t>
+              <a:t>30</a:t>
             </a:fld>
             <a:endParaRPr lang="ko-KR" altLang="en-US"/>
           </a:p>
@@ -2469,6 +2453,23 @@
           </a:bodyPr>
           <a:lstStyle/>
           <a:p>
+            <a:pPr marL="0" marR="0" indent="0" algn="l" defTabSz="914400" rtl="0" eaLnBrk="1" fontAlgn="auto" latinLnBrk="1" hangingPunct="1">
+              <a:lnSpc>
+                <a:spcPct val="100000"/>
+              </a:lnSpc>
+              <a:spcBef>
+                <a:spcPts val="0"/>
+              </a:spcBef>
+              <a:spcAft>
+                <a:spcPts val="0"/>
+              </a:spcAft>
+              <a:buClrTx/>
+              <a:buSzTx/>
+              <a:buFontTx/>
+              <a:buNone/>
+              <a:tabLst/>
+              <a:defRPr/>
+            </a:pPr>
             <a:endParaRPr lang="ko-KR" altLang="en-US" dirty="0"/>
           </a:p>
         </p:txBody>
@@ -2492,6 +2493,123 @@
               <a:rPr lang="ko-KR" altLang="en-US" smtClean="0"/>
               <a:pPr/>
               <a:t>32</a:t>
+            </a:fld>
+            <a:endParaRPr lang="ko-KR" altLang="en-US"/>
+          </a:p>
+        </p:txBody>
+      </p:sp>
+    </p:spTree>
+  </p:cSld>
+  <p:clrMapOvr>
+    <a:masterClrMapping/>
+  </p:clrMapOvr>
+</p:notes>
+</file>
+
+<file path=ppt/notesSlides/notesSlide21.xml><?xml version="1.0" encoding="utf-8"?>
+<p:notes xmlns:a="http://schemas.openxmlformats.org/drawingml/2006/main" xmlns:r="http://schemas.openxmlformats.org/officeDocument/2006/relationships" xmlns:p="http://schemas.openxmlformats.org/presentationml/2006/main">
+  <p:cSld>
+    <p:spTree>
+      <p:nvGrpSpPr>
+        <p:cNvPr id="1" name=""/>
+        <p:cNvGrpSpPr/>
+        <p:nvPr/>
+      </p:nvGrpSpPr>
+      <p:grpSpPr>
+        <a:xfrm>
+          <a:off x="0" y="0"/>
+          <a:ext cx="0" cy="0"/>
+          <a:chOff x="0" y="0"/>
+          <a:chExt cx="0" cy="0"/>
+        </a:xfrm>
+      </p:grpSpPr>
+      <p:sp>
+        <p:nvSpPr>
+          <p:cNvPr id="2" name="슬라이드 이미지 개체 틀 1"/>
+          <p:cNvSpPr>
+            <a:spLocks noGrp="1" noRot="1" noChangeAspect="1"/>
+          </p:cNvSpPr>
+          <p:nvPr>
+            <p:ph type="sldImg"/>
+          </p:nvPr>
+        </p:nvSpPr>
+        <p:spPr/>
+      </p:sp>
+      <p:sp>
+        <p:nvSpPr>
+          <p:cNvPr id="3" name="슬라이드 노트 개체 틀 2"/>
+          <p:cNvSpPr>
+            <a:spLocks noGrp="1"/>
+          </p:cNvSpPr>
+          <p:nvPr>
+            <p:ph type="body" idx="1"/>
+          </p:nvPr>
+        </p:nvSpPr>
+        <p:spPr/>
+        <p:txBody>
+          <a:bodyPr>
+            <a:normAutofit/>
+          </a:bodyPr>
+          <a:lstStyle/>
+          <a:p>
+            <a:r>
+              <a:rPr lang="ko-KR" altLang="en-US" dirty="0" smtClean="0"/>
+              <a:t>인도</a:t>
+            </a:r>
+            <a:r>
+              <a:rPr lang="en-US" altLang="ko-KR" dirty="0" smtClean="0"/>
+              <a:t>,</a:t>
+            </a:r>
+            <a:r>
+              <a:rPr lang="ko-KR" altLang="en-US" dirty="0" smtClean="0"/>
+              <a:t>네팔 같은 아시아 개발도상국</a:t>
+            </a:r>
+            <a:endParaRPr lang="en-US" altLang="ko-KR" dirty="0" smtClean="0"/>
+          </a:p>
+          <a:p>
+            <a:r>
+              <a:rPr lang="ko-KR" altLang="en-US" dirty="0" smtClean="0"/>
+              <a:t>화석연료기반</a:t>
+            </a:r>
+            <a:r>
+              <a:rPr lang="en-US" altLang="ko-KR" dirty="0" smtClean="0"/>
+              <a:t>+</a:t>
+            </a:r>
+            <a:r>
+              <a:rPr lang="ko-KR" altLang="en-US" dirty="0" smtClean="0"/>
+              <a:t>산업성장기 </a:t>
+            </a:r>
+            <a:r>
+              <a:rPr lang="en-US" altLang="ko-KR" dirty="0" smtClean="0"/>
+              <a:t>-&gt; </a:t>
+            </a:r>
+            <a:r>
+              <a:rPr lang="ko-KR" altLang="en-US" smtClean="0"/>
+              <a:t>배출량 급증</a:t>
+            </a:r>
+            <a:endParaRPr lang="ko-KR" altLang="en-US" dirty="0"/>
+          </a:p>
+        </p:txBody>
+      </p:sp>
+      <p:sp>
+        <p:nvSpPr>
+          <p:cNvPr id="4" name="슬라이드 번호 개체 틀 3"/>
+          <p:cNvSpPr>
+            <a:spLocks noGrp="1"/>
+          </p:cNvSpPr>
+          <p:nvPr>
+            <p:ph type="sldNum" sz="quarter" idx="10"/>
+          </p:nvPr>
+        </p:nvSpPr>
+        <p:spPr/>
+        <p:txBody>
+          <a:bodyPr/>
+          <a:lstStyle/>
+          <a:p>
+            <a:fld id="{8F9ABC49-ED13-4F77-8E53-C82C693642DC}" type="slidenum">
+              <a:rPr lang="ko-KR" altLang="en-US" smtClean="0"/>
+              <a:pPr/>
+              <a:t>33</a:t>
             </a:fld>
             <a:endParaRPr lang="ko-KR" altLang="en-US"/>
           </a:p>
@@ -2951,6 +3069,46 @@
           </a:bodyPr>
           <a:lstStyle/>
           <a:p>
+            <a:r>
+              <a:rPr lang="ko-KR" altLang="en-US" dirty="0" err="1" smtClean="0"/>
+              <a:t>첫번째</a:t>
+            </a:r>
+            <a:r>
+              <a:rPr lang="ko-KR" altLang="en-US" dirty="0" smtClean="0"/>
+              <a:t> 주성분에서 기여를 많이 하는</a:t>
+            </a:r>
+            <a:r>
+              <a:rPr lang="en-US" altLang="ko-KR" dirty="0" smtClean="0"/>
+              <a:t>(</a:t>
+            </a:r>
+            <a:r>
+              <a:rPr lang="ko-KR" altLang="en-US" dirty="0" smtClean="0"/>
+              <a:t>절댓값이 큰</a:t>
+            </a:r>
+            <a:r>
+              <a:rPr lang="en-US" altLang="ko-KR" dirty="0" smtClean="0"/>
+              <a:t>) </a:t>
+            </a:r>
+            <a:r>
+              <a:rPr lang="ko-KR" altLang="en-US" dirty="0" smtClean="0"/>
+              <a:t>값들이 음수 이므로 고유벡터에는 </a:t>
+            </a:r>
+            <a:r>
+              <a:rPr lang="en-US" altLang="ko-KR" dirty="0" smtClean="0"/>
+              <a:t>–</a:t>
+            </a:r>
+            <a:r>
+              <a:rPr lang="ko-KR" altLang="en-US" dirty="0" smtClean="0"/>
+              <a:t>를 곱해줘야 주성분 </a:t>
+            </a:r>
+            <a:r>
+              <a:rPr lang="ko-KR" altLang="en-US" dirty="0" err="1" smtClean="0"/>
+              <a:t>적재값을</a:t>
+            </a:r>
+            <a:r>
+              <a:rPr lang="ko-KR" altLang="en-US" dirty="0" smtClean="0"/>
+              <a:t> 구할 수 있다</a:t>
+            </a:r>
             <a:endParaRPr lang="ko-KR" altLang="en-US" dirty="0"/>
           </a:p>
         </p:txBody>
@@ -2973,7 +3131,7 @@
             <a:fld id="{8F9ABC49-ED13-4F77-8E53-C82C693642DC}" type="slidenum">
               <a:rPr lang="ko-KR" altLang="en-US" smtClean="0"/>
               <a:pPr/>
-              <a:t>15</a:t>
+              <a:t>14</a:t>
             </a:fld>
             <a:endParaRPr lang="ko-KR" altLang="en-US"/>
           </a:p>
@@ -8907,14 +9065,14 @@
       </p:grpSpPr>
       <p:pic>
         <p:nvPicPr>
-          <p:cNvPr id="23" name="Picture 2"/>
+          <p:cNvPr id="20" name="Picture 2"/>
           <p:cNvPicPr>
             <a:picLocks noChangeAspect="1"/>
           </p:cNvPicPr>
           <p:nvPr/>
         </p:nvPicPr>
         <p:blipFill>
-          <a:blip r:embed="rId2" cstate="print"/>
+          <a:blip r:embed="rId3" cstate="print"/>
           <a:stretch>
             <a:fillRect/>
           </a:stretch>
@@ -8938,7 +9096,7 @@
           <p:nvPr/>
         </p:nvPicPr>
         <p:blipFill>
-          <a:blip r:embed="rId3" cstate="print"/>
+          <a:blip r:embed="rId4" cstate="print"/>
           <a:stretch>
             <a:fillRect/>
           </a:stretch>
@@ -8962,7 +9120,7 @@
           <p:nvPr/>
         </p:nvPicPr>
         <p:blipFill>
-          <a:blip r:embed="rId4" cstate="print"/>
+          <a:blip r:embed="rId5" cstate="print"/>
           <a:stretch>
             <a:fillRect/>
           </a:stretch>
@@ -8979,288 +9137,7 @@
       </p:pic>
       <p:sp>
         <p:nvSpPr>
-          <p:cNvPr id="14" name="내용 개체 틀 2">
-            <a:extLst>
-              <a:ext uri="{FF2B5EF4-FFF2-40B4-BE49-F238E27FC236}">
-                <a16:creationId xmlns="" xmlns:a16="http://schemas.microsoft.com/office/drawing/2014/main" id="{355A219D-5239-41A0-B442-2565DCF038E5}"/>
-              </a:ext>
-            </a:extLst>
-          </p:cNvPr>
-          <p:cNvSpPr txBox="1">
-            <a:spLocks/>
-          </p:cNvSpPr>
-          <p:nvPr/>
-        </p:nvSpPr>
-        <p:spPr>
-          <a:xfrm>
-            <a:off x="1295400" y="2705100"/>
-            <a:ext cx="15849600" cy="7162800"/>
-          </a:xfrm>
-          <a:prstGeom prst="rect">
-            <a:avLst/>
-          </a:prstGeom>
-        </p:spPr>
-        <p:txBody>
-          <a:bodyPr>
-            <a:normAutofit/>
-          </a:bodyPr>
-          <a:lstStyle/>
-          <a:p>
-            <a:r>
-              <a:rPr lang="ko-KR" altLang="en-US" sz="2800" dirty="0" smtClean="0"/>
-              <a:t>＜</a:t>
-            </a:r>
-            <a:r>
-              <a:rPr lang="ko-KR" altLang="en-US" sz="2800" b="1" dirty="0" smtClean="0"/>
-              <a:t>정의＞</a:t>
-            </a:r>
-            <a:r>
-              <a:rPr lang="ko-KR" altLang="en-US" sz="2800" dirty="0" smtClean="0"/>
-              <a:t/>
-            </a:r>
-            <a:br>
-              <a:rPr lang="ko-KR" altLang="en-US" sz="2800" dirty="0" smtClean="0"/>
-            </a:br>
-            <a:r>
-              <a:rPr lang="ko-KR" altLang="en-US" sz="2800" dirty="0" smtClean="0"/>
-              <a:t>→ 주성분 분석</a:t>
-            </a:r>
-            <a:r>
-              <a:rPr lang="en-US" altLang="ko-KR" sz="2800" dirty="0" smtClean="0"/>
-              <a:t>(PCA)</a:t>
-            </a:r>
-            <a:r>
-              <a:rPr lang="ko-KR" altLang="en-US" sz="2800" dirty="0" smtClean="0"/>
-              <a:t>에서 각 변수가 주성분에 얼마나 기여하는지 나타내는 계수</a:t>
-            </a:r>
-            <a:endParaRPr lang="en-US" altLang="ko-KR" sz="2800" dirty="0" smtClean="0"/>
-          </a:p>
-          <a:p>
-            <a:endParaRPr lang="ko-KR" altLang="en-US" sz="2800" dirty="0" smtClean="0"/>
-          </a:p>
-          <a:p>
-            <a:r>
-              <a:rPr lang="ko-KR" altLang="en-US" sz="2800" dirty="0" smtClean="0"/>
-              <a:t>＜</a:t>
-            </a:r>
-            <a:r>
-              <a:rPr lang="ko-KR" altLang="en-US" sz="2800" b="1" dirty="0" err="1" smtClean="0"/>
-              <a:t>적재값으로</a:t>
-            </a:r>
-            <a:r>
-              <a:rPr lang="ko-KR" altLang="en-US" sz="2800" b="1" dirty="0" smtClean="0"/>
-              <a:t> 알 수 있는 것＞</a:t>
-            </a:r>
-            <a:r>
-              <a:rPr lang="ko-KR" altLang="en-US" sz="2800" dirty="0" smtClean="0"/>
-              <a:t/>
-            </a:r>
-            <a:br>
-              <a:rPr lang="ko-KR" altLang="en-US" sz="2800" dirty="0" smtClean="0"/>
-            </a:br>
-            <a:r>
-              <a:rPr lang="ko-KR" altLang="en-US" sz="2800" b="1" dirty="0" smtClean="0"/>
-              <a:t>１）변수의 영향력과　해석</a:t>
-            </a:r>
-            <a:r>
-              <a:rPr lang="ko-KR" altLang="en-US" sz="2800" dirty="0" smtClean="0"/>
-              <a:t/>
-            </a:r>
-            <a:br>
-              <a:rPr lang="ko-KR" altLang="en-US" sz="2800" dirty="0" smtClean="0"/>
-            </a:br>
-            <a:r>
-              <a:rPr lang="ko-KR" altLang="en-US" sz="2800" dirty="0" smtClean="0"/>
-              <a:t>→ </a:t>
-            </a:r>
-            <a:r>
-              <a:rPr lang="ko-KR" altLang="en-US" sz="2800" dirty="0" err="1" smtClean="0"/>
-              <a:t>적재값의</a:t>
-            </a:r>
-            <a:r>
-              <a:rPr lang="ko-KR" altLang="en-US" sz="2800" dirty="0" smtClean="0"/>
-              <a:t>　절댓값이 클수록 해당 변수는 주성분에 더 큰 영향</a:t>
-            </a:r>
-          </a:p>
-          <a:p>
-            <a:r>
-              <a:rPr lang="ko-KR" altLang="en-US" sz="2800" b="1" dirty="0" smtClean="0"/>
-              <a:t> ２）주성분 해석</a:t>
-            </a:r>
-            <a:r>
-              <a:rPr lang="ko-KR" altLang="en-US" sz="2800" dirty="0" smtClean="0"/>
-              <a:t/>
-            </a:r>
-            <a:br>
-              <a:rPr lang="ko-KR" altLang="en-US" sz="2800" dirty="0" smtClean="0"/>
-            </a:br>
-            <a:r>
-              <a:rPr lang="ko-KR" altLang="en-US" sz="2800" dirty="0" smtClean="0"/>
-              <a:t>→ </a:t>
-            </a:r>
-            <a:r>
-              <a:rPr lang="ko-KR" altLang="en-US" sz="2800" dirty="0" err="1" smtClean="0"/>
-              <a:t>적재값의</a:t>
-            </a:r>
-            <a:r>
-              <a:rPr lang="ko-KR" altLang="en-US" sz="2800" dirty="0" smtClean="0"/>
-              <a:t>　절댓값이 높은 변수를　통해　해당 주성분이 어떤 특성을 설명하는지 알 수 있음</a:t>
-            </a:r>
-          </a:p>
-          <a:p>
-            <a:r>
-              <a:rPr lang="ko-KR" altLang="en-US" sz="2800" dirty="0" smtClean="0"/>
-              <a:t> </a:t>
-            </a:r>
-            <a:r>
-              <a:rPr lang="ko-KR" altLang="en-US" sz="2800" b="1" dirty="0" smtClean="0"/>
-              <a:t>３）</a:t>
-            </a:r>
-            <a:r>
-              <a:rPr lang="ko-KR" altLang="en-US" sz="2800" b="1" dirty="0" err="1" smtClean="0"/>
-              <a:t>적재값</a:t>
-            </a:r>
-            <a:r>
-              <a:rPr lang="ko-KR" altLang="en-US" sz="2800" b="1" dirty="0" smtClean="0"/>
-              <a:t> 부호 해석 가능</a:t>
-            </a:r>
-            <a:r>
-              <a:rPr lang="ko-KR" altLang="en-US" sz="2800" dirty="0" smtClean="0"/>
-              <a:t/>
-            </a:r>
-            <a:br>
-              <a:rPr lang="ko-KR" altLang="en-US" sz="2800" dirty="0" smtClean="0"/>
-            </a:br>
-            <a:r>
-              <a:rPr lang="ko-KR" altLang="en-US" sz="2800" dirty="0" smtClean="0"/>
-              <a:t>→ 양수</a:t>
-            </a:r>
-            <a:r>
-              <a:rPr lang="en-US" altLang="ko-KR" sz="2800" dirty="0" smtClean="0"/>
-              <a:t>(+) </a:t>
-            </a:r>
-            <a:r>
-              <a:rPr lang="ko-KR" altLang="en-US" sz="2800" dirty="0" smtClean="0"/>
-              <a:t>：</a:t>
-            </a:r>
-            <a:r>
-              <a:rPr lang="en-US" altLang="ko-KR" sz="2800" dirty="0" smtClean="0"/>
-              <a:t> </a:t>
-            </a:r>
-            <a:r>
-              <a:rPr lang="ko-KR" altLang="en-US" sz="2800" dirty="0" smtClean="0"/>
-              <a:t>주성분과 같은 방향으로 증가</a:t>
-            </a:r>
-            <a:br>
-              <a:rPr lang="ko-KR" altLang="en-US" sz="2800" dirty="0" smtClean="0"/>
-            </a:br>
-            <a:r>
-              <a:rPr lang="ko-KR" altLang="en-US" sz="2800" dirty="0" smtClean="0"/>
-              <a:t>→ 음수</a:t>
-            </a:r>
-            <a:r>
-              <a:rPr lang="en-US" altLang="ko-KR" sz="2800" dirty="0" smtClean="0"/>
-              <a:t>(-) </a:t>
-            </a:r>
-            <a:r>
-              <a:rPr lang="ko-KR" altLang="en-US" sz="2800" dirty="0" smtClean="0"/>
-              <a:t>：주성분과 반대 방향으로 변화</a:t>
-            </a:r>
-            <a:endParaRPr lang="en-US" altLang="ko-KR" sz="2800" dirty="0" smtClean="0"/>
-          </a:p>
-          <a:p>
-            <a:endParaRPr lang="en-US" altLang="ko-KR" sz="2800" b="1" dirty="0" smtClean="0"/>
-          </a:p>
-          <a:p>
-            <a:r>
-              <a:rPr lang="ko-KR" altLang="en-US" sz="2800" b="1" dirty="0" smtClean="0"/>
-              <a:t>＜고유벡터와　비교＞</a:t>
-            </a:r>
-            <a:endParaRPr lang="en-US" altLang="ko-KR" sz="2800" b="1" dirty="0" smtClean="0"/>
-          </a:p>
-          <a:p>
-            <a:r>
-              <a:rPr lang="ko-KR" altLang="en-US" sz="2800" dirty="0" smtClean="0"/>
-              <a:t>→ 주성분 </a:t>
-            </a:r>
-            <a:r>
-              <a:rPr lang="ko-KR" altLang="en-US" sz="2800" dirty="0" err="1" smtClean="0"/>
-              <a:t>적재값과</a:t>
-            </a:r>
-            <a:r>
-              <a:rPr lang="ko-KR" altLang="en-US" sz="2800" dirty="0" smtClean="0"/>
-              <a:t> 고유벡터는 크기</a:t>
-            </a:r>
-            <a:r>
-              <a:rPr lang="en-US" altLang="ko-KR" sz="2800" dirty="0" smtClean="0"/>
-              <a:t>(</a:t>
-            </a:r>
-            <a:r>
-              <a:rPr lang="ko-KR" altLang="en-US" sz="2800" dirty="0" smtClean="0"/>
-              <a:t>비율</a:t>
-            </a:r>
-            <a:r>
-              <a:rPr lang="en-US" altLang="ko-KR" sz="2800" dirty="0" smtClean="0"/>
-              <a:t>)</a:t>
-            </a:r>
-            <a:r>
-              <a:rPr lang="ko-KR" altLang="en-US" sz="2800" dirty="0" smtClean="0"/>
-              <a:t>는 같지만，</a:t>
-            </a:r>
-            <a:endParaRPr lang="en-US" altLang="ko-KR" sz="2800" dirty="0" smtClean="0"/>
-          </a:p>
-          <a:p>
-            <a:r>
-              <a:rPr lang="ko-KR" altLang="en-US" sz="2800" dirty="0" smtClean="0"/>
-              <a:t>계산 방법</a:t>
-            </a:r>
-            <a:r>
-              <a:rPr lang="en-US" altLang="ko-KR" sz="2800" dirty="0" smtClean="0"/>
-              <a:t>(</a:t>
-            </a:r>
-            <a:r>
-              <a:rPr lang="en-US" altLang="ko-KR" sz="2800" dirty="0" err="1" smtClean="0"/>
-              <a:t>eigen</a:t>
-            </a:r>
-            <a:r>
-              <a:rPr lang="en-US" altLang="ko-KR" sz="2800" dirty="0" smtClean="0"/>
-              <a:t> </a:t>
-            </a:r>
-            <a:r>
-              <a:rPr lang="en-US" altLang="ko-KR" sz="2800" dirty="0" err="1" smtClean="0"/>
-              <a:t>vs</a:t>
-            </a:r>
-            <a:r>
-              <a:rPr lang="en-US" altLang="ko-KR" sz="2800" dirty="0" smtClean="0"/>
-              <a:t> </a:t>
-            </a:r>
-            <a:r>
-              <a:rPr lang="en-US" altLang="ko-KR" sz="2800" dirty="0" err="1" smtClean="0"/>
-              <a:t>prcomp</a:t>
-            </a:r>
-            <a:r>
-              <a:rPr lang="en-US" altLang="ko-KR" sz="2800" dirty="0" smtClean="0"/>
-              <a:t>, SVD </a:t>
-            </a:r>
-            <a:r>
-              <a:rPr lang="ko-KR" altLang="en-US" sz="2800" dirty="0" smtClean="0"/>
-              <a:t>사용 여부</a:t>
-            </a:r>
-            <a:r>
-              <a:rPr lang="en-US" altLang="ko-KR" sz="2800" dirty="0" smtClean="0"/>
-              <a:t>)</a:t>
-            </a:r>
-            <a:r>
-              <a:rPr lang="ko-KR" altLang="en-US" sz="2800" dirty="0" smtClean="0"/>
-              <a:t>에 따라　부호는 다를 수도 있음</a:t>
-            </a:r>
-            <a:endParaRPr lang="en-US" altLang="ko-KR" sz="2800" dirty="0" smtClean="0"/>
-          </a:p>
-        </p:txBody>
-      </p:sp>
-      <p:sp>
-        <p:nvSpPr>
-          <p:cNvPr id="9" name="TextBox 11"/>
+          <p:cNvPr id="11" name="TextBox 11"/>
           <p:cNvSpPr txBox="1"/>
           <p:nvPr/>
         </p:nvSpPr>
@@ -9282,6 +9159,16 @@
                 <a:spcPct val="98770"/>
               </a:lnSpc>
             </a:pPr>
+            <a:r>
+              <a:rPr lang="en-US" altLang="ko-KR" sz="5400" dirty="0" smtClean="0">
+                <a:solidFill>
+                  <a:srgbClr val="4D4D4D"/>
+                </a:solidFill>
+                <a:latin typeface="Noto Sans KR Medium" pitchFamily="50" charset="-127"/>
+                <a:ea typeface="Noto Sans KR Medium" pitchFamily="50" charset="-127"/>
+              </a:rPr>
+              <a:t>4.</a:t>
+            </a:r>
             <a:r>
               <a:rPr lang="ko-KR" altLang="en-US" sz="5400" dirty="0" smtClean="0">
                 <a:solidFill>
@@ -9290,17 +9177,7 @@
                 <a:latin typeface="Noto Sans KR Medium" pitchFamily="50" charset="-127"/>
                 <a:ea typeface="Noto Sans KR Medium" pitchFamily="50" charset="-127"/>
               </a:rPr>
-              <a:t>주성분 </a:t>
-            </a:r>
-            <a:r>
-              <a:rPr lang="ko-KR" altLang="en-US" sz="5400" dirty="0" err="1" smtClean="0">
-                <a:solidFill>
-                  <a:srgbClr val="4D4D4D"/>
-                </a:solidFill>
-                <a:latin typeface="Noto Sans KR Medium" pitchFamily="50" charset="-127"/>
-                <a:ea typeface="Noto Sans KR Medium" pitchFamily="50" charset="-127"/>
-              </a:rPr>
-              <a:t>적재값</a:t>
+              <a:t>원본 데이터 변환</a:t>
             </a:r>
             <a:endParaRPr lang="ko-KR" sz="5400" b="0" i="0" u="none" strike="noStrike" dirty="0">
               <a:solidFill>
@@ -9314,7 +9191,131 @@
       </p:sp>
       <p:sp>
         <p:nvSpPr>
-          <p:cNvPr id="10" name="TextBox 12"/>
+          <p:cNvPr id="9" name="TextBox 8">
+            <a:extLst>
+              <a:ext uri="{FF2B5EF4-FFF2-40B4-BE49-F238E27FC236}">
+                <a16:creationId xmlns="" xmlns:a16="http://schemas.microsoft.com/office/drawing/2014/main" id="{9868D4D3-D354-8A4A-E870-E4A7DA56A02E}"/>
+              </a:ext>
+            </a:extLst>
+          </p:cNvPr>
+          <p:cNvSpPr txBox="1"/>
+          <p:nvPr/>
+        </p:nvSpPr>
+        <p:spPr>
+          <a:xfrm>
+            <a:off x="990600" y="2476500"/>
+            <a:ext cx="9144000" cy="430887"/>
+          </a:xfrm>
+          <a:prstGeom prst="rect">
+            <a:avLst/>
+          </a:prstGeom>
+          <a:noFill/>
+        </p:spPr>
+        <p:txBody>
+          <a:bodyPr wrap="square" rtlCol="0">
+            <a:spAutoFit/>
+          </a:bodyPr>
+          <a:lstStyle/>
+          <a:p>
+            <a:r>
+              <a:rPr lang="ko-KR" altLang="en-US" sz="2200" b="1" dirty="0" smtClean="0">
+                <a:latin typeface="NanumBarunGothic Light" panose="020B0603020101020101" pitchFamily="34" charset="-127"/>
+                <a:ea typeface="NanumBarunGothic Light" panose="020B0603020101020101" pitchFamily="34" charset="-127"/>
+              </a:rPr>
+              <a:t>계산된 주성분 점수와 표준화된 데이터의 상관관계</a:t>
+            </a:r>
+            <a:endParaRPr lang="en-US" altLang="ko-KR" sz="2200" b="1" dirty="0">
+              <a:latin typeface="NanumBarunGothic Light" panose="020B0603020101020101" pitchFamily="34" charset="-127"/>
+              <a:ea typeface="NanumBarunGothic Light" panose="020B0603020101020101" pitchFamily="34" charset="-127"/>
+            </a:endParaRPr>
+          </a:p>
+        </p:txBody>
+      </p:sp>
+      <p:sp>
+        <p:nvSpPr>
+          <p:cNvPr id="19" name="TextBox 18">
+            <a:extLst>
+              <a:ext uri="{FF2B5EF4-FFF2-40B4-BE49-F238E27FC236}">
+                <a16:creationId xmlns="" xmlns:a16="http://schemas.microsoft.com/office/drawing/2014/main" id="{6B6347B5-3E2E-502E-1BED-35445B94ECD0}"/>
+              </a:ext>
+            </a:extLst>
+          </p:cNvPr>
+          <p:cNvSpPr txBox="1"/>
+          <p:nvPr/>
+        </p:nvSpPr>
+        <p:spPr>
+          <a:xfrm>
+            <a:off x="12420600" y="3086100"/>
+            <a:ext cx="5103282" cy="461665"/>
+          </a:xfrm>
+          <a:prstGeom prst="rect">
+            <a:avLst/>
+          </a:prstGeom>
+          <a:noFill/>
+        </p:spPr>
+        <p:txBody>
+          <a:bodyPr wrap="square">
+            <a:spAutoFit/>
+          </a:bodyPr>
+          <a:lstStyle/>
+          <a:p>
+            <a:pPr algn="r"/>
+            <a:r>
+              <a:rPr lang="en-US" altLang="ko-KR" sz="2400" dirty="0" smtClean="0">
+                <a:latin typeface="NanumBarunGothic Light" panose="020B0603020101020101" pitchFamily="34" charset="-127"/>
+                <a:ea typeface="NanumBarunGothic Light" panose="020B0603020101020101" pitchFamily="34" charset="-127"/>
+              </a:rPr>
+              <a:t>3</a:t>
+            </a:r>
+            <a:r>
+              <a:rPr lang="en-US" altLang="ko-KR" sz="2400" dirty="0" smtClean="0">
+                <a:effectLst/>
+                <a:latin typeface="NanumBarunGothic Light" panose="020B0603020101020101" pitchFamily="34" charset="-127"/>
+                <a:ea typeface="NanumBarunGothic Light" panose="020B0603020101020101" pitchFamily="34" charset="-127"/>
+              </a:rPr>
+              <a:t> </a:t>
+            </a:r>
+            <a:r>
+              <a:rPr lang="en-US" altLang="ko-KR" sz="2400" dirty="0">
+                <a:effectLst/>
+                <a:latin typeface="NanumBarunGothic Light" panose="020B0603020101020101" pitchFamily="34" charset="-127"/>
+                <a:ea typeface="NanumBarunGothic Light" panose="020B0603020101020101" pitchFamily="34" charset="-127"/>
+              </a:rPr>
+              <a:t>rows × </a:t>
+            </a:r>
+            <a:r>
+              <a:rPr lang="en-US" altLang="ko-KR" sz="2400" dirty="0" smtClean="0">
+                <a:latin typeface="NanumBarunGothic Light" panose="020B0603020101020101" pitchFamily="34" charset="-127"/>
+                <a:ea typeface="NanumBarunGothic Light" panose="020B0603020101020101" pitchFamily="34" charset="-127"/>
+              </a:rPr>
+              <a:t>17</a:t>
+            </a:r>
+            <a:r>
+              <a:rPr lang="en-US" altLang="ko-KR" sz="2400" dirty="0" smtClean="0">
+                <a:effectLst/>
+                <a:latin typeface="NanumBarunGothic Light" panose="020B0603020101020101" pitchFamily="34" charset="-127"/>
+                <a:ea typeface="NanumBarunGothic Light" panose="020B0603020101020101" pitchFamily="34" charset="-127"/>
+              </a:rPr>
+              <a:t> </a:t>
+            </a:r>
+            <a:r>
+              <a:rPr lang="en-US" altLang="ko-KR" sz="2400" dirty="0">
+                <a:effectLst/>
+                <a:latin typeface="NanumBarunGothic Light" panose="020B0603020101020101" pitchFamily="34" charset="-127"/>
+                <a:ea typeface="NanumBarunGothic Light" panose="020B0603020101020101" pitchFamily="34" charset="-127"/>
+              </a:rPr>
+              <a:t>columns</a:t>
+            </a:r>
+            <a:endParaRPr lang="ko-KR" altLang="en-US" sz="2400" dirty="0">
+              <a:latin typeface="NanumBarunGothic Light" panose="020B0603020101020101" pitchFamily="34" charset="-127"/>
+              <a:ea typeface="NanumBarunGothic Light" panose="020B0603020101020101" pitchFamily="34" charset="-127"/>
+            </a:endParaRPr>
+          </a:p>
+        </p:txBody>
+      </p:sp>
+      <p:sp>
+        <p:nvSpPr>
+          <p:cNvPr id="14" name="TextBox 12"/>
           <p:cNvSpPr txBox="1"/>
           <p:nvPr/>
         </p:nvSpPr>
@@ -9363,6 +9364,413 @@
           </a:p>
         </p:txBody>
       </p:sp>
+      <p:pic>
+        <p:nvPicPr>
+          <p:cNvPr id="1029" name="Picture 5"/>
+          <p:cNvPicPr>
+            <a:picLocks noChangeAspect="1" noChangeArrowheads="1"/>
+          </p:cNvPicPr>
+          <p:nvPr/>
+        </p:nvPicPr>
+        <p:blipFill>
+          <a:blip r:embed="rId6" cstate="print"/>
+          <a:srcRect/>
+          <a:stretch>
+            <a:fillRect/>
+          </a:stretch>
+        </p:blipFill>
+        <p:spPr bwMode="auto">
+          <a:xfrm>
+            <a:off x="1066800" y="3009900"/>
+            <a:ext cx="2468880" cy="533400"/>
+          </a:xfrm>
+          <a:prstGeom prst="rect">
+            <a:avLst/>
+          </a:prstGeom>
+          <a:noFill/>
+          <a:ln w="9525">
+            <a:noFill/>
+            <a:miter lim="800000"/>
+            <a:headEnd/>
+            <a:tailEnd/>
+          </a:ln>
+          <a:effectLst/>
+        </p:spPr>
+      </p:pic>
+      <p:pic>
+        <p:nvPicPr>
+          <p:cNvPr id="1030" name="Picture 6"/>
+          <p:cNvPicPr>
+            <a:picLocks noChangeAspect="1" noChangeArrowheads="1"/>
+          </p:cNvPicPr>
+          <p:nvPr/>
+        </p:nvPicPr>
+        <p:blipFill>
+          <a:blip r:embed="rId7" cstate="print"/>
+          <a:srcRect/>
+          <a:stretch>
+            <a:fillRect/>
+          </a:stretch>
+        </p:blipFill>
+        <p:spPr bwMode="auto">
+          <a:xfrm>
+            <a:off x="990600" y="3619500"/>
+            <a:ext cx="16508225" cy="1295400"/>
+          </a:xfrm>
+          <a:prstGeom prst="rect">
+            <a:avLst/>
+          </a:prstGeom>
+          <a:noFill/>
+          <a:ln w="9525">
+            <a:noFill/>
+            <a:miter lim="800000"/>
+            <a:headEnd/>
+            <a:tailEnd/>
+          </a:ln>
+          <a:effectLst/>
+        </p:spPr>
+      </p:pic>
+      <p:sp>
+        <p:nvSpPr>
+          <p:cNvPr id="17" name="TextBox 16">
+            <a:extLst>
+              <a:ext uri="{FF2B5EF4-FFF2-40B4-BE49-F238E27FC236}">
+                <a16:creationId xmlns="" xmlns:a16="http://schemas.microsoft.com/office/drawing/2014/main" id="{9868D4D3-D354-8A4A-E870-E4A7DA56A02E}"/>
+              </a:ext>
+            </a:extLst>
+          </p:cNvPr>
+          <p:cNvSpPr txBox="1"/>
+          <p:nvPr/>
+        </p:nvSpPr>
+        <p:spPr>
+          <a:xfrm>
+            <a:off x="990600" y="5524500"/>
+            <a:ext cx="2590800" cy="430887"/>
+          </a:xfrm>
+          <a:prstGeom prst="rect">
+            <a:avLst/>
+          </a:prstGeom>
+          <a:noFill/>
+        </p:spPr>
+        <p:txBody>
+          <a:bodyPr wrap="square" rtlCol="0">
+            <a:spAutoFit/>
+          </a:bodyPr>
+          <a:lstStyle/>
+          <a:p>
+            <a:r>
+              <a:rPr lang="ko-KR" altLang="en-US" sz="2200" b="1" dirty="0" smtClean="0">
+                <a:latin typeface="NanumBarunGothic Light" panose="020B0603020101020101" pitchFamily="34" charset="-127"/>
+                <a:ea typeface="NanumBarunGothic Light" panose="020B0603020101020101" pitchFamily="34" charset="-127"/>
+              </a:rPr>
+              <a:t>고유벡터 재정의</a:t>
+            </a:r>
+            <a:endParaRPr lang="en-US" altLang="ko-KR" sz="2200" b="1" dirty="0">
+              <a:latin typeface="NanumBarunGothic Light" panose="020B0603020101020101" pitchFamily="34" charset="-127"/>
+              <a:ea typeface="NanumBarunGothic Light" panose="020B0603020101020101" pitchFamily="34" charset="-127"/>
+            </a:endParaRPr>
+          </a:p>
+        </p:txBody>
+      </p:sp>
+      <p:pic>
+        <p:nvPicPr>
+          <p:cNvPr id="1031" name="Picture 7"/>
+          <p:cNvPicPr>
+            <a:picLocks noChangeAspect="1" noChangeArrowheads="1"/>
+          </p:cNvPicPr>
+          <p:nvPr/>
+        </p:nvPicPr>
+        <p:blipFill>
+          <a:blip r:embed="rId8" cstate="print"/>
+          <a:srcRect/>
+          <a:stretch>
+            <a:fillRect/>
+          </a:stretch>
+        </p:blipFill>
+        <p:spPr bwMode="auto">
+          <a:xfrm>
+            <a:off x="914400" y="5981700"/>
+            <a:ext cx="4876800" cy="1295400"/>
+          </a:xfrm>
+          <a:prstGeom prst="rect">
+            <a:avLst/>
+          </a:prstGeom>
+          <a:noFill/>
+          <a:ln w="9525">
+            <a:noFill/>
+            <a:miter lim="800000"/>
+            <a:headEnd/>
+            <a:tailEnd/>
+          </a:ln>
+          <a:effectLst/>
+        </p:spPr>
+      </p:pic>
+      <p:sp>
+        <p:nvSpPr>
+          <p:cNvPr id="22" name="TextBox 21">
+            <a:extLst>
+              <a:ext uri="{FF2B5EF4-FFF2-40B4-BE49-F238E27FC236}">
+                <a16:creationId xmlns="" xmlns:a16="http://schemas.microsoft.com/office/drawing/2014/main" id="{9868D4D3-D354-8A4A-E870-E4A7DA56A02E}"/>
+              </a:ext>
+            </a:extLst>
+          </p:cNvPr>
+          <p:cNvSpPr txBox="1"/>
+          <p:nvPr/>
+        </p:nvSpPr>
+        <p:spPr>
+          <a:xfrm>
+            <a:off x="914400" y="4991100"/>
+            <a:ext cx="2438400" cy="461665"/>
+          </a:xfrm>
+          <a:prstGeom prst="rect">
+            <a:avLst/>
+          </a:prstGeom>
+          <a:noFill/>
+        </p:spPr>
+        <p:txBody>
+          <a:bodyPr wrap="square" rtlCol="0">
+            <a:spAutoFit/>
+          </a:bodyPr>
+          <a:lstStyle/>
+          <a:p>
+            <a:r>
+              <a:rPr lang="en-US" altLang="ko-KR" sz="2400" dirty="0" smtClean="0"/>
+              <a:t>=&gt;</a:t>
+            </a:r>
+            <a:r>
+              <a:rPr lang="ko-KR" altLang="en-US" sz="2400" dirty="0" smtClean="0"/>
+              <a:t>음의 상관관계</a:t>
+            </a:r>
+            <a:endParaRPr lang="en-US" altLang="ko-KR" sz="2200" dirty="0">
+              <a:latin typeface="NanumBarunGothic Light" panose="020B0603020101020101" pitchFamily="34" charset="-127"/>
+              <a:ea typeface="NanumBarunGothic Light" panose="020B0603020101020101" pitchFamily="34" charset="-127"/>
+            </a:endParaRPr>
+          </a:p>
+        </p:txBody>
+      </p:sp>
+      <p:pic>
+        <p:nvPicPr>
+          <p:cNvPr id="1032" name="Picture 8"/>
+          <p:cNvPicPr>
+            <a:picLocks noChangeAspect="1" noChangeArrowheads="1"/>
+          </p:cNvPicPr>
+          <p:nvPr/>
+        </p:nvPicPr>
+        <p:blipFill>
+          <a:blip r:embed="rId9" cstate="print"/>
+          <a:srcRect/>
+          <a:stretch>
+            <a:fillRect/>
+          </a:stretch>
+        </p:blipFill>
+        <p:spPr bwMode="auto">
+          <a:xfrm>
+            <a:off x="5791200" y="4991100"/>
+            <a:ext cx="3276600" cy="4953000"/>
+          </a:xfrm>
+          <a:prstGeom prst="rect">
+            <a:avLst/>
+          </a:prstGeom>
+          <a:noFill/>
+          <a:ln w="9525">
+            <a:noFill/>
+            <a:miter lim="800000"/>
+            <a:headEnd/>
+            <a:tailEnd/>
+          </a:ln>
+          <a:effectLst/>
+        </p:spPr>
+      </p:pic>
+      <p:pic>
+        <p:nvPicPr>
+          <p:cNvPr id="1033" name="Picture 9"/>
+          <p:cNvPicPr>
+            <a:picLocks noChangeAspect="1" noChangeArrowheads="1"/>
+          </p:cNvPicPr>
+          <p:nvPr/>
+        </p:nvPicPr>
+        <p:blipFill>
+          <a:blip r:embed="rId10" cstate="print"/>
+          <a:srcRect/>
+          <a:stretch>
+            <a:fillRect/>
+          </a:stretch>
+        </p:blipFill>
+        <p:spPr bwMode="auto">
+          <a:xfrm>
+            <a:off x="9144000" y="6057900"/>
+            <a:ext cx="2057400" cy="908462"/>
+          </a:xfrm>
+          <a:prstGeom prst="rect">
+            <a:avLst/>
+          </a:prstGeom>
+          <a:noFill/>
+          <a:ln w="9525">
+            <a:noFill/>
+            <a:miter lim="800000"/>
+            <a:headEnd/>
+            <a:tailEnd/>
+          </a:ln>
+          <a:effectLst/>
+        </p:spPr>
+      </p:pic>
+      <p:sp>
+        <p:nvSpPr>
+          <p:cNvPr id="24" name="TextBox 23">
+            <a:extLst>
+              <a:ext uri="{FF2B5EF4-FFF2-40B4-BE49-F238E27FC236}">
+                <a16:creationId xmlns="" xmlns:a16="http://schemas.microsoft.com/office/drawing/2014/main" id="{9868D4D3-D354-8A4A-E870-E4A7DA56A02E}"/>
+              </a:ext>
+            </a:extLst>
+          </p:cNvPr>
+          <p:cNvSpPr txBox="1"/>
+          <p:nvPr/>
+        </p:nvSpPr>
+        <p:spPr>
+          <a:xfrm>
+            <a:off x="9067800" y="5524500"/>
+            <a:ext cx="2590800" cy="430887"/>
+          </a:xfrm>
+          <a:prstGeom prst="rect">
+            <a:avLst/>
+          </a:prstGeom>
+          <a:noFill/>
+        </p:spPr>
+        <p:txBody>
+          <a:bodyPr wrap="square" rtlCol="0">
+            <a:spAutoFit/>
+          </a:bodyPr>
+          <a:lstStyle/>
+          <a:p>
+            <a:r>
+              <a:rPr lang="ko-KR" altLang="en-US" sz="2200" b="1" dirty="0" smtClean="0">
+                <a:latin typeface="NanumBarunGothic Light" panose="020B0603020101020101" pitchFamily="34" charset="-127"/>
+                <a:ea typeface="NanumBarunGothic Light" panose="020B0603020101020101" pitchFamily="34" charset="-127"/>
+              </a:rPr>
+              <a:t>주성분점수 재정의</a:t>
+            </a:r>
+            <a:endParaRPr lang="en-US" altLang="ko-KR" sz="2200" b="1" dirty="0">
+              <a:latin typeface="NanumBarunGothic Light" panose="020B0603020101020101" pitchFamily="34" charset="-127"/>
+              <a:ea typeface="NanumBarunGothic Light" panose="020B0603020101020101" pitchFamily="34" charset="-127"/>
+            </a:endParaRPr>
+          </a:p>
+        </p:txBody>
+      </p:sp>
+      <p:sp>
+        <p:nvSpPr>
+          <p:cNvPr id="26" name="TextBox 25">
+            <a:extLst>
+              <a:ext uri="{FF2B5EF4-FFF2-40B4-BE49-F238E27FC236}">
+                <a16:creationId xmlns="" xmlns:a16="http://schemas.microsoft.com/office/drawing/2014/main" id="{6B6347B5-3E2E-502E-1BED-35445B94ECD0}"/>
+              </a:ext>
+            </a:extLst>
+          </p:cNvPr>
+          <p:cNvSpPr txBox="1"/>
+          <p:nvPr/>
+        </p:nvSpPr>
+        <p:spPr>
+          <a:xfrm>
+            <a:off x="15468600" y="9486900"/>
+            <a:ext cx="2512482" cy="461665"/>
+          </a:xfrm>
+          <a:prstGeom prst="rect">
+            <a:avLst/>
+          </a:prstGeom>
+          <a:noFill/>
+        </p:spPr>
+        <p:txBody>
+          <a:bodyPr wrap="square">
+            <a:spAutoFit/>
+          </a:bodyPr>
+          <a:lstStyle/>
+          <a:p>
+            <a:pPr algn="r"/>
+            <a:r>
+              <a:rPr lang="en-US" altLang="ko-KR" sz="2400" dirty="0" smtClean="0">
+                <a:latin typeface="NanumBarunGothic Light" panose="020B0603020101020101" pitchFamily="34" charset="-127"/>
+                <a:ea typeface="NanumBarunGothic Light" panose="020B0603020101020101" pitchFamily="34" charset="-127"/>
+              </a:rPr>
+              <a:t>211rows</a:t>
+            </a:r>
+            <a:r>
+              <a:rPr lang="en-US" altLang="ko-KR" sz="2400" dirty="0" smtClean="0">
+                <a:effectLst/>
+                <a:latin typeface="NanumBarunGothic Light" panose="020B0603020101020101" pitchFamily="34" charset="-127"/>
+                <a:ea typeface="NanumBarunGothic Light" panose="020B0603020101020101" pitchFamily="34" charset="-127"/>
+              </a:rPr>
+              <a:t> </a:t>
+            </a:r>
+            <a:r>
+              <a:rPr lang="en-US" altLang="ko-KR" sz="2400" dirty="0">
+                <a:effectLst/>
+                <a:latin typeface="NanumBarunGothic Light" panose="020B0603020101020101" pitchFamily="34" charset="-127"/>
+                <a:ea typeface="NanumBarunGothic Light" panose="020B0603020101020101" pitchFamily="34" charset="-127"/>
+              </a:rPr>
+              <a:t>× </a:t>
+            </a:r>
+            <a:r>
+              <a:rPr lang="en-US" altLang="ko-KR" sz="2400" dirty="0" smtClean="0">
+                <a:latin typeface="NanumBarunGothic Light" panose="020B0603020101020101" pitchFamily="34" charset="-127"/>
+                <a:ea typeface="NanumBarunGothic Light" panose="020B0603020101020101" pitchFamily="34" charset="-127"/>
+              </a:rPr>
+              <a:t>3</a:t>
+            </a:r>
+            <a:r>
+              <a:rPr lang="en-US" altLang="ko-KR" sz="2400" dirty="0" smtClean="0">
+                <a:effectLst/>
+                <a:latin typeface="NanumBarunGothic Light" panose="020B0603020101020101" pitchFamily="34" charset="-127"/>
+                <a:ea typeface="NanumBarunGothic Light" panose="020B0603020101020101" pitchFamily="34" charset="-127"/>
+              </a:rPr>
+              <a:t> </a:t>
+            </a:r>
+            <a:r>
+              <a:rPr lang="en-US" altLang="ko-KR" sz="2400" dirty="0" err="1" smtClean="0">
+                <a:effectLst/>
+                <a:latin typeface="NanumBarunGothic Light" panose="020B0603020101020101" pitchFamily="34" charset="-127"/>
+                <a:ea typeface="NanumBarunGothic Light" panose="020B0603020101020101" pitchFamily="34" charset="-127"/>
+              </a:rPr>
+              <a:t>col</a:t>
+            </a:r>
+            <a:endParaRPr lang="ko-KR" altLang="en-US" sz="2400" dirty="0">
+              <a:latin typeface="NanumBarunGothic Light" panose="020B0603020101020101" pitchFamily="34" charset="-127"/>
+              <a:ea typeface="NanumBarunGothic Light" panose="020B0603020101020101" pitchFamily="34" charset="-127"/>
+            </a:endParaRPr>
+          </a:p>
+        </p:txBody>
+      </p:sp>
+      <p:pic>
+        <p:nvPicPr>
+          <p:cNvPr id="1037" name="Picture 13"/>
+          <p:cNvPicPr>
+            <a:picLocks noChangeAspect="1" noChangeArrowheads="1"/>
+          </p:cNvPicPr>
+          <p:nvPr/>
+        </p:nvPicPr>
+        <p:blipFill>
+          <a:blip r:embed="rId11" cstate="print"/>
+          <a:srcRect/>
+          <a:stretch>
+            <a:fillRect/>
+          </a:stretch>
+        </p:blipFill>
+        <p:spPr bwMode="auto">
+          <a:xfrm>
+            <a:off x="11506200" y="4991100"/>
+            <a:ext cx="4038600" cy="4988874"/>
+          </a:xfrm>
+          <a:prstGeom prst="rect">
+            <a:avLst/>
+          </a:prstGeom>
+          <a:noFill/>
+          <a:ln w="9525">
+            <a:noFill/>
+            <a:miter lim="800000"/>
+            <a:headEnd/>
+            <a:tailEnd/>
+          </a:ln>
+          <a:effectLst/>
+        </p:spPr>
+      </p:pic>
     </p:spTree>
   </p:cSld>
   <p:clrMapOvr>
@@ -9379,6 +9787,504 @@
 </file>
 
 <file path=ppt/slides/slide15.xml><?xml version="1.0" encoding="utf-8"?>
+<p:sld xmlns:a="http://schemas.openxmlformats.org/drawingml/2006/main" xmlns:r="http://schemas.openxmlformats.org/officeDocument/2006/relationships" xmlns:p="http://schemas.openxmlformats.org/presentationml/2006/main">
+  <p:cSld>
+    <p:bg>
+      <p:bgPr>
+        <a:solidFill>
+          <a:srgbClr val="229BEE"/>
+        </a:solidFill>
+        <a:effectLst/>
+      </p:bgPr>
+    </p:bg>
+    <p:spTree>
+      <p:nvGrpSpPr>
+        <p:cNvPr id="1" name=""/>
+        <p:cNvGrpSpPr/>
+        <p:nvPr/>
+      </p:nvGrpSpPr>
+      <p:grpSpPr>
+        <a:xfrm>
+          <a:off x="0" y="0"/>
+          <a:ext cx="0" cy="0"/>
+          <a:chOff x="0" y="0"/>
+          <a:chExt cx="0" cy="0"/>
+        </a:xfrm>
+      </p:grpSpPr>
+      <p:pic>
+        <p:nvPicPr>
+          <p:cNvPr id="23" name="Picture 2"/>
+          <p:cNvPicPr>
+            <a:picLocks noChangeAspect="1"/>
+          </p:cNvPicPr>
+          <p:nvPr/>
+        </p:nvPicPr>
+        <p:blipFill>
+          <a:blip r:embed="rId2" cstate="print"/>
+          <a:stretch>
+            <a:fillRect/>
+          </a:stretch>
+        </p:blipFill>
+        <p:spPr>
+          <a:xfrm>
+            <a:off x="292100" y="292100"/>
+            <a:ext cx="17716500" cy="9715500"/>
+          </a:xfrm>
+          <a:prstGeom prst="rect">
+            <a:avLst/>
+          </a:prstGeom>
+        </p:spPr>
+      </p:pic>
+      <p:pic>
+        <p:nvPicPr>
+          <p:cNvPr id="3" name="Picture 3"/>
+          <p:cNvPicPr>
+            <a:picLocks noChangeAspect="1"/>
+          </p:cNvPicPr>
+          <p:nvPr/>
+        </p:nvPicPr>
+        <p:blipFill>
+          <a:blip r:embed="rId3" cstate="print"/>
+          <a:stretch>
+            <a:fillRect/>
+          </a:stretch>
+        </p:blipFill>
+        <p:spPr>
+          <a:xfrm>
+            <a:off x="1003300" y="2171700"/>
+            <a:ext cx="16281400" cy="25400"/>
+          </a:xfrm>
+          <a:prstGeom prst="rect">
+            <a:avLst/>
+          </a:prstGeom>
+        </p:spPr>
+      </p:pic>
+      <p:pic>
+        <p:nvPicPr>
+          <p:cNvPr id="4" name="Picture 4"/>
+          <p:cNvPicPr>
+            <a:picLocks noChangeAspect="1"/>
+          </p:cNvPicPr>
+          <p:nvPr/>
+        </p:nvPicPr>
+        <p:blipFill>
+          <a:blip r:embed="rId4" cstate="print"/>
+          <a:stretch>
+            <a:fillRect/>
+          </a:stretch>
+        </p:blipFill>
+        <p:spPr>
+          <a:xfrm>
+            <a:off x="16611600" y="0"/>
+            <a:ext cx="673100" cy="965200"/>
+          </a:xfrm>
+          <a:prstGeom prst="rect">
+            <a:avLst/>
+          </a:prstGeom>
+        </p:spPr>
+      </p:pic>
+      <p:sp>
+        <p:nvSpPr>
+          <p:cNvPr id="14" name="내용 개체 틀 2">
+            <a:extLst>
+              <a:ext uri="{FF2B5EF4-FFF2-40B4-BE49-F238E27FC236}">
+                <a16:creationId xmlns="" xmlns:a16="http://schemas.microsoft.com/office/drawing/2014/main" id="{355A219D-5239-41A0-B442-2565DCF038E5}"/>
+              </a:ext>
+            </a:extLst>
+          </p:cNvPr>
+          <p:cNvSpPr txBox="1">
+            <a:spLocks/>
+          </p:cNvSpPr>
+          <p:nvPr/>
+        </p:nvSpPr>
+        <p:spPr>
+          <a:xfrm>
+            <a:off x="1295400" y="2705100"/>
+            <a:ext cx="15849600" cy="7162800"/>
+          </a:xfrm>
+          <a:prstGeom prst="rect">
+            <a:avLst/>
+          </a:prstGeom>
+        </p:spPr>
+        <p:txBody>
+          <a:bodyPr>
+            <a:normAutofit/>
+          </a:bodyPr>
+          <a:lstStyle/>
+          <a:p>
+            <a:r>
+              <a:rPr lang="ko-KR" altLang="en-US" sz="2800" dirty="0" smtClean="0"/>
+              <a:t>＜</a:t>
+            </a:r>
+            <a:r>
+              <a:rPr lang="ko-KR" altLang="en-US" sz="2800" b="1" dirty="0" smtClean="0"/>
+              <a:t>정의＞</a:t>
+            </a:r>
+            <a:r>
+              <a:rPr lang="ko-KR" altLang="en-US" sz="2800" dirty="0" smtClean="0"/>
+              <a:t/>
+            </a:r>
+            <a:br>
+              <a:rPr lang="ko-KR" altLang="en-US" sz="2800" dirty="0" smtClean="0"/>
+            </a:br>
+            <a:r>
+              <a:rPr lang="ko-KR" altLang="en-US" sz="2800" dirty="0" smtClean="0"/>
+              <a:t>→ 주성분 분석</a:t>
+            </a:r>
+            <a:r>
+              <a:rPr lang="en-US" altLang="ko-KR" sz="2800" dirty="0" smtClean="0"/>
+              <a:t>(PCA)</a:t>
+            </a:r>
+            <a:r>
+              <a:rPr lang="ko-KR" altLang="en-US" sz="2800" dirty="0" smtClean="0"/>
+              <a:t>에서 각 변수가 주성분에 얼마나 기여하는지 나타내는 계수</a:t>
+            </a:r>
+            <a:endParaRPr lang="en-US" altLang="ko-KR" sz="2800" dirty="0" smtClean="0"/>
+          </a:p>
+          <a:p>
+            <a:endParaRPr lang="ko-KR" altLang="en-US" sz="2800" dirty="0" smtClean="0"/>
+          </a:p>
+          <a:p>
+            <a:r>
+              <a:rPr lang="ko-KR" altLang="en-US" sz="2800" dirty="0" smtClean="0"/>
+              <a:t>＜</a:t>
+            </a:r>
+            <a:r>
+              <a:rPr lang="ko-KR" altLang="en-US" sz="2800" b="1" dirty="0" err="1" smtClean="0"/>
+              <a:t>적재값으로</a:t>
+            </a:r>
+            <a:r>
+              <a:rPr lang="ko-KR" altLang="en-US" sz="2800" b="1" dirty="0" smtClean="0"/>
+              <a:t> 알 수 있는 것＞</a:t>
+            </a:r>
+            <a:r>
+              <a:rPr lang="ko-KR" altLang="en-US" sz="2800" dirty="0" smtClean="0"/>
+              <a:t/>
+            </a:r>
+            <a:br>
+              <a:rPr lang="ko-KR" altLang="en-US" sz="2800" dirty="0" smtClean="0"/>
+            </a:br>
+            <a:r>
+              <a:rPr lang="ko-KR" altLang="en-US" sz="2800" b="1" dirty="0" smtClean="0"/>
+              <a:t>１）변수의 영향력과　해석</a:t>
+            </a:r>
+            <a:r>
+              <a:rPr lang="ko-KR" altLang="en-US" sz="2800" dirty="0" smtClean="0"/>
+              <a:t/>
+            </a:r>
+            <a:br>
+              <a:rPr lang="ko-KR" altLang="en-US" sz="2800" dirty="0" smtClean="0"/>
+            </a:br>
+            <a:r>
+              <a:rPr lang="ko-KR" altLang="en-US" sz="2800" dirty="0" smtClean="0"/>
+              <a:t>→ </a:t>
+            </a:r>
+            <a:r>
+              <a:rPr lang="ko-KR" altLang="en-US" sz="2800" dirty="0" err="1" smtClean="0"/>
+              <a:t>적재값의</a:t>
+            </a:r>
+            <a:r>
+              <a:rPr lang="ko-KR" altLang="en-US" sz="2800" dirty="0" smtClean="0"/>
+              <a:t>　절댓값이 클수록 해당 변수는 주성분에 더 큰 영향</a:t>
+            </a:r>
+          </a:p>
+          <a:p>
+            <a:r>
+              <a:rPr lang="ko-KR" altLang="en-US" sz="2800" b="1" dirty="0" smtClean="0"/>
+              <a:t> ２）주성분 해석</a:t>
+            </a:r>
+            <a:r>
+              <a:rPr lang="ko-KR" altLang="en-US" sz="2800" dirty="0" smtClean="0"/>
+              <a:t/>
+            </a:r>
+            <a:br>
+              <a:rPr lang="ko-KR" altLang="en-US" sz="2800" dirty="0" smtClean="0"/>
+            </a:br>
+            <a:r>
+              <a:rPr lang="ko-KR" altLang="en-US" sz="2800" dirty="0" smtClean="0"/>
+              <a:t>→ </a:t>
+            </a:r>
+            <a:r>
+              <a:rPr lang="ko-KR" altLang="en-US" sz="2800" dirty="0" err="1" smtClean="0"/>
+              <a:t>적재값의</a:t>
+            </a:r>
+            <a:r>
+              <a:rPr lang="ko-KR" altLang="en-US" sz="2800" dirty="0" smtClean="0"/>
+              <a:t>　절댓값이 높은 변수를　통해　해당 주성분이 어떤 특성을 설명하는지 알 수 있음</a:t>
+            </a:r>
+          </a:p>
+          <a:p>
+            <a:r>
+              <a:rPr lang="ko-KR" altLang="en-US" sz="2800" dirty="0" smtClean="0"/>
+              <a:t> </a:t>
+            </a:r>
+            <a:r>
+              <a:rPr lang="ko-KR" altLang="en-US" sz="2800" b="1" dirty="0" smtClean="0"/>
+              <a:t>３）</a:t>
+            </a:r>
+            <a:r>
+              <a:rPr lang="ko-KR" altLang="en-US" sz="2800" b="1" dirty="0" err="1" smtClean="0"/>
+              <a:t>적재값</a:t>
+            </a:r>
+            <a:r>
+              <a:rPr lang="ko-KR" altLang="en-US" sz="2800" b="1" dirty="0" smtClean="0"/>
+              <a:t> 부호 해석 가능</a:t>
+            </a:r>
+            <a:r>
+              <a:rPr lang="ko-KR" altLang="en-US" sz="2800" dirty="0" smtClean="0"/>
+              <a:t/>
+            </a:r>
+            <a:br>
+              <a:rPr lang="ko-KR" altLang="en-US" sz="2800" dirty="0" smtClean="0"/>
+            </a:br>
+            <a:r>
+              <a:rPr lang="ko-KR" altLang="en-US" sz="2800" dirty="0" smtClean="0"/>
+              <a:t>→ 양수</a:t>
+            </a:r>
+            <a:r>
+              <a:rPr lang="en-US" altLang="ko-KR" sz="2800" dirty="0" smtClean="0"/>
+              <a:t>(+) </a:t>
+            </a:r>
+            <a:r>
+              <a:rPr lang="ko-KR" altLang="en-US" sz="2800" dirty="0" smtClean="0"/>
+              <a:t>：</a:t>
+            </a:r>
+            <a:r>
+              <a:rPr lang="en-US" altLang="ko-KR" sz="2800" dirty="0" smtClean="0"/>
+              <a:t> </a:t>
+            </a:r>
+            <a:r>
+              <a:rPr lang="ko-KR" altLang="en-US" sz="2800" dirty="0" smtClean="0"/>
+              <a:t>주성분과 같은 방향으로 증가</a:t>
+            </a:r>
+            <a:br>
+              <a:rPr lang="ko-KR" altLang="en-US" sz="2800" dirty="0" smtClean="0"/>
+            </a:br>
+            <a:r>
+              <a:rPr lang="ko-KR" altLang="en-US" sz="2800" dirty="0" smtClean="0"/>
+              <a:t>→ 음수</a:t>
+            </a:r>
+            <a:r>
+              <a:rPr lang="en-US" altLang="ko-KR" sz="2800" dirty="0" smtClean="0"/>
+              <a:t>(-) </a:t>
+            </a:r>
+            <a:r>
+              <a:rPr lang="ko-KR" altLang="en-US" sz="2800" dirty="0" smtClean="0"/>
+              <a:t>：주성분과 반대 방향으로 변화</a:t>
+            </a:r>
+            <a:endParaRPr lang="en-US" altLang="ko-KR" sz="2800" dirty="0" smtClean="0"/>
+          </a:p>
+          <a:p>
+            <a:endParaRPr lang="en-US" altLang="ko-KR" sz="2800" b="1" dirty="0" smtClean="0"/>
+          </a:p>
+          <a:p>
+            <a:r>
+              <a:rPr lang="ko-KR" altLang="en-US" sz="2800" b="1" dirty="0" smtClean="0"/>
+              <a:t>＜고유벡터와　비교＞</a:t>
+            </a:r>
+            <a:endParaRPr lang="en-US" altLang="ko-KR" sz="2800" b="1" dirty="0" smtClean="0"/>
+          </a:p>
+          <a:p>
+            <a:r>
+              <a:rPr lang="ko-KR" altLang="en-US" sz="2800" dirty="0" smtClean="0"/>
+              <a:t>→ 주성분 </a:t>
+            </a:r>
+            <a:r>
+              <a:rPr lang="ko-KR" altLang="en-US" sz="2800" dirty="0" err="1" smtClean="0"/>
+              <a:t>적재값과</a:t>
+            </a:r>
+            <a:r>
+              <a:rPr lang="ko-KR" altLang="en-US" sz="2800" dirty="0" smtClean="0"/>
+              <a:t> 고유벡터는 크기</a:t>
+            </a:r>
+            <a:r>
+              <a:rPr lang="en-US" altLang="ko-KR" sz="2800" dirty="0" smtClean="0"/>
+              <a:t>(</a:t>
+            </a:r>
+            <a:r>
+              <a:rPr lang="ko-KR" altLang="en-US" sz="2800" dirty="0" smtClean="0"/>
+              <a:t>비율</a:t>
+            </a:r>
+            <a:r>
+              <a:rPr lang="en-US" altLang="ko-KR" sz="2800" dirty="0" smtClean="0"/>
+              <a:t>)</a:t>
+            </a:r>
+            <a:r>
+              <a:rPr lang="ko-KR" altLang="en-US" sz="2800" dirty="0" smtClean="0"/>
+              <a:t>는 같지만，</a:t>
+            </a:r>
+            <a:endParaRPr lang="en-US" altLang="ko-KR" sz="2800" dirty="0" smtClean="0"/>
+          </a:p>
+          <a:p>
+            <a:r>
+              <a:rPr lang="ko-KR" altLang="en-US" sz="2800" dirty="0" smtClean="0"/>
+              <a:t>계산 방법</a:t>
+            </a:r>
+            <a:r>
+              <a:rPr lang="en-US" altLang="ko-KR" sz="2800" dirty="0" smtClean="0"/>
+              <a:t>(</a:t>
+            </a:r>
+            <a:r>
+              <a:rPr lang="en-US" altLang="ko-KR" sz="2800" dirty="0" err="1" smtClean="0"/>
+              <a:t>eigen</a:t>
+            </a:r>
+            <a:r>
+              <a:rPr lang="en-US" altLang="ko-KR" sz="2800" dirty="0" smtClean="0"/>
+              <a:t> </a:t>
+            </a:r>
+            <a:r>
+              <a:rPr lang="en-US" altLang="ko-KR" sz="2800" dirty="0" err="1" smtClean="0"/>
+              <a:t>vs</a:t>
+            </a:r>
+            <a:r>
+              <a:rPr lang="en-US" altLang="ko-KR" sz="2800" dirty="0" smtClean="0"/>
+              <a:t> </a:t>
+            </a:r>
+            <a:r>
+              <a:rPr lang="en-US" altLang="ko-KR" sz="2800" dirty="0" err="1" smtClean="0"/>
+              <a:t>prcomp</a:t>
+            </a:r>
+            <a:r>
+              <a:rPr lang="en-US" altLang="ko-KR" sz="2800" dirty="0" smtClean="0"/>
+              <a:t>, SVD </a:t>
+            </a:r>
+            <a:r>
+              <a:rPr lang="ko-KR" altLang="en-US" sz="2800" dirty="0" smtClean="0"/>
+              <a:t>사용 여부</a:t>
+            </a:r>
+            <a:r>
+              <a:rPr lang="en-US" altLang="ko-KR" sz="2800" dirty="0" smtClean="0"/>
+              <a:t>)</a:t>
+            </a:r>
+            <a:r>
+              <a:rPr lang="ko-KR" altLang="en-US" sz="2800" dirty="0" smtClean="0"/>
+              <a:t>에 따라　부호는 다를 수도 있음</a:t>
+            </a:r>
+            <a:endParaRPr lang="en-US" altLang="ko-KR" sz="2800" dirty="0" smtClean="0"/>
+          </a:p>
+        </p:txBody>
+      </p:sp>
+      <p:sp>
+        <p:nvSpPr>
+          <p:cNvPr id="9" name="TextBox 11"/>
+          <p:cNvSpPr txBox="1"/>
+          <p:nvPr/>
+        </p:nvSpPr>
+        <p:spPr>
+          <a:xfrm>
+            <a:off x="2476500" y="876300"/>
+            <a:ext cx="13335000" cy="1409700"/>
+          </a:xfrm>
+          <a:prstGeom prst="rect">
+            <a:avLst/>
+          </a:prstGeom>
+        </p:spPr>
+        <p:txBody>
+          <a:bodyPr lIns="0" tIns="0" rIns="0" bIns="0" rtlCol="0" anchor="ctr"/>
+          <a:lstStyle/>
+          <a:p>
+            <a:pPr lvl="0" algn="ctr">
+              <a:lnSpc>
+                <a:spcPct val="98770"/>
+              </a:lnSpc>
+            </a:pPr>
+            <a:r>
+              <a:rPr lang="ko-KR" altLang="en-US" sz="5400" dirty="0" smtClean="0">
+                <a:solidFill>
+                  <a:srgbClr val="4D4D4D"/>
+                </a:solidFill>
+                <a:latin typeface="Noto Sans KR Medium" pitchFamily="50" charset="-127"/>
+                <a:ea typeface="Noto Sans KR Medium" pitchFamily="50" charset="-127"/>
+              </a:rPr>
+              <a:t>주성분 </a:t>
+            </a:r>
+            <a:r>
+              <a:rPr lang="ko-KR" altLang="en-US" sz="5400" dirty="0" err="1" smtClean="0">
+                <a:solidFill>
+                  <a:srgbClr val="4D4D4D"/>
+                </a:solidFill>
+                <a:latin typeface="Noto Sans KR Medium" pitchFamily="50" charset="-127"/>
+                <a:ea typeface="Noto Sans KR Medium" pitchFamily="50" charset="-127"/>
+              </a:rPr>
+              <a:t>적재값</a:t>
+            </a:r>
+            <a:endParaRPr lang="ko-KR" sz="5400" b="0" i="0" u="none" strike="noStrike" dirty="0">
+              <a:solidFill>
+                <a:srgbClr val="4D4D4D"/>
+              </a:solidFill>
+              <a:latin typeface="Noto Sans KR Medium" pitchFamily="50" charset="-127"/>
+              <a:ea typeface="Noto Sans KR Medium" pitchFamily="50" charset="-127"/>
+            </a:endParaRPr>
+          </a:p>
+        </p:txBody>
+      </p:sp>
+      <p:sp>
+        <p:nvSpPr>
+          <p:cNvPr id="10" name="TextBox 12"/>
+          <p:cNvSpPr txBox="1"/>
+          <p:nvPr/>
+        </p:nvSpPr>
+        <p:spPr>
+          <a:xfrm>
+            <a:off x="7391400" y="660400"/>
+            <a:ext cx="3505200" cy="444500"/>
+          </a:xfrm>
+          <a:prstGeom prst="rect">
+            <a:avLst/>
+          </a:prstGeom>
+        </p:spPr>
+        <p:txBody>
+          <a:bodyPr lIns="0" tIns="0" rIns="0" bIns="0" rtlCol="0" anchor="ctr"/>
+          <a:lstStyle/>
+          <a:p>
+            <a:pPr lvl="0" algn="ctr">
+              <a:lnSpc>
+                <a:spcPct val="98770"/>
+              </a:lnSpc>
+            </a:pPr>
+            <a:r>
+              <a:rPr lang="en-US" sz="2500" b="0" i="0" u="none" strike="noStrike" dirty="0">
+                <a:solidFill>
+                  <a:srgbClr val="229BEE"/>
+                </a:solidFill>
+                <a:latin typeface="+mn-ea"/>
+              </a:rPr>
+              <a:t>CHAPTER </a:t>
+            </a:r>
+            <a:r>
+              <a:rPr lang="en-US" sz="2500" b="0" i="0" u="none" strike="noStrike" dirty="0" smtClean="0">
+                <a:solidFill>
+                  <a:srgbClr val="229BEE"/>
+                </a:solidFill>
+                <a:latin typeface="+mn-ea"/>
+              </a:rPr>
+              <a:t>03</a:t>
+            </a:r>
+            <a:endParaRPr lang="en-US" sz="2500" b="0" i="0" u="none" strike="noStrike" dirty="0">
+              <a:solidFill>
+                <a:srgbClr val="229BEE"/>
+              </a:solidFill>
+              <a:latin typeface="+mn-ea"/>
+            </a:endParaRPr>
+          </a:p>
+        </p:txBody>
+      </p:sp>
+    </p:spTree>
+  </p:cSld>
+  <p:clrMapOvr>
+    <a:masterClrMapping/>
+  </p:clrMapOvr>
+  <p:timing>
+    <p:tnLst>
+      <p:par>
+        <p:cTn id="1" dur="indefinite" restart="never" nodeType="tmRoot"/>
+      </p:par>
+    </p:tnLst>
+  </p:timing>
+</p:sld>
+</file>
+
+<file path=ppt/slides/slide16.xml><?xml version="1.0" encoding="utf-8"?>
 <p:sld xmlns:a="http://schemas.openxmlformats.org/drawingml/2006/main" xmlns:r="http://schemas.openxmlformats.org/officeDocument/2006/relationships" xmlns:p="http://schemas.openxmlformats.org/presentationml/2006/main">
   <p:cSld>
     <p:bg>
@@ -9939,7 +10845,7 @@
 </p:sld>
 </file>
 
-<file path=ppt/slides/slide16.xml><?xml version="1.0" encoding="utf-8"?>
+<file path=ppt/slides/slide17.xml><?xml version="1.0" encoding="utf-8"?>
 <p:sld xmlns:a="http://schemas.openxmlformats.org/drawingml/2006/main" xmlns:r="http://schemas.openxmlformats.org/officeDocument/2006/relationships" xmlns:p="http://schemas.openxmlformats.org/presentationml/2006/main">
   <p:cSld>
     <p:bg>
@@ -11177,7 +12083,7 @@
 </p:sld>
 </file>
 
-<file path=ppt/slides/slide17.xml><?xml version="1.0" encoding="utf-8"?>
+<file path=ppt/slides/slide18.xml><?xml version="1.0" encoding="utf-8"?>
 <p:sld xmlns:a="http://schemas.openxmlformats.org/drawingml/2006/main" xmlns:r="http://schemas.openxmlformats.org/officeDocument/2006/relationships" xmlns:p="http://schemas.openxmlformats.org/presentationml/2006/main">
   <p:cSld>
     <p:bg>
@@ -11954,7 +12860,7 @@
 </p:sld>
 </file>
 
-<file path=ppt/slides/slide18.xml><?xml version="1.0" encoding="utf-8"?>
+<file path=ppt/slides/slide19.xml><?xml version="1.0" encoding="utf-8"?>
 <p:sld xmlns:a="http://schemas.openxmlformats.org/drawingml/2006/main" xmlns:r="http://schemas.openxmlformats.org/officeDocument/2006/relationships" xmlns:p="http://schemas.openxmlformats.org/presentationml/2006/main">
   <p:cSld>
     <p:bg>
@@ -12590,7 +13496,675 @@
 </p:sld>
 </file>
 
-<file path=ppt/slides/slide19.xml><?xml version="1.0" encoding="utf-8"?>
+<file path=ppt/slides/slide2.xml><?xml version="1.0" encoding="utf-8"?>
+<p:sld xmlns:a="http://schemas.openxmlformats.org/drawingml/2006/main" xmlns:r="http://schemas.openxmlformats.org/officeDocument/2006/relationships" xmlns:p="http://schemas.openxmlformats.org/presentationml/2006/main">
+  <p:cSld>
+    <p:bg>
+      <p:bgPr>
+        <a:solidFill>
+          <a:srgbClr val="229BEE"/>
+        </a:solidFill>
+        <a:effectLst/>
+      </p:bgPr>
+    </p:bg>
+    <p:spTree>
+      <p:nvGrpSpPr>
+        <p:cNvPr id="1" name=""/>
+        <p:cNvGrpSpPr/>
+        <p:nvPr/>
+      </p:nvGrpSpPr>
+      <p:grpSpPr>
+        <a:xfrm>
+          <a:off x="0" y="0"/>
+          <a:ext cx="0" cy="0"/>
+          <a:chOff x="0" y="0"/>
+          <a:chExt cx="0" cy="0"/>
+        </a:xfrm>
+      </p:grpSpPr>
+      <p:pic>
+        <p:nvPicPr>
+          <p:cNvPr id="2" name="Picture 2"/>
+          <p:cNvPicPr>
+            <a:picLocks noChangeAspect="1"/>
+          </p:cNvPicPr>
+          <p:nvPr/>
+        </p:nvPicPr>
+        <p:blipFill>
+          <a:blip r:embed="rId2" cstate="print"/>
+          <a:stretch>
+            <a:fillRect/>
+          </a:stretch>
+        </p:blipFill>
+        <p:spPr>
+          <a:xfrm>
+            <a:off x="292100" y="292100"/>
+            <a:ext cx="17716500" cy="9715500"/>
+          </a:xfrm>
+          <a:prstGeom prst="rect">
+            <a:avLst/>
+          </a:prstGeom>
+        </p:spPr>
+      </p:pic>
+      <p:pic>
+        <p:nvPicPr>
+          <p:cNvPr id="3" name="Picture 3"/>
+          <p:cNvPicPr>
+            <a:picLocks noChangeAspect="1"/>
+          </p:cNvPicPr>
+          <p:nvPr/>
+        </p:nvPicPr>
+        <p:blipFill>
+          <a:blip r:embed="rId3" cstate="print"/>
+          <a:stretch>
+            <a:fillRect/>
+          </a:stretch>
+        </p:blipFill>
+        <p:spPr>
+          <a:xfrm>
+            <a:off x="1003300" y="2641600"/>
+            <a:ext cx="16281400" cy="25400"/>
+          </a:xfrm>
+          <a:prstGeom prst="rect">
+            <a:avLst/>
+          </a:prstGeom>
+        </p:spPr>
+      </p:pic>
+      <p:pic>
+        <p:nvPicPr>
+          <p:cNvPr id="4" name="Picture 4"/>
+          <p:cNvPicPr>
+            <a:picLocks noChangeAspect="1"/>
+          </p:cNvPicPr>
+          <p:nvPr/>
+        </p:nvPicPr>
+        <p:blipFill>
+          <a:blip r:embed="rId4" cstate="print">
+            <a:alphaModFix amt="30000"/>
+          </a:blip>
+          <a:stretch>
+            <a:fillRect/>
+          </a:stretch>
+        </p:blipFill>
+        <p:spPr>
+          <a:xfrm>
+            <a:off x="1003300" y="6324600"/>
+            <a:ext cx="16281400" cy="25400"/>
+          </a:xfrm>
+          <a:prstGeom prst="rect">
+            <a:avLst/>
+          </a:prstGeom>
+        </p:spPr>
+      </p:pic>
+      <p:pic>
+        <p:nvPicPr>
+          <p:cNvPr id="5" name="Picture 5"/>
+          <p:cNvPicPr>
+            <a:picLocks noChangeAspect="1"/>
+          </p:cNvPicPr>
+          <p:nvPr/>
+        </p:nvPicPr>
+        <p:blipFill>
+          <a:blip r:embed="rId5" cstate="print">
+            <a:alphaModFix amt="30000"/>
+          </a:blip>
+          <a:stretch>
+            <a:fillRect/>
+          </a:stretch>
+        </p:blipFill>
+        <p:spPr>
+          <a:xfrm rot="5400000">
+            <a:off x="3797300" y="6324600"/>
+            <a:ext cx="5295900" cy="25400"/>
+          </a:xfrm>
+          <a:prstGeom prst="rect">
+            <a:avLst/>
+          </a:prstGeom>
+        </p:spPr>
+      </p:pic>
+      <p:pic>
+        <p:nvPicPr>
+          <p:cNvPr id="6" name="Picture 6"/>
+          <p:cNvPicPr>
+            <a:picLocks noChangeAspect="1"/>
+          </p:cNvPicPr>
+          <p:nvPr/>
+        </p:nvPicPr>
+        <p:blipFill>
+          <a:blip r:embed="rId5" cstate="print">
+            <a:alphaModFix amt="30000"/>
+          </a:blip>
+          <a:stretch>
+            <a:fillRect/>
+          </a:stretch>
+        </p:blipFill>
+        <p:spPr>
+          <a:xfrm rot="5400000">
+            <a:off x="9207500" y="6324600"/>
+            <a:ext cx="5295900" cy="25400"/>
+          </a:xfrm>
+          <a:prstGeom prst="rect">
+            <a:avLst/>
+          </a:prstGeom>
+        </p:spPr>
+      </p:pic>
+      <p:pic>
+        <p:nvPicPr>
+          <p:cNvPr id="7" name="Picture 7"/>
+          <p:cNvPicPr>
+            <a:picLocks noChangeAspect="1"/>
+          </p:cNvPicPr>
+          <p:nvPr/>
+        </p:nvPicPr>
+        <p:blipFill>
+          <a:blip r:embed="rId6" cstate="print"/>
+          <a:stretch>
+            <a:fillRect/>
+          </a:stretch>
+        </p:blipFill>
+        <p:spPr>
+          <a:xfrm>
+            <a:off x="16611600" y="0"/>
+            <a:ext cx="673100" cy="965200"/>
+          </a:xfrm>
+          <a:prstGeom prst="rect">
+            <a:avLst/>
+          </a:prstGeom>
+        </p:spPr>
+      </p:pic>
+      <p:sp>
+        <p:nvSpPr>
+          <p:cNvPr id="8" name="TextBox 8"/>
+          <p:cNvSpPr txBox="1"/>
+          <p:nvPr/>
+        </p:nvSpPr>
+        <p:spPr>
+          <a:xfrm>
+            <a:off x="1625600" y="6934200"/>
+            <a:ext cx="4203700" cy="812800"/>
+          </a:xfrm>
+          <a:prstGeom prst="rect">
+            <a:avLst/>
+          </a:prstGeom>
+        </p:spPr>
+        <p:txBody>
+          <a:bodyPr lIns="0" tIns="0" rIns="0" bIns="0" rtlCol="0" anchor="ctr"/>
+          <a:lstStyle/>
+          <a:p>
+            <a:pPr lvl="0" algn="ctr">
+              <a:lnSpc>
+                <a:spcPct val="98770"/>
+              </a:lnSpc>
+            </a:pPr>
+            <a:r>
+              <a:rPr lang="en-US" sz="4600" b="1" i="0" u="none" strike="noStrike" dirty="0">
+                <a:solidFill>
+                  <a:srgbClr val="229BEE"/>
+                </a:solidFill>
+                <a:latin typeface="+mn-ea"/>
+              </a:rPr>
+              <a:t>04</a:t>
+            </a:r>
+          </a:p>
+        </p:txBody>
+      </p:sp>
+      <p:sp>
+        <p:nvSpPr>
+          <p:cNvPr id="9" name="TextBox 9"/>
+          <p:cNvSpPr txBox="1"/>
+          <p:nvPr/>
+        </p:nvSpPr>
+        <p:spPr>
+          <a:xfrm>
+            <a:off x="1663700" y="7848600"/>
+            <a:ext cx="4152900" cy="774700"/>
+          </a:xfrm>
+          <a:prstGeom prst="rect">
+            <a:avLst/>
+          </a:prstGeom>
+        </p:spPr>
+        <p:txBody>
+          <a:bodyPr lIns="0" tIns="0" rIns="0" bIns="0" rtlCol="0" anchor="ctr"/>
+          <a:lstStyle/>
+          <a:p>
+            <a:pPr lvl="0" algn="ctr">
+              <a:lnSpc>
+                <a:spcPct val="107899"/>
+              </a:lnSpc>
+            </a:pPr>
+            <a:r>
+              <a:rPr lang="ko-KR" altLang="en-US" sz="2200" dirty="0" smtClean="0">
+                <a:solidFill>
+                  <a:srgbClr val="4D4D4D"/>
+                </a:solidFill>
+                <a:latin typeface="Noto Sans KR Medium" pitchFamily="50" charset="-127"/>
+                <a:ea typeface="Noto Sans KR Medium" pitchFamily="50" charset="-127"/>
+              </a:rPr>
+              <a:t>군집분석</a:t>
+            </a:r>
+            <a:endParaRPr lang="en-US" altLang="ko-KR" sz="2200" dirty="0">
+              <a:solidFill>
+                <a:srgbClr val="4D4D4D"/>
+              </a:solidFill>
+              <a:latin typeface="Noto Sans KR Medium" pitchFamily="50" charset="-127"/>
+              <a:ea typeface="Noto Sans KR Medium" pitchFamily="50" charset="-127"/>
+            </a:endParaRPr>
+          </a:p>
+        </p:txBody>
+      </p:sp>
+      <p:sp>
+        <p:nvSpPr>
+          <p:cNvPr id="10" name="TextBox 10"/>
+          <p:cNvSpPr txBox="1"/>
+          <p:nvPr/>
+        </p:nvSpPr>
+        <p:spPr>
+          <a:xfrm>
+            <a:off x="1625600" y="3911600"/>
+            <a:ext cx="4203700" cy="812800"/>
+          </a:xfrm>
+          <a:prstGeom prst="rect">
+            <a:avLst/>
+          </a:prstGeom>
+        </p:spPr>
+        <p:txBody>
+          <a:bodyPr lIns="0" tIns="0" rIns="0" bIns="0" rtlCol="0" anchor="ctr"/>
+          <a:lstStyle/>
+          <a:p>
+            <a:pPr lvl="0" algn="ctr">
+              <a:lnSpc>
+                <a:spcPct val="98770"/>
+              </a:lnSpc>
+            </a:pPr>
+            <a:r>
+              <a:rPr lang="en-US" sz="4600" b="1" i="0" u="none" strike="noStrike" dirty="0">
+                <a:solidFill>
+                  <a:srgbClr val="229BEE"/>
+                </a:solidFill>
+                <a:latin typeface="+mn-ea"/>
+              </a:rPr>
+              <a:t>01</a:t>
+            </a:r>
+          </a:p>
+        </p:txBody>
+      </p:sp>
+      <p:sp>
+        <p:nvSpPr>
+          <p:cNvPr id="11" name="TextBox 11"/>
+          <p:cNvSpPr txBox="1"/>
+          <p:nvPr/>
+        </p:nvSpPr>
+        <p:spPr>
+          <a:xfrm>
+            <a:off x="1663700" y="4826000"/>
+            <a:ext cx="4152900" cy="774700"/>
+          </a:xfrm>
+          <a:prstGeom prst="rect">
+            <a:avLst/>
+          </a:prstGeom>
+        </p:spPr>
+        <p:txBody>
+          <a:bodyPr lIns="0" tIns="0" rIns="0" bIns="0" rtlCol="0" anchor="ctr"/>
+          <a:lstStyle/>
+          <a:p>
+            <a:pPr lvl="0" algn="ctr">
+              <a:lnSpc>
+                <a:spcPct val="107899"/>
+              </a:lnSpc>
+            </a:pPr>
+            <a:r>
+              <a:rPr lang="ko-KR" altLang="en-US" sz="2200" b="0" i="0" u="none" strike="noStrike" dirty="0" smtClean="0">
+                <a:solidFill>
+                  <a:srgbClr val="4D4D4D"/>
+                </a:solidFill>
+                <a:latin typeface="Noto Sans KR Medium" pitchFamily="50" charset="-127"/>
+                <a:ea typeface="Noto Sans KR Medium" pitchFamily="50" charset="-127"/>
+              </a:rPr>
+              <a:t>선정이유 및 목표</a:t>
+            </a:r>
+            <a:endParaRPr lang="en-US" sz="2200" b="0" i="0" u="none" strike="noStrike" dirty="0">
+              <a:solidFill>
+                <a:srgbClr val="4D4D4D"/>
+              </a:solidFill>
+              <a:latin typeface="Noto Sans KR Medium" pitchFamily="50" charset="-127"/>
+              <a:ea typeface="Noto Sans KR Medium" pitchFamily="50" charset="-127"/>
+            </a:endParaRPr>
+          </a:p>
+        </p:txBody>
+      </p:sp>
+      <p:sp>
+        <p:nvSpPr>
+          <p:cNvPr id="12" name="TextBox 12"/>
+          <p:cNvSpPr txBox="1"/>
+          <p:nvPr/>
+        </p:nvSpPr>
+        <p:spPr>
+          <a:xfrm>
+            <a:off x="7118350" y="3898900"/>
+            <a:ext cx="4089400" cy="812800"/>
+          </a:xfrm>
+          <a:prstGeom prst="rect">
+            <a:avLst/>
+          </a:prstGeom>
+        </p:spPr>
+        <p:txBody>
+          <a:bodyPr lIns="0" tIns="0" rIns="0" bIns="0" rtlCol="0" anchor="ctr"/>
+          <a:lstStyle/>
+          <a:p>
+            <a:pPr lvl="0" algn="ctr">
+              <a:lnSpc>
+                <a:spcPct val="98770"/>
+              </a:lnSpc>
+            </a:pPr>
+            <a:r>
+              <a:rPr lang="en-US" sz="4600" b="1" i="0" u="none" strike="noStrike" dirty="0">
+                <a:solidFill>
+                  <a:srgbClr val="229BEE"/>
+                </a:solidFill>
+                <a:latin typeface="+mn-ea"/>
+              </a:rPr>
+              <a:t>02</a:t>
+            </a:r>
+          </a:p>
+        </p:txBody>
+      </p:sp>
+      <p:sp>
+        <p:nvSpPr>
+          <p:cNvPr id="13" name="TextBox 13"/>
+          <p:cNvSpPr txBox="1"/>
+          <p:nvPr/>
+        </p:nvSpPr>
+        <p:spPr>
+          <a:xfrm>
+            <a:off x="7086600" y="4826000"/>
+            <a:ext cx="4152900" cy="774700"/>
+          </a:xfrm>
+          <a:prstGeom prst="rect">
+            <a:avLst/>
+          </a:prstGeom>
+        </p:spPr>
+        <p:txBody>
+          <a:bodyPr lIns="0" tIns="0" rIns="0" bIns="0" rtlCol="0" anchor="ctr"/>
+          <a:lstStyle/>
+          <a:p>
+            <a:pPr lvl="0" algn="ctr">
+              <a:lnSpc>
+                <a:spcPct val="107899"/>
+              </a:lnSpc>
+            </a:pPr>
+            <a:r>
+              <a:rPr lang="ko-KR" altLang="en-US" sz="2200" b="0" i="0" u="none" strike="noStrike" dirty="0" smtClean="0">
+                <a:solidFill>
+                  <a:srgbClr val="4D4D4D"/>
+                </a:solidFill>
+                <a:latin typeface="Noto Sans KR Medium" pitchFamily="50" charset="-127"/>
+                <a:ea typeface="Noto Sans KR Medium" pitchFamily="50" charset="-127"/>
+              </a:rPr>
+              <a:t>데이터 설명 및 전처리</a:t>
+            </a:r>
+            <a:endParaRPr lang="en-US" sz="2200" b="0" i="0" u="none" strike="noStrike" dirty="0">
+              <a:solidFill>
+                <a:srgbClr val="4D4D4D"/>
+              </a:solidFill>
+              <a:latin typeface="Noto Sans KR Medium" pitchFamily="50" charset="-127"/>
+              <a:ea typeface="Noto Sans KR Medium" pitchFamily="50" charset="-127"/>
+            </a:endParaRPr>
+          </a:p>
+        </p:txBody>
+      </p:sp>
+      <p:sp>
+        <p:nvSpPr>
+          <p:cNvPr id="14" name="TextBox 14"/>
+          <p:cNvSpPr txBox="1"/>
+          <p:nvPr/>
+        </p:nvSpPr>
+        <p:spPr>
+          <a:xfrm>
+            <a:off x="12509500" y="3886200"/>
+            <a:ext cx="4203700" cy="812800"/>
+          </a:xfrm>
+          <a:prstGeom prst="rect">
+            <a:avLst/>
+          </a:prstGeom>
+        </p:spPr>
+        <p:txBody>
+          <a:bodyPr lIns="0" tIns="0" rIns="0" bIns="0" rtlCol="0" anchor="ctr"/>
+          <a:lstStyle/>
+          <a:p>
+            <a:pPr lvl="0" algn="ctr">
+              <a:lnSpc>
+                <a:spcPct val="98770"/>
+              </a:lnSpc>
+            </a:pPr>
+            <a:r>
+              <a:rPr lang="en-US" sz="4600" b="1" i="0" u="none" strike="noStrike" dirty="0">
+                <a:solidFill>
+                  <a:srgbClr val="229BEE"/>
+                </a:solidFill>
+                <a:latin typeface="+mn-ea"/>
+              </a:rPr>
+              <a:t>03</a:t>
+            </a:r>
+          </a:p>
+        </p:txBody>
+      </p:sp>
+      <p:sp>
+        <p:nvSpPr>
+          <p:cNvPr id="15" name="TextBox 15"/>
+          <p:cNvSpPr txBox="1"/>
+          <p:nvPr/>
+        </p:nvSpPr>
+        <p:spPr>
+          <a:xfrm>
+            <a:off x="12547600" y="4826000"/>
+            <a:ext cx="4152900" cy="774700"/>
+          </a:xfrm>
+          <a:prstGeom prst="rect">
+            <a:avLst/>
+          </a:prstGeom>
+        </p:spPr>
+        <p:txBody>
+          <a:bodyPr lIns="0" tIns="0" rIns="0" bIns="0" rtlCol="0" anchor="ctr"/>
+          <a:lstStyle/>
+          <a:p>
+            <a:pPr lvl="0" algn="ctr">
+              <a:lnSpc>
+                <a:spcPct val="107899"/>
+              </a:lnSpc>
+            </a:pPr>
+            <a:r>
+              <a:rPr lang="en-US" sz="2200" dirty="0" smtClean="0">
+                <a:solidFill>
+                  <a:srgbClr val="4D4D4D"/>
+                </a:solidFill>
+                <a:latin typeface="Noto Sans KR Medium" pitchFamily="50" charset="-127"/>
+                <a:ea typeface="Noto Sans KR Medium" pitchFamily="50" charset="-127"/>
+              </a:rPr>
+              <a:t>PCA</a:t>
+            </a:r>
+            <a:endParaRPr lang="en-US" sz="2200" b="0" i="0" u="none" strike="noStrike" dirty="0">
+              <a:solidFill>
+                <a:srgbClr val="4D4D4D"/>
+              </a:solidFill>
+              <a:latin typeface="Noto Sans KR Medium" pitchFamily="50" charset="-127"/>
+              <a:ea typeface="Noto Sans KR Medium" pitchFamily="50" charset="-127"/>
+            </a:endParaRPr>
+          </a:p>
+        </p:txBody>
+      </p:sp>
+      <p:sp>
+        <p:nvSpPr>
+          <p:cNvPr id="16" name="TextBox 16"/>
+          <p:cNvSpPr txBox="1"/>
+          <p:nvPr/>
+        </p:nvSpPr>
+        <p:spPr>
+          <a:xfrm>
+            <a:off x="7061200" y="6934200"/>
+            <a:ext cx="4203700" cy="812800"/>
+          </a:xfrm>
+          <a:prstGeom prst="rect">
+            <a:avLst/>
+          </a:prstGeom>
+        </p:spPr>
+        <p:txBody>
+          <a:bodyPr lIns="0" tIns="0" rIns="0" bIns="0" rtlCol="0" anchor="ctr"/>
+          <a:lstStyle/>
+          <a:p>
+            <a:pPr lvl="0" algn="ctr">
+              <a:lnSpc>
+                <a:spcPct val="98770"/>
+              </a:lnSpc>
+            </a:pPr>
+            <a:r>
+              <a:rPr lang="en-US" sz="4600" b="1" i="0" u="none" strike="noStrike" dirty="0">
+                <a:solidFill>
+                  <a:srgbClr val="229BEE"/>
+                </a:solidFill>
+                <a:latin typeface="+mn-ea"/>
+              </a:rPr>
+              <a:t>05</a:t>
+            </a:r>
+          </a:p>
+        </p:txBody>
+      </p:sp>
+      <p:sp>
+        <p:nvSpPr>
+          <p:cNvPr id="17" name="TextBox 17"/>
+          <p:cNvSpPr txBox="1"/>
+          <p:nvPr/>
+        </p:nvSpPr>
+        <p:spPr>
+          <a:xfrm>
+            <a:off x="7086600" y="7848600"/>
+            <a:ext cx="4152900" cy="774700"/>
+          </a:xfrm>
+          <a:prstGeom prst="rect">
+            <a:avLst/>
+          </a:prstGeom>
+        </p:spPr>
+        <p:txBody>
+          <a:bodyPr lIns="0" tIns="0" rIns="0" bIns="0" rtlCol="0" anchor="ctr"/>
+          <a:lstStyle/>
+          <a:p>
+            <a:pPr lvl="0" algn="ctr">
+              <a:lnSpc>
+                <a:spcPct val="107899"/>
+              </a:lnSpc>
+            </a:pPr>
+            <a:endParaRPr lang="en-US" sz="2200" b="0" i="0" u="none" strike="noStrike" dirty="0">
+              <a:solidFill>
+                <a:srgbClr val="4D4D4D"/>
+              </a:solidFill>
+              <a:latin typeface="Noto Sans KR Medium" pitchFamily="50" charset="-127"/>
+              <a:ea typeface="Noto Sans KR Medium" pitchFamily="50" charset="-127"/>
+            </a:endParaRPr>
+          </a:p>
+        </p:txBody>
+      </p:sp>
+      <p:sp>
+        <p:nvSpPr>
+          <p:cNvPr id="20" name="TextBox 20"/>
+          <p:cNvSpPr txBox="1"/>
+          <p:nvPr/>
+        </p:nvSpPr>
+        <p:spPr>
+          <a:xfrm>
+            <a:off x="2476500" y="990600"/>
+            <a:ext cx="13335000" cy="1435100"/>
+          </a:xfrm>
+          <a:prstGeom prst="rect">
+            <a:avLst/>
+          </a:prstGeom>
+        </p:spPr>
+        <p:txBody>
+          <a:bodyPr lIns="0" tIns="0" rIns="0" bIns="0" rtlCol="0" anchor="ctr"/>
+          <a:lstStyle/>
+          <a:p>
+            <a:pPr lvl="0" algn="ctr">
+              <a:lnSpc>
+                <a:spcPct val="98770"/>
+              </a:lnSpc>
+            </a:pPr>
+            <a:r>
+              <a:rPr lang="ko-KR" sz="7900" b="0" i="0" u="none" strike="noStrike" dirty="0" smtClean="0">
+                <a:solidFill>
+                  <a:srgbClr val="4D4D4D"/>
+                </a:solidFill>
+                <a:latin typeface="Noto Sans KR Medium" pitchFamily="50" charset="-127"/>
+                <a:ea typeface="Noto Sans KR Medium" pitchFamily="50" charset="-127"/>
+              </a:rPr>
+              <a:t>목차</a:t>
+            </a:r>
+            <a:endParaRPr lang="ko-KR" sz="7900" b="0" i="0" u="none" strike="noStrike" dirty="0">
+              <a:solidFill>
+                <a:srgbClr val="4D4D4D"/>
+              </a:solidFill>
+              <a:latin typeface="Noto Sans KR Medium" pitchFamily="50" charset="-127"/>
+              <a:ea typeface="Noto Sans KR Medium" pitchFamily="50" charset="-127"/>
+            </a:endParaRPr>
+          </a:p>
+        </p:txBody>
+      </p:sp>
+      <p:sp>
+        <p:nvSpPr>
+          <p:cNvPr id="21" name="TextBox 19"/>
+          <p:cNvSpPr txBox="1"/>
+          <p:nvPr/>
+        </p:nvSpPr>
+        <p:spPr>
+          <a:xfrm>
+            <a:off x="7010400" y="7810500"/>
+            <a:ext cx="4152900" cy="774700"/>
+          </a:xfrm>
+          <a:prstGeom prst="rect">
+            <a:avLst/>
+          </a:prstGeom>
+        </p:spPr>
+        <p:txBody>
+          <a:bodyPr lIns="0" tIns="0" rIns="0" bIns="0" rtlCol="0" anchor="ctr"/>
+          <a:lstStyle/>
+          <a:p>
+            <a:pPr lvl="0" algn="ctr">
+              <a:lnSpc>
+                <a:spcPct val="107899"/>
+              </a:lnSpc>
+            </a:pPr>
+            <a:r>
+              <a:rPr lang="ko-KR" altLang="en-US" sz="2200" b="0" i="0" u="none" strike="noStrike" dirty="0" smtClean="0">
+                <a:solidFill>
+                  <a:srgbClr val="4D4D4D"/>
+                </a:solidFill>
+                <a:latin typeface="Noto Sans KR Medium" pitchFamily="50" charset="-127"/>
+                <a:ea typeface="Noto Sans KR Medium" pitchFamily="50" charset="-127"/>
+              </a:rPr>
+              <a:t>결과</a:t>
+            </a:r>
+            <a:endParaRPr lang="en-US" sz="2200" b="0" i="0" u="none" strike="noStrike" dirty="0">
+              <a:solidFill>
+                <a:srgbClr val="4D4D4D"/>
+              </a:solidFill>
+              <a:latin typeface="Noto Sans KR Medium" pitchFamily="50" charset="-127"/>
+              <a:ea typeface="Noto Sans KR Medium" pitchFamily="50" charset="-127"/>
+            </a:endParaRPr>
+          </a:p>
+        </p:txBody>
+      </p:sp>
+    </p:spTree>
+  </p:cSld>
+  <p:clrMapOvr>
+    <a:masterClrMapping/>
+  </p:clrMapOvr>
+  <p:timing>
+    <p:tnLst>
+      <p:par>
+        <p:cTn id="1" dur="indefinite" restart="never" nodeType="tmRoot"/>
+      </p:par>
+    </p:tnLst>
+  </p:timing>
+</p:sld>
+</file>
+
+<file path=ppt/slides/slide20.xml><?xml version="1.0" encoding="utf-8"?>
 <p:sld xmlns:a="http://schemas.openxmlformats.org/drawingml/2006/main" xmlns:r="http://schemas.openxmlformats.org/officeDocument/2006/relationships" xmlns:p="http://schemas.openxmlformats.org/presentationml/2006/main">
   <p:cSld>
     <p:bg>
@@ -13777,675 +15351,7 @@
 </p:sld>
 </file>
 
-<file path=ppt/slides/slide2.xml><?xml version="1.0" encoding="utf-8"?>
-<p:sld xmlns:a="http://schemas.openxmlformats.org/drawingml/2006/main" xmlns:r="http://schemas.openxmlformats.org/officeDocument/2006/relationships" xmlns:p="http://schemas.openxmlformats.org/presentationml/2006/main">
-  <p:cSld>
-    <p:bg>
-      <p:bgPr>
-        <a:solidFill>
-          <a:srgbClr val="229BEE"/>
-        </a:solidFill>
-        <a:effectLst/>
-      </p:bgPr>
-    </p:bg>
-    <p:spTree>
-      <p:nvGrpSpPr>
-        <p:cNvPr id="1" name=""/>
-        <p:cNvGrpSpPr/>
-        <p:nvPr/>
-      </p:nvGrpSpPr>
-      <p:grpSpPr>
-        <a:xfrm>
-          <a:off x="0" y="0"/>
-          <a:ext cx="0" cy="0"/>
-          <a:chOff x="0" y="0"/>
-          <a:chExt cx="0" cy="0"/>
-        </a:xfrm>
-      </p:grpSpPr>
-      <p:pic>
-        <p:nvPicPr>
-          <p:cNvPr id="2" name="Picture 2"/>
-          <p:cNvPicPr>
-            <a:picLocks noChangeAspect="1"/>
-          </p:cNvPicPr>
-          <p:nvPr/>
-        </p:nvPicPr>
-        <p:blipFill>
-          <a:blip r:embed="rId2" cstate="print"/>
-          <a:stretch>
-            <a:fillRect/>
-          </a:stretch>
-        </p:blipFill>
-        <p:spPr>
-          <a:xfrm>
-            <a:off x="292100" y="292100"/>
-            <a:ext cx="17716500" cy="9715500"/>
-          </a:xfrm>
-          <a:prstGeom prst="rect">
-            <a:avLst/>
-          </a:prstGeom>
-        </p:spPr>
-      </p:pic>
-      <p:pic>
-        <p:nvPicPr>
-          <p:cNvPr id="3" name="Picture 3"/>
-          <p:cNvPicPr>
-            <a:picLocks noChangeAspect="1"/>
-          </p:cNvPicPr>
-          <p:nvPr/>
-        </p:nvPicPr>
-        <p:blipFill>
-          <a:blip r:embed="rId3" cstate="print"/>
-          <a:stretch>
-            <a:fillRect/>
-          </a:stretch>
-        </p:blipFill>
-        <p:spPr>
-          <a:xfrm>
-            <a:off x="1003300" y="2641600"/>
-            <a:ext cx="16281400" cy="25400"/>
-          </a:xfrm>
-          <a:prstGeom prst="rect">
-            <a:avLst/>
-          </a:prstGeom>
-        </p:spPr>
-      </p:pic>
-      <p:pic>
-        <p:nvPicPr>
-          <p:cNvPr id="4" name="Picture 4"/>
-          <p:cNvPicPr>
-            <a:picLocks noChangeAspect="1"/>
-          </p:cNvPicPr>
-          <p:nvPr/>
-        </p:nvPicPr>
-        <p:blipFill>
-          <a:blip r:embed="rId4" cstate="print">
-            <a:alphaModFix amt="30000"/>
-          </a:blip>
-          <a:stretch>
-            <a:fillRect/>
-          </a:stretch>
-        </p:blipFill>
-        <p:spPr>
-          <a:xfrm>
-            <a:off x="1003300" y="6324600"/>
-            <a:ext cx="16281400" cy="25400"/>
-          </a:xfrm>
-          <a:prstGeom prst="rect">
-            <a:avLst/>
-          </a:prstGeom>
-        </p:spPr>
-      </p:pic>
-      <p:pic>
-        <p:nvPicPr>
-          <p:cNvPr id="5" name="Picture 5"/>
-          <p:cNvPicPr>
-            <a:picLocks noChangeAspect="1"/>
-          </p:cNvPicPr>
-          <p:nvPr/>
-        </p:nvPicPr>
-        <p:blipFill>
-          <a:blip r:embed="rId5" cstate="print">
-            <a:alphaModFix amt="30000"/>
-          </a:blip>
-          <a:stretch>
-            <a:fillRect/>
-          </a:stretch>
-        </p:blipFill>
-        <p:spPr>
-          <a:xfrm rot="5400000">
-            <a:off x="3797300" y="6324600"/>
-            <a:ext cx="5295900" cy="25400"/>
-          </a:xfrm>
-          <a:prstGeom prst="rect">
-            <a:avLst/>
-          </a:prstGeom>
-        </p:spPr>
-      </p:pic>
-      <p:pic>
-        <p:nvPicPr>
-          <p:cNvPr id="6" name="Picture 6"/>
-          <p:cNvPicPr>
-            <a:picLocks noChangeAspect="1"/>
-          </p:cNvPicPr>
-          <p:nvPr/>
-        </p:nvPicPr>
-        <p:blipFill>
-          <a:blip r:embed="rId5" cstate="print">
-            <a:alphaModFix amt="30000"/>
-          </a:blip>
-          <a:stretch>
-            <a:fillRect/>
-          </a:stretch>
-        </p:blipFill>
-        <p:spPr>
-          <a:xfrm rot="5400000">
-            <a:off x="9207500" y="6324600"/>
-            <a:ext cx="5295900" cy="25400"/>
-          </a:xfrm>
-          <a:prstGeom prst="rect">
-            <a:avLst/>
-          </a:prstGeom>
-        </p:spPr>
-      </p:pic>
-      <p:pic>
-        <p:nvPicPr>
-          <p:cNvPr id="7" name="Picture 7"/>
-          <p:cNvPicPr>
-            <a:picLocks noChangeAspect="1"/>
-          </p:cNvPicPr>
-          <p:nvPr/>
-        </p:nvPicPr>
-        <p:blipFill>
-          <a:blip r:embed="rId6" cstate="print"/>
-          <a:stretch>
-            <a:fillRect/>
-          </a:stretch>
-        </p:blipFill>
-        <p:spPr>
-          <a:xfrm>
-            <a:off x="16611600" y="0"/>
-            <a:ext cx="673100" cy="965200"/>
-          </a:xfrm>
-          <a:prstGeom prst="rect">
-            <a:avLst/>
-          </a:prstGeom>
-        </p:spPr>
-      </p:pic>
-      <p:sp>
-        <p:nvSpPr>
-          <p:cNvPr id="8" name="TextBox 8"/>
-          <p:cNvSpPr txBox="1"/>
-          <p:nvPr/>
-        </p:nvSpPr>
-        <p:spPr>
-          <a:xfrm>
-            <a:off x="1625600" y="6934200"/>
-            <a:ext cx="4203700" cy="812800"/>
-          </a:xfrm>
-          <a:prstGeom prst="rect">
-            <a:avLst/>
-          </a:prstGeom>
-        </p:spPr>
-        <p:txBody>
-          <a:bodyPr lIns="0" tIns="0" rIns="0" bIns="0" rtlCol="0" anchor="ctr"/>
-          <a:lstStyle/>
-          <a:p>
-            <a:pPr lvl="0" algn="ctr">
-              <a:lnSpc>
-                <a:spcPct val="98770"/>
-              </a:lnSpc>
-            </a:pPr>
-            <a:r>
-              <a:rPr lang="en-US" sz="4600" b="1" i="0" u="none" strike="noStrike" dirty="0">
-                <a:solidFill>
-                  <a:srgbClr val="229BEE"/>
-                </a:solidFill>
-                <a:latin typeface="+mn-ea"/>
-              </a:rPr>
-              <a:t>04</a:t>
-            </a:r>
-          </a:p>
-        </p:txBody>
-      </p:sp>
-      <p:sp>
-        <p:nvSpPr>
-          <p:cNvPr id="9" name="TextBox 9"/>
-          <p:cNvSpPr txBox="1"/>
-          <p:nvPr/>
-        </p:nvSpPr>
-        <p:spPr>
-          <a:xfrm>
-            <a:off x="1663700" y="7848600"/>
-            <a:ext cx="4152900" cy="774700"/>
-          </a:xfrm>
-          <a:prstGeom prst="rect">
-            <a:avLst/>
-          </a:prstGeom>
-        </p:spPr>
-        <p:txBody>
-          <a:bodyPr lIns="0" tIns="0" rIns="0" bIns="0" rtlCol="0" anchor="ctr"/>
-          <a:lstStyle/>
-          <a:p>
-            <a:pPr lvl="0" algn="ctr">
-              <a:lnSpc>
-                <a:spcPct val="107899"/>
-              </a:lnSpc>
-            </a:pPr>
-            <a:r>
-              <a:rPr lang="ko-KR" altLang="en-US" sz="2200" dirty="0" smtClean="0">
-                <a:solidFill>
-                  <a:srgbClr val="4D4D4D"/>
-                </a:solidFill>
-                <a:latin typeface="Noto Sans KR Medium" pitchFamily="50" charset="-127"/>
-                <a:ea typeface="Noto Sans KR Medium" pitchFamily="50" charset="-127"/>
-              </a:rPr>
-              <a:t>군집분석</a:t>
-            </a:r>
-            <a:endParaRPr lang="en-US" altLang="ko-KR" sz="2200" dirty="0">
-              <a:solidFill>
-                <a:srgbClr val="4D4D4D"/>
-              </a:solidFill>
-              <a:latin typeface="Noto Sans KR Medium" pitchFamily="50" charset="-127"/>
-              <a:ea typeface="Noto Sans KR Medium" pitchFamily="50" charset="-127"/>
-            </a:endParaRPr>
-          </a:p>
-        </p:txBody>
-      </p:sp>
-      <p:sp>
-        <p:nvSpPr>
-          <p:cNvPr id="10" name="TextBox 10"/>
-          <p:cNvSpPr txBox="1"/>
-          <p:nvPr/>
-        </p:nvSpPr>
-        <p:spPr>
-          <a:xfrm>
-            <a:off x="1625600" y="3911600"/>
-            <a:ext cx="4203700" cy="812800"/>
-          </a:xfrm>
-          <a:prstGeom prst="rect">
-            <a:avLst/>
-          </a:prstGeom>
-        </p:spPr>
-        <p:txBody>
-          <a:bodyPr lIns="0" tIns="0" rIns="0" bIns="0" rtlCol="0" anchor="ctr"/>
-          <a:lstStyle/>
-          <a:p>
-            <a:pPr lvl="0" algn="ctr">
-              <a:lnSpc>
-                <a:spcPct val="98770"/>
-              </a:lnSpc>
-            </a:pPr>
-            <a:r>
-              <a:rPr lang="en-US" sz="4600" b="1" i="0" u="none" strike="noStrike" dirty="0">
-                <a:solidFill>
-                  <a:srgbClr val="229BEE"/>
-                </a:solidFill>
-                <a:latin typeface="+mn-ea"/>
-              </a:rPr>
-              <a:t>01</a:t>
-            </a:r>
-          </a:p>
-        </p:txBody>
-      </p:sp>
-      <p:sp>
-        <p:nvSpPr>
-          <p:cNvPr id="11" name="TextBox 11"/>
-          <p:cNvSpPr txBox="1"/>
-          <p:nvPr/>
-        </p:nvSpPr>
-        <p:spPr>
-          <a:xfrm>
-            <a:off x="1663700" y="4826000"/>
-            <a:ext cx="4152900" cy="774700"/>
-          </a:xfrm>
-          <a:prstGeom prst="rect">
-            <a:avLst/>
-          </a:prstGeom>
-        </p:spPr>
-        <p:txBody>
-          <a:bodyPr lIns="0" tIns="0" rIns="0" bIns="0" rtlCol="0" anchor="ctr"/>
-          <a:lstStyle/>
-          <a:p>
-            <a:pPr lvl="0" algn="ctr">
-              <a:lnSpc>
-                <a:spcPct val="107899"/>
-              </a:lnSpc>
-            </a:pPr>
-            <a:r>
-              <a:rPr lang="ko-KR" altLang="en-US" sz="2200" b="0" i="0" u="none" strike="noStrike" dirty="0" smtClean="0">
-                <a:solidFill>
-                  <a:srgbClr val="4D4D4D"/>
-                </a:solidFill>
-                <a:latin typeface="Noto Sans KR Medium" pitchFamily="50" charset="-127"/>
-                <a:ea typeface="Noto Sans KR Medium" pitchFamily="50" charset="-127"/>
-              </a:rPr>
-              <a:t>선정이유 및 목표</a:t>
-            </a:r>
-            <a:endParaRPr lang="en-US" sz="2200" b="0" i="0" u="none" strike="noStrike" dirty="0">
-              <a:solidFill>
-                <a:srgbClr val="4D4D4D"/>
-              </a:solidFill>
-              <a:latin typeface="Noto Sans KR Medium" pitchFamily="50" charset="-127"/>
-              <a:ea typeface="Noto Sans KR Medium" pitchFamily="50" charset="-127"/>
-            </a:endParaRPr>
-          </a:p>
-        </p:txBody>
-      </p:sp>
-      <p:sp>
-        <p:nvSpPr>
-          <p:cNvPr id="12" name="TextBox 12"/>
-          <p:cNvSpPr txBox="1"/>
-          <p:nvPr/>
-        </p:nvSpPr>
-        <p:spPr>
-          <a:xfrm>
-            <a:off x="7118350" y="3898900"/>
-            <a:ext cx="4089400" cy="812800"/>
-          </a:xfrm>
-          <a:prstGeom prst="rect">
-            <a:avLst/>
-          </a:prstGeom>
-        </p:spPr>
-        <p:txBody>
-          <a:bodyPr lIns="0" tIns="0" rIns="0" bIns="0" rtlCol="0" anchor="ctr"/>
-          <a:lstStyle/>
-          <a:p>
-            <a:pPr lvl="0" algn="ctr">
-              <a:lnSpc>
-                <a:spcPct val="98770"/>
-              </a:lnSpc>
-            </a:pPr>
-            <a:r>
-              <a:rPr lang="en-US" sz="4600" b="1" i="0" u="none" strike="noStrike" dirty="0">
-                <a:solidFill>
-                  <a:srgbClr val="229BEE"/>
-                </a:solidFill>
-                <a:latin typeface="+mn-ea"/>
-              </a:rPr>
-              <a:t>02</a:t>
-            </a:r>
-          </a:p>
-        </p:txBody>
-      </p:sp>
-      <p:sp>
-        <p:nvSpPr>
-          <p:cNvPr id="13" name="TextBox 13"/>
-          <p:cNvSpPr txBox="1"/>
-          <p:nvPr/>
-        </p:nvSpPr>
-        <p:spPr>
-          <a:xfrm>
-            <a:off x="7086600" y="4826000"/>
-            <a:ext cx="4152900" cy="774700"/>
-          </a:xfrm>
-          <a:prstGeom prst="rect">
-            <a:avLst/>
-          </a:prstGeom>
-        </p:spPr>
-        <p:txBody>
-          <a:bodyPr lIns="0" tIns="0" rIns="0" bIns="0" rtlCol="0" anchor="ctr"/>
-          <a:lstStyle/>
-          <a:p>
-            <a:pPr lvl="0" algn="ctr">
-              <a:lnSpc>
-                <a:spcPct val="107899"/>
-              </a:lnSpc>
-            </a:pPr>
-            <a:r>
-              <a:rPr lang="ko-KR" altLang="en-US" sz="2200" b="0" i="0" u="none" strike="noStrike" dirty="0" smtClean="0">
-                <a:solidFill>
-                  <a:srgbClr val="4D4D4D"/>
-                </a:solidFill>
-                <a:latin typeface="Noto Sans KR Medium" pitchFamily="50" charset="-127"/>
-                <a:ea typeface="Noto Sans KR Medium" pitchFamily="50" charset="-127"/>
-              </a:rPr>
-              <a:t>데이터 설명 및 전처리</a:t>
-            </a:r>
-            <a:endParaRPr lang="en-US" sz="2200" b="0" i="0" u="none" strike="noStrike" dirty="0">
-              <a:solidFill>
-                <a:srgbClr val="4D4D4D"/>
-              </a:solidFill>
-              <a:latin typeface="Noto Sans KR Medium" pitchFamily="50" charset="-127"/>
-              <a:ea typeface="Noto Sans KR Medium" pitchFamily="50" charset="-127"/>
-            </a:endParaRPr>
-          </a:p>
-        </p:txBody>
-      </p:sp>
-      <p:sp>
-        <p:nvSpPr>
-          <p:cNvPr id="14" name="TextBox 14"/>
-          <p:cNvSpPr txBox="1"/>
-          <p:nvPr/>
-        </p:nvSpPr>
-        <p:spPr>
-          <a:xfrm>
-            <a:off x="12509500" y="3886200"/>
-            <a:ext cx="4203700" cy="812800"/>
-          </a:xfrm>
-          <a:prstGeom prst="rect">
-            <a:avLst/>
-          </a:prstGeom>
-        </p:spPr>
-        <p:txBody>
-          <a:bodyPr lIns="0" tIns="0" rIns="0" bIns="0" rtlCol="0" anchor="ctr"/>
-          <a:lstStyle/>
-          <a:p>
-            <a:pPr lvl="0" algn="ctr">
-              <a:lnSpc>
-                <a:spcPct val="98770"/>
-              </a:lnSpc>
-            </a:pPr>
-            <a:r>
-              <a:rPr lang="en-US" sz="4600" b="1" i="0" u="none" strike="noStrike" dirty="0">
-                <a:solidFill>
-                  <a:srgbClr val="229BEE"/>
-                </a:solidFill>
-                <a:latin typeface="+mn-ea"/>
-              </a:rPr>
-              <a:t>03</a:t>
-            </a:r>
-          </a:p>
-        </p:txBody>
-      </p:sp>
-      <p:sp>
-        <p:nvSpPr>
-          <p:cNvPr id="15" name="TextBox 15"/>
-          <p:cNvSpPr txBox="1"/>
-          <p:nvPr/>
-        </p:nvSpPr>
-        <p:spPr>
-          <a:xfrm>
-            <a:off x="12547600" y="4826000"/>
-            <a:ext cx="4152900" cy="774700"/>
-          </a:xfrm>
-          <a:prstGeom prst="rect">
-            <a:avLst/>
-          </a:prstGeom>
-        </p:spPr>
-        <p:txBody>
-          <a:bodyPr lIns="0" tIns="0" rIns="0" bIns="0" rtlCol="0" anchor="ctr"/>
-          <a:lstStyle/>
-          <a:p>
-            <a:pPr lvl="0" algn="ctr">
-              <a:lnSpc>
-                <a:spcPct val="107899"/>
-              </a:lnSpc>
-            </a:pPr>
-            <a:r>
-              <a:rPr lang="en-US" sz="2200" dirty="0" smtClean="0">
-                <a:solidFill>
-                  <a:srgbClr val="4D4D4D"/>
-                </a:solidFill>
-                <a:latin typeface="Noto Sans KR Medium" pitchFamily="50" charset="-127"/>
-                <a:ea typeface="Noto Sans KR Medium" pitchFamily="50" charset="-127"/>
-              </a:rPr>
-              <a:t>PCA</a:t>
-            </a:r>
-            <a:endParaRPr lang="en-US" sz="2200" b="0" i="0" u="none" strike="noStrike" dirty="0">
-              <a:solidFill>
-                <a:srgbClr val="4D4D4D"/>
-              </a:solidFill>
-              <a:latin typeface="Noto Sans KR Medium" pitchFamily="50" charset="-127"/>
-              <a:ea typeface="Noto Sans KR Medium" pitchFamily="50" charset="-127"/>
-            </a:endParaRPr>
-          </a:p>
-        </p:txBody>
-      </p:sp>
-      <p:sp>
-        <p:nvSpPr>
-          <p:cNvPr id="16" name="TextBox 16"/>
-          <p:cNvSpPr txBox="1"/>
-          <p:nvPr/>
-        </p:nvSpPr>
-        <p:spPr>
-          <a:xfrm>
-            <a:off x="7061200" y="6934200"/>
-            <a:ext cx="4203700" cy="812800"/>
-          </a:xfrm>
-          <a:prstGeom prst="rect">
-            <a:avLst/>
-          </a:prstGeom>
-        </p:spPr>
-        <p:txBody>
-          <a:bodyPr lIns="0" tIns="0" rIns="0" bIns="0" rtlCol="0" anchor="ctr"/>
-          <a:lstStyle/>
-          <a:p>
-            <a:pPr lvl="0" algn="ctr">
-              <a:lnSpc>
-                <a:spcPct val="98770"/>
-              </a:lnSpc>
-            </a:pPr>
-            <a:r>
-              <a:rPr lang="en-US" sz="4600" b="1" i="0" u="none" strike="noStrike" dirty="0">
-                <a:solidFill>
-                  <a:srgbClr val="229BEE"/>
-                </a:solidFill>
-                <a:latin typeface="+mn-ea"/>
-              </a:rPr>
-              <a:t>05</a:t>
-            </a:r>
-          </a:p>
-        </p:txBody>
-      </p:sp>
-      <p:sp>
-        <p:nvSpPr>
-          <p:cNvPr id="17" name="TextBox 17"/>
-          <p:cNvSpPr txBox="1"/>
-          <p:nvPr/>
-        </p:nvSpPr>
-        <p:spPr>
-          <a:xfrm>
-            <a:off x="7086600" y="7848600"/>
-            <a:ext cx="4152900" cy="774700"/>
-          </a:xfrm>
-          <a:prstGeom prst="rect">
-            <a:avLst/>
-          </a:prstGeom>
-        </p:spPr>
-        <p:txBody>
-          <a:bodyPr lIns="0" tIns="0" rIns="0" bIns="0" rtlCol="0" anchor="ctr"/>
-          <a:lstStyle/>
-          <a:p>
-            <a:pPr lvl="0" algn="ctr">
-              <a:lnSpc>
-                <a:spcPct val="107899"/>
-              </a:lnSpc>
-            </a:pPr>
-            <a:endParaRPr lang="en-US" sz="2200" b="0" i="0" u="none" strike="noStrike" dirty="0">
-              <a:solidFill>
-                <a:srgbClr val="4D4D4D"/>
-              </a:solidFill>
-              <a:latin typeface="Noto Sans KR Medium" pitchFamily="50" charset="-127"/>
-              <a:ea typeface="Noto Sans KR Medium" pitchFamily="50" charset="-127"/>
-            </a:endParaRPr>
-          </a:p>
-        </p:txBody>
-      </p:sp>
-      <p:sp>
-        <p:nvSpPr>
-          <p:cNvPr id="20" name="TextBox 20"/>
-          <p:cNvSpPr txBox="1"/>
-          <p:nvPr/>
-        </p:nvSpPr>
-        <p:spPr>
-          <a:xfrm>
-            <a:off x="2476500" y="990600"/>
-            <a:ext cx="13335000" cy="1435100"/>
-          </a:xfrm>
-          <a:prstGeom prst="rect">
-            <a:avLst/>
-          </a:prstGeom>
-        </p:spPr>
-        <p:txBody>
-          <a:bodyPr lIns="0" tIns="0" rIns="0" bIns="0" rtlCol="0" anchor="ctr"/>
-          <a:lstStyle/>
-          <a:p>
-            <a:pPr lvl="0" algn="ctr">
-              <a:lnSpc>
-                <a:spcPct val="98770"/>
-              </a:lnSpc>
-            </a:pPr>
-            <a:r>
-              <a:rPr lang="ko-KR" sz="7900" b="0" i="0" u="none" strike="noStrike" dirty="0" smtClean="0">
-                <a:solidFill>
-                  <a:srgbClr val="4D4D4D"/>
-                </a:solidFill>
-                <a:latin typeface="Noto Sans KR Medium" pitchFamily="50" charset="-127"/>
-                <a:ea typeface="Noto Sans KR Medium" pitchFamily="50" charset="-127"/>
-              </a:rPr>
-              <a:t>목차</a:t>
-            </a:r>
-            <a:endParaRPr lang="ko-KR" sz="7900" b="0" i="0" u="none" strike="noStrike" dirty="0">
-              <a:solidFill>
-                <a:srgbClr val="4D4D4D"/>
-              </a:solidFill>
-              <a:latin typeface="Noto Sans KR Medium" pitchFamily="50" charset="-127"/>
-              <a:ea typeface="Noto Sans KR Medium" pitchFamily="50" charset="-127"/>
-            </a:endParaRPr>
-          </a:p>
-        </p:txBody>
-      </p:sp>
-      <p:sp>
-        <p:nvSpPr>
-          <p:cNvPr id="21" name="TextBox 19"/>
-          <p:cNvSpPr txBox="1"/>
-          <p:nvPr/>
-        </p:nvSpPr>
-        <p:spPr>
-          <a:xfrm>
-            <a:off x="7010400" y="7810500"/>
-            <a:ext cx="4152900" cy="774700"/>
-          </a:xfrm>
-          <a:prstGeom prst="rect">
-            <a:avLst/>
-          </a:prstGeom>
-        </p:spPr>
-        <p:txBody>
-          <a:bodyPr lIns="0" tIns="0" rIns="0" bIns="0" rtlCol="0" anchor="ctr"/>
-          <a:lstStyle/>
-          <a:p>
-            <a:pPr lvl="0" algn="ctr">
-              <a:lnSpc>
-                <a:spcPct val="107899"/>
-              </a:lnSpc>
-            </a:pPr>
-            <a:r>
-              <a:rPr lang="ko-KR" altLang="en-US" sz="2200" b="0" i="0" u="none" strike="noStrike" dirty="0" smtClean="0">
-                <a:solidFill>
-                  <a:srgbClr val="4D4D4D"/>
-                </a:solidFill>
-                <a:latin typeface="Noto Sans KR Medium" pitchFamily="50" charset="-127"/>
-                <a:ea typeface="Noto Sans KR Medium" pitchFamily="50" charset="-127"/>
-              </a:rPr>
-              <a:t>결과</a:t>
-            </a:r>
-            <a:endParaRPr lang="en-US" sz="2200" b="0" i="0" u="none" strike="noStrike" dirty="0">
-              <a:solidFill>
-                <a:srgbClr val="4D4D4D"/>
-              </a:solidFill>
-              <a:latin typeface="Noto Sans KR Medium" pitchFamily="50" charset="-127"/>
-              <a:ea typeface="Noto Sans KR Medium" pitchFamily="50" charset="-127"/>
-            </a:endParaRPr>
-          </a:p>
-        </p:txBody>
-      </p:sp>
-    </p:spTree>
-  </p:cSld>
-  <p:clrMapOvr>
-    <a:masterClrMapping/>
-  </p:clrMapOvr>
-  <p:timing>
-    <p:tnLst>
-      <p:par>
-        <p:cTn id="1" dur="indefinite" restart="never" nodeType="tmRoot"/>
-      </p:par>
-    </p:tnLst>
-  </p:timing>
-</p:sld>
-</file>
-
-<file path=ppt/slides/slide20.xml><?xml version="1.0" encoding="utf-8"?>
+<file path=ppt/slides/slide21.xml><?xml version="1.0" encoding="utf-8"?>
 <p:sld xmlns:a="http://schemas.openxmlformats.org/drawingml/2006/main" xmlns:r="http://schemas.openxmlformats.org/officeDocument/2006/relationships" xmlns:p="http://schemas.openxmlformats.org/presentationml/2006/main">
   <p:cSld>
     <p:bg>
@@ -15214,7 +16120,7 @@
 </p:sld>
 </file>
 
-<file path=ppt/slides/slide21.xml><?xml version="1.0" encoding="utf-8"?>
+<file path=ppt/slides/slide22.xml><?xml version="1.0" encoding="utf-8"?>
 <p:sld xmlns:a="http://schemas.openxmlformats.org/drawingml/2006/main" xmlns:r="http://schemas.openxmlformats.org/officeDocument/2006/relationships" xmlns:p="http://schemas.openxmlformats.org/presentationml/2006/main">
   <p:cSld>
     <p:bg>
@@ -16140,7 +17046,7 @@
 </p:sld>
 </file>
 
-<file path=ppt/slides/slide22.xml><?xml version="1.0" encoding="utf-8"?>
+<file path=ppt/slides/slide23.xml><?xml version="1.0" encoding="utf-8"?>
 <p:sld xmlns:a="http://schemas.openxmlformats.org/drawingml/2006/main" xmlns:r="http://schemas.openxmlformats.org/officeDocument/2006/relationships" xmlns:p="http://schemas.openxmlformats.org/presentationml/2006/main">
   <p:cSld>
     <p:bg>
@@ -16349,7 +17255,7 @@
 </p:sld>
 </file>
 
-<file path=ppt/slides/slide23.xml><?xml version="1.0" encoding="utf-8"?>
+<file path=ppt/slides/slide24.xml><?xml version="1.0" encoding="utf-8"?>
 <p:sld xmlns:a="http://schemas.openxmlformats.org/drawingml/2006/main" xmlns:r="http://schemas.openxmlformats.org/officeDocument/2006/relationships" xmlns:p="http://schemas.openxmlformats.org/presentationml/2006/main">
   <p:cSld>
     <p:bg>
@@ -17141,7 +18047,7 @@
 </p:sld>
 </file>
 
-<file path=ppt/slides/slide24.xml><?xml version="1.0" encoding="utf-8"?>
+<file path=ppt/slides/slide25.xml><?xml version="1.0" encoding="utf-8"?>
 <p:sld xmlns:a="http://schemas.openxmlformats.org/drawingml/2006/main" xmlns:r="http://schemas.openxmlformats.org/officeDocument/2006/relationships" xmlns:p="http://schemas.openxmlformats.org/presentationml/2006/main">
   <p:cSld>
     <p:bg>
@@ -17902,7 +18808,7 @@
 </p:sld>
 </file>
 
-<file path=ppt/slides/slide25.xml><?xml version="1.0" encoding="utf-8"?>
+<file path=ppt/slides/slide26.xml><?xml version="1.0" encoding="utf-8"?>
 <p:sld xmlns:a="http://schemas.openxmlformats.org/drawingml/2006/main" xmlns:r="http://schemas.openxmlformats.org/officeDocument/2006/relationships" xmlns:p="http://schemas.openxmlformats.org/presentationml/2006/main">
   <p:cSld>
     <p:bg>
@@ -18510,7 +19416,7 @@
 </p:sld>
 </file>
 
-<file path=ppt/slides/slide26.xml><?xml version="1.0" encoding="utf-8"?>
+<file path=ppt/slides/slide27.xml><?xml version="1.0" encoding="utf-8"?>
 <p:sld xmlns:a="http://schemas.openxmlformats.org/drawingml/2006/main" xmlns:r="http://schemas.openxmlformats.org/officeDocument/2006/relationships" xmlns:p="http://schemas.openxmlformats.org/presentationml/2006/main">
   <p:cSld>
     <p:bg>
@@ -19047,12 +19953,12 @@
           <a:lstStyle/>
           <a:p>
             <a:r>
-              <a:rPr lang="ko-KR" altLang="en-US" sz="2400" smtClean="0"/>
+              <a:rPr lang="ko-KR" altLang="en-US" sz="2400" dirty="0" smtClean="0"/>
               <a:t>군집간 분산비율</a:t>
             </a:r>
             <a:r>
               <a:rPr lang="en-US" altLang="ko-KR" sz="2400" dirty="0" smtClean="0"/>
-              <a:t>-&gt; 71.7%</a:t>
+              <a:t>-&gt; 71.6%</a:t>
             </a:r>
             <a:endParaRPr lang="en-US" altLang="ko-KR" sz="2200" b="1" dirty="0">
               <a:latin typeface="+mn-ea"/>
@@ -19280,7 +20186,7 @@
 </p:sld>
 </file>
 
-<file path=ppt/slides/slide27.xml><?xml version="1.0" encoding="utf-8"?>
+<file path=ppt/slides/slide28.xml><?xml version="1.0" encoding="utf-8"?>
 <p:sld xmlns:a="http://schemas.openxmlformats.org/drawingml/2006/main" xmlns:r="http://schemas.openxmlformats.org/officeDocument/2006/relationships" xmlns:p="http://schemas.openxmlformats.org/presentationml/2006/main">
   <p:cSld>
     <p:bg>
@@ -19455,7 +20361,7 @@
         </p:nvSpPr>
         <p:spPr>
           <a:xfrm>
-            <a:off x="1066800" y="2324100"/>
+            <a:off x="1066800" y="2410480"/>
             <a:ext cx="11049000" cy="523220"/>
           </a:xfrm>
           <a:prstGeom prst="rect">
@@ -19603,15 +20509,15 @@
         </p:nvPicPr>
         <p:blipFill>
           <a:blip r:embed="rId6" cstate="print"/>
-          <a:srcRect/>
+          <a:srcRect t="15780"/>
           <a:stretch>
             <a:fillRect/>
           </a:stretch>
         </p:blipFill>
         <p:spPr bwMode="auto">
           <a:xfrm>
-            <a:off x="914400" y="3086100"/>
-            <a:ext cx="10210800" cy="2514600"/>
+            <a:off x="990600" y="3086100"/>
+            <a:ext cx="10287000" cy="2362200"/>
           </a:xfrm>
           <a:prstGeom prst="rect">
             <a:avLst/>
@@ -19956,7 +20862,7 @@
 </p:sld>
 </file>
 
-<file path=ppt/slides/slide28.xml><?xml version="1.0" encoding="utf-8"?>
+<file path=ppt/slides/slide29.xml><?xml version="1.0" encoding="utf-8"?>
 <p:sld xmlns:a="http://schemas.openxmlformats.org/drawingml/2006/main" xmlns:r="http://schemas.openxmlformats.org/officeDocument/2006/relationships" xmlns:p="http://schemas.openxmlformats.org/presentationml/2006/main">
   <p:cSld>
     <p:bg>
@@ -20165,7 +21071,201 @@
 </p:sld>
 </file>
 
-<file path=ppt/slides/slide29.xml><?xml version="1.0" encoding="utf-8"?>
+<file path=ppt/slides/slide3.xml><?xml version="1.0" encoding="utf-8"?>
+<p:sld xmlns:a="http://schemas.openxmlformats.org/drawingml/2006/main" xmlns:r="http://schemas.openxmlformats.org/officeDocument/2006/relationships" xmlns:p="http://schemas.openxmlformats.org/presentationml/2006/main">
+  <p:cSld>
+    <p:bg>
+      <p:bgPr>
+        <a:solidFill>
+          <a:srgbClr val="229BEE"/>
+        </a:solidFill>
+        <a:effectLst/>
+      </p:bgPr>
+    </p:bg>
+    <p:spTree>
+      <p:nvGrpSpPr>
+        <p:cNvPr id="1" name=""/>
+        <p:cNvGrpSpPr/>
+        <p:nvPr/>
+      </p:nvGrpSpPr>
+      <p:grpSpPr>
+        <a:xfrm>
+          <a:off x="0" y="0"/>
+          <a:ext cx="0" cy="0"/>
+          <a:chOff x="0" y="0"/>
+          <a:chExt cx="0" cy="0"/>
+        </a:xfrm>
+      </p:grpSpPr>
+      <p:pic>
+        <p:nvPicPr>
+          <p:cNvPr id="2" name="Picture 2"/>
+          <p:cNvPicPr>
+            <a:picLocks noChangeAspect="1"/>
+          </p:cNvPicPr>
+          <p:nvPr/>
+        </p:nvPicPr>
+        <p:blipFill>
+          <a:blip r:embed="rId2" cstate="print"/>
+          <a:stretch>
+            <a:fillRect/>
+          </a:stretch>
+        </p:blipFill>
+        <p:spPr>
+          <a:xfrm>
+            <a:off x="292100" y="292100"/>
+            <a:ext cx="17716500" cy="9715500"/>
+          </a:xfrm>
+          <a:prstGeom prst="rect">
+            <a:avLst/>
+          </a:prstGeom>
+        </p:spPr>
+      </p:pic>
+      <p:pic>
+        <p:nvPicPr>
+          <p:cNvPr id="3" name="Picture 3"/>
+          <p:cNvPicPr>
+            <a:picLocks noChangeAspect="1"/>
+          </p:cNvPicPr>
+          <p:nvPr/>
+        </p:nvPicPr>
+        <p:blipFill>
+          <a:blip r:embed="rId3" cstate="print">
+            <a:alphaModFix amt="30000"/>
+          </a:blip>
+          <a:stretch>
+            <a:fillRect/>
+          </a:stretch>
+        </p:blipFill>
+        <p:spPr>
+          <a:xfrm>
+            <a:off x="1498600" y="8331200"/>
+            <a:ext cx="6045200" cy="25400"/>
+          </a:xfrm>
+          <a:prstGeom prst="rect">
+            <a:avLst/>
+          </a:prstGeom>
+        </p:spPr>
+      </p:pic>
+      <p:pic>
+        <p:nvPicPr>
+          <p:cNvPr id="4" name="Picture 4"/>
+          <p:cNvPicPr>
+            <a:picLocks noChangeAspect="1"/>
+          </p:cNvPicPr>
+          <p:nvPr/>
+        </p:nvPicPr>
+        <p:blipFill>
+          <a:blip r:embed="rId4" cstate="print"/>
+          <a:stretch>
+            <a:fillRect/>
+          </a:stretch>
+        </p:blipFill>
+        <p:spPr>
+          <a:xfrm>
+            <a:off x="16611600" y="0"/>
+            <a:ext cx="673100" cy="965200"/>
+          </a:xfrm>
+          <a:prstGeom prst="rect">
+            <a:avLst/>
+          </a:prstGeom>
+        </p:spPr>
+      </p:pic>
+      <p:sp>
+        <p:nvSpPr>
+          <p:cNvPr id="5" name="TextBox 5"/>
+          <p:cNvSpPr txBox="1"/>
+          <p:nvPr/>
+        </p:nvSpPr>
+        <p:spPr>
+          <a:xfrm>
+            <a:off x="1333500" y="3708400"/>
+            <a:ext cx="8293100" cy="3378200"/>
+          </a:xfrm>
+          <a:prstGeom prst="rect">
+            <a:avLst/>
+          </a:prstGeom>
+        </p:spPr>
+        <p:txBody>
+          <a:bodyPr lIns="0" tIns="0" rIns="0" bIns="0" rtlCol="0" anchor="ctr"/>
+          <a:lstStyle/>
+          <a:p>
+            <a:pPr lvl="0" algn="l">
+              <a:lnSpc>
+                <a:spcPct val="115287"/>
+              </a:lnSpc>
+            </a:pPr>
+            <a:r>
+              <a:rPr lang="en-US" sz="19000" b="0" i="0" u="none" strike="noStrike" dirty="0">
+                <a:solidFill>
+                  <a:srgbClr val="229BEE"/>
+                </a:solidFill>
+                <a:latin typeface="+mn-ea"/>
+              </a:rPr>
+              <a:t>01</a:t>
+            </a:r>
+          </a:p>
+        </p:txBody>
+      </p:sp>
+      <p:sp>
+        <p:nvSpPr>
+          <p:cNvPr id="6" name="TextBox 6"/>
+          <p:cNvSpPr txBox="1"/>
+          <p:nvPr/>
+        </p:nvSpPr>
+        <p:spPr>
+          <a:xfrm>
+            <a:off x="1498600" y="6667500"/>
+            <a:ext cx="9080500" cy="1498600"/>
+          </a:xfrm>
+          <a:prstGeom prst="rect">
+            <a:avLst/>
+          </a:prstGeom>
+        </p:spPr>
+        <p:txBody>
+          <a:bodyPr lIns="0" tIns="0" rIns="0" bIns="0" rtlCol="0" anchor="ctr"/>
+          <a:lstStyle/>
+          <a:p>
+            <a:pPr lvl="0" algn="l">
+              <a:lnSpc>
+                <a:spcPct val="115287"/>
+              </a:lnSpc>
+            </a:pPr>
+            <a:r>
+              <a:rPr lang="ko-KR" altLang="en-US" sz="8400" b="0" i="0" u="none" strike="noStrike" dirty="0" smtClean="0">
+                <a:solidFill>
+                  <a:srgbClr val="4D4D4D"/>
+                </a:solidFill>
+                <a:latin typeface="Noto Sans KR Medium" pitchFamily="50" charset="-127"/>
+                <a:ea typeface="Noto Sans KR Medium" pitchFamily="50" charset="-127"/>
+              </a:rPr>
+              <a:t>선정이유 및 목표</a:t>
+            </a:r>
+            <a:endParaRPr lang="ko-KR" sz="8400" b="0" i="0" u="none" strike="noStrike" dirty="0">
+              <a:solidFill>
+                <a:srgbClr val="4D4D4D"/>
+              </a:solidFill>
+              <a:latin typeface="Noto Sans KR Medium" pitchFamily="50" charset="-127"/>
+              <a:ea typeface="Noto Sans KR Medium" pitchFamily="50" charset="-127"/>
+            </a:endParaRPr>
+          </a:p>
+        </p:txBody>
+      </p:sp>
+    </p:spTree>
+  </p:cSld>
+  <p:clrMapOvr>
+    <a:masterClrMapping/>
+  </p:clrMapOvr>
+  <p:timing>
+    <p:tnLst>
+      <p:par>
+        <p:cTn id="1" dur="indefinite" restart="never" nodeType="tmRoot"/>
+      </p:par>
+    </p:tnLst>
+  </p:timing>
+</p:sld>
+</file>
+
+<file path=ppt/slides/slide30.xml><?xml version="1.0" encoding="utf-8"?>
 <p:sld xmlns:a="http://schemas.openxmlformats.org/drawingml/2006/main" xmlns:r="http://schemas.openxmlformats.org/officeDocument/2006/relationships" xmlns:p="http://schemas.openxmlformats.org/presentationml/2006/main">
   <p:cSld>
     <p:bg>
@@ -21201,7 +22301,7 @@
 </p:sld>
 </file>
 
-<file path=ppt/slides/slide3.xml><?xml version="1.0" encoding="utf-8"?>
+<file path=ppt/slides/slide31.xml><?xml version="1.0" encoding="utf-8"?>
 <p:sld xmlns:a="http://schemas.openxmlformats.org/drawingml/2006/main" xmlns:r="http://schemas.openxmlformats.org/officeDocument/2006/relationships" xmlns:p="http://schemas.openxmlformats.org/presentationml/2006/main">
   <p:cSld>
     <p:bg>
@@ -21252,130 +22352,123 @@
       </p:pic>
       <p:pic>
         <p:nvPicPr>
-          <p:cNvPr id="3" name="Picture 3"/>
+          <p:cNvPr id="4" name="Picture 4"/>
           <p:cNvPicPr>
             <a:picLocks noChangeAspect="1"/>
           </p:cNvPicPr>
           <p:nvPr/>
         </p:nvPicPr>
         <p:blipFill>
-          <a:blip r:embed="rId3" cstate="print">
-            <a:alphaModFix amt="30000"/>
-          </a:blip>
+          <a:blip r:embed="rId3" cstate="print"/>
           <a:stretch>
             <a:fillRect/>
           </a:stretch>
         </p:blipFill>
         <p:spPr>
           <a:xfrm>
-            <a:off x="1498600" y="8331200"/>
-            <a:ext cx="6045200" cy="25400"/>
+            <a:off x="16611600" y="0"/>
+            <a:ext cx="673100" cy="965200"/>
           </a:xfrm>
           <a:prstGeom prst="rect">
             <a:avLst/>
           </a:prstGeom>
         </p:spPr>
       </p:pic>
+      <p:sp>
+        <p:nvSpPr>
+          <p:cNvPr id="99330" name="AutoShape 2" descr="http://127.0.0.1:33853/graphics/8aceb19c-4afd-45fd-889b-3bfd97605abc.png"/>
+          <p:cNvSpPr>
+            <a:spLocks noChangeAspect="1" noChangeArrowheads="1"/>
+          </p:cNvSpPr>
+          <p:nvPr/>
+        </p:nvSpPr>
+        <p:spPr bwMode="auto">
+          <a:xfrm>
+            <a:off x="168275" y="-144463"/>
+            <a:ext cx="304800" cy="304801"/>
+          </a:xfrm>
+          <a:prstGeom prst="rect">
+            <a:avLst/>
+          </a:prstGeom>
+          <a:noFill/>
+        </p:spPr>
+        <p:txBody>
+          <a:bodyPr vert="horz" wrap="square" lIns="91440" tIns="45720" rIns="91440" bIns="45720" numCol="1" anchor="t" anchorCtr="0" compatLnSpc="1">
+            <a:prstTxWarp prst="textNoShape">
+              <a:avLst/>
+            </a:prstTxWarp>
+          </a:bodyPr>
+          <a:lstStyle/>
+          <a:p>
+            <a:endParaRPr lang="ko-KR" altLang="en-US"/>
+          </a:p>
+        </p:txBody>
+      </p:sp>
       <p:pic>
         <p:nvPicPr>
-          <p:cNvPr id="4" name="Picture 4"/>
+          <p:cNvPr id="99331" name="Picture 3"/>
           <p:cNvPicPr>
-            <a:picLocks noChangeAspect="1"/>
+            <a:picLocks noChangeAspect="1" noChangeArrowheads="1"/>
           </p:cNvPicPr>
           <p:nvPr/>
         </p:nvPicPr>
         <p:blipFill>
           <a:blip r:embed="rId4" cstate="print"/>
+          <a:srcRect/>
           <a:stretch>
             <a:fillRect/>
           </a:stretch>
         </p:blipFill>
-        <p:spPr>
-          <a:xfrm>
-            <a:off x="16611600" y="0"/>
-            <a:ext cx="673100" cy="965200"/>
-          </a:xfrm>
-          <a:prstGeom prst="rect">
-            <a:avLst/>
-          </a:prstGeom>
+        <p:spPr bwMode="auto">
+          <a:xfrm>
+            <a:off x="304800" y="266700"/>
+            <a:ext cx="17678400" cy="9677400"/>
+          </a:xfrm>
+          <a:prstGeom prst="rect">
+            <a:avLst/>
+          </a:prstGeom>
+          <a:noFill/>
+          <a:ln w="9525">
+            <a:noFill/>
+            <a:miter lim="800000"/>
+            <a:headEnd/>
+            <a:tailEnd/>
+          </a:ln>
+          <a:effectLst/>
         </p:spPr>
       </p:pic>
       <p:sp>
         <p:nvSpPr>
-          <p:cNvPr id="5" name="TextBox 5"/>
+          <p:cNvPr id="6" name="TextBox 5"/>
           <p:cNvSpPr txBox="1"/>
           <p:nvPr/>
         </p:nvSpPr>
         <p:spPr>
           <a:xfrm>
-            <a:off x="1333500" y="3708400"/>
-            <a:ext cx="8293100" cy="3378200"/>
-          </a:xfrm>
-          <a:prstGeom prst="rect">
-            <a:avLst/>
-          </a:prstGeom>
-        </p:spPr>
-        <p:txBody>
-          <a:bodyPr lIns="0" tIns="0" rIns="0" bIns="0" rtlCol="0" anchor="ctr"/>
-          <a:lstStyle/>
-          <a:p>
-            <a:pPr lvl="0" algn="l">
-              <a:lnSpc>
-                <a:spcPct val="115287"/>
-              </a:lnSpc>
-            </a:pPr>
-            <a:r>
-              <a:rPr lang="en-US" sz="19000" b="0" i="0" u="none" strike="noStrike" dirty="0">
-                <a:solidFill>
-                  <a:srgbClr val="229BEE"/>
-                </a:solidFill>
-                <a:latin typeface="+mn-ea"/>
-              </a:rPr>
-              <a:t>01</a:t>
-            </a:r>
-          </a:p>
-        </p:txBody>
-      </p:sp>
-      <p:sp>
-        <p:nvSpPr>
-          <p:cNvPr id="6" name="TextBox 6"/>
-          <p:cNvSpPr txBox="1"/>
-          <p:nvPr/>
-        </p:nvSpPr>
-        <p:spPr>
-          <a:xfrm>
-            <a:off x="1498600" y="6667500"/>
-            <a:ext cx="9080500" cy="1498600"/>
-          </a:xfrm>
-          <a:prstGeom prst="rect">
-            <a:avLst/>
-          </a:prstGeom>
-        </p:spPr>
-        <p:txBody>
-          <a:bodyPr lIns="0" tIns="0" rIns="0" bIns="0" rtlCol="0" anchor="ctr"/>
-          <a:lstStyle/>
-          <a:p>
-            <a:pPr lvl="0" algn="l">
-              <a:lnSpc>
-                <a:spcPct val="115287"/>
-              </a:lnSpc>
-            </a:pPr>
-            <a:r>
-              <a:rPr lang="ko-KR" altLang="en-US" sz="8400" b="0" i="0" u="none" strike="noStrike" dirty="0" smtClean="0">
-                <a:solidFill>
-                  <a:srgbClr val="4D4D4D"/>
-                </a:solidFill>
-                <a:latin typeface="Noto Sans KR Medium" pitchFamily="50" charset="-127"/>
-                <a:ea typeface="Noto Sans KR Medium" pitchFamily="50" charset="-127"/>
-              </a:rPr>
-              <a:t>선정이유 및 목표</a:t>
-            </a:r>
-            <a:endParaRPr lang="ko-KR" sz="8400" b="0" i="0" u="none" strike="noStrike" dirty="0">
-              <a:solidFill>
-                <a:srgbClr val="4D4D4D"/>
-              </a:solidFill>
-              <a:latin typeface="Noto Sans KR Medium" pitchFamily="50" charset="-127"/>
-              <a:ea typeface="Noto Sans KR Medium" pitchFamily="50" charset="-127"/>
+            <a:off x="6934200" y="419100"/>
+            <a:ext cx="4343400" cy="461665"/>
+          </a:xfrm>
+          <a:prstGeom prst="rect">
+            <a:avLst/>
+          </a:prstGeom>
+          <a:noFill/>
+        </p:spPr>
+        <p:txBody>
+          <a:bodyPr wrap="square" rtlCol="0">
+            <a:spAutoFit/>
+          </a:bodyPr>
+          <a:lstStyle/>
+          <a:p>
+            <a:r>
+              <a:rPr lang="ko-KR" altLang="en-US" sz="2400" b="1" dirty="0" smtClean="0">
+                <a:latin typeface="+mj-ea"/>
+                <a:ea typeface="+mj-ea"/>
+              </a:rPr>
+              <a:t>Ｃｌｕｓｔｅｒ별　국가들</a:t>
+            </a:r>
+            <a:endParaRPr lang="ko-KR" altLang="en-US" sz="2400" b="1" dirty="0">
+              <a:latin typeface="+mj-ea"/>
+              <a:ea typeface="+mj-ea"/>
             </a:endParaRPr>
           </a:p>
         </p:txBody>
@@ -21395,194 +22488,7 @@
 </p:sld>
 </file>
 
-<file path=ppt/slides/slide30.xml><?xml version="1.0" encoding="utf-8"?>
-<p:sld xmlns:a="http://schemas.openxmlformats.org/drawingml/2006/main" xmlns:r="http://schemas.openxmlformats.org/officeDocument/2006/relationships" xmlns:p="http://schemas.openxmlformats.org/presentationml/2006/main">
-  <p:cSld>
-    <p:bg>
-      <p:bgPr>
-        <a:solidFill>
-          <a:srgbClr val="229BEE"/>
-        </a:solidFill>
-        <a:effectLst/>
-      </p:bgPr>
-    </p:bg>
-    <p:spTree>
-      <p:nvGrpSpPr>
-        <p:cNvPr id="1" name=""/>
-        <p:cNvGrpSpPr/>
-        <p:nvPr/>
-      </p:nvGrpSpPr>
-      <p:grpSpPr>
-        <a:xfrm>
-          <a:off x="0" y="0"/>
-          <a:ext cx="0" cy="0"/>
-          <a:chOff x="0" y="0"/>
-          <a:chExt cx="0" cy="0"/>
-        </a:xfrm>
-      </p:grpSpPr>
-      <p:pic>
-        <p:nvPicPr>
-          <p:cNvPr id="2" name="Picture 2"/>
-          <p:cNvPicPr>
-            <a:picLocks noChangeAspect="1"/>
-          </p:cNvPicPr>
-          <p:nvPr/>
-        </p:nvPicPr>
-        <p:blipFill>
-          <a:blip r:embed="rId2" cstate="print"/>
-          <a:stretch>
-            <a:fillRect/>
-          </a:stretch>
-        </p:blipFill>
-        <p:spPr>
-          <a:xfrm>
-            <a:off x="292100" y="292100"/>
-            <a:ext cx="17716500" cy="9715500"/>
-          </a:xfrm>
-          <a:prstGeom prst="rect">
-            <a:avLst/>
-          </a:prstGeom>
-        </p:spPr>
-      </p:pic>
-      <p:pic>
-        <p:nvPicPr>
-          <p:cNvPr id="4" name="Picture 4"/>
-          <p:cNvPicPr>
-            <a:picLocks noChangeAspect="1"/>
-          </p:cNvPicPr>
-          <p:nvPr/>
-        </p:nvPicPr>
-        <p:blipFill>
-          <a:blip r:embed="rId3" cstate="print"/>
-          <a:stretch>
-            <a:fillRect/>
-          </a:stretch>
-        </p:blipFill>
-        <p:spPr>
-          <a:xfrm>
-            <a:off x="16611600" y="0"/>
-            <a:ext cx="673100" cy="965200"/>
-          </a:xfrm>
-          <a:prstGeom prst="rect">
-            <a:avLst/>
-          </a:prstGeom>
-        </p:spPr>
-      </p:pic>
-      <p:sp>
-        <p:nvSpPr>
-          <p:cNvPr id="99330" name="AutoShape 2" descr="http://127.0.0.1:33853/graphics/8aceb19c-4afd-45fd-889b-3bfd97605abc.png"/>
-          <p:cNvSpPr>
-            <a:spLocks noChangeAspect="1" noChangeArrowheads="1"/>
-          </p:cNvSpPr>
-          <p:nvPr/>
-        </p:nvSpPr>
-        <p:spPr bwMode="auto">
-          <a:xfrm>
-            <a:off x="168275" y="-144463"/>
-            <a:ext cx="304800" cy="304801"/>
-          </a:xfrm>
-          <a:prstGeom prst="rect">
-            <a:avLst/>
-          </a:prstGeom>
-          <a:noFill/>
-        </p:spPr>
-        <p:txBody>
-          <a:bodyPr vert="horz" wrap="square" lIns="91440" tIns="45720" rIns="91440" bIns="45720" numCol="1" anchor="t" anchorCtr="0" compatLnSpc="1">
-            <a:prstTxWarp prst="textNoShape">
-              <a:avLst/>
-            </a:prstTxWarp>
-          </a:bodyPr>
-          <a:lstStyle/>
-          <a:p>
-            <a:endParaRPr lang="ko-KR" altLang="en-US"/>
-          </a:p>
-        </p:txBody>
-      </p:sp>
-      <p:pic>
-        <p:nvPicPr>
-          <p:cNvPr id="99331" name="Picture 3"/>
-          <p:cNvPicPr>
-            <a:picLocks noChangeAspect="1" noChangeArrowheads="1"/>
-          </p:cNvPicPr>
-          <p:nvPr/>
-        </p:nvPicPr>
-        <p:blipFill>
-          <a:blip r:embed="rId4" cstate="print"/>
-          <a:srcRect/>
-          <a:stretch>
-            <a:fillRect/>
-          </a:stretch>
-        </p:blipFill>
-        <p:spPr bwMode="auto">
-          <a:xfrm>
-            <a:off x="304800" y="266700"/>
-            <a:ext cx="17678400" cy="9677400"/>
-          </a:xfrm>
-          <a:prstGeom prst="rect">
-            <a:avLst/>
-          </a:prstGeom>
-          <a:noFill/>
-          <a:ln w="9525">
-            <a:noFill/>
-            <a:miter lim="800000"/>
-            <a:headEnd/>
-            <a:tailEnd/>
-          </a:ln>
-          <a:effectLst/>
-        </p:spPr>
-      </p:pic>
-      <p:sp>
-        <p:nvSpPr>
-          <p:cNvPr id="6" name="TextBox 5"/>
-          <p:cNvSpPr txBox="1"/>
-          <p:nvPr/>
-        </p:nvSpPr>
-        <p:spPr>
-          <a:xfrm>
-            <a:off x="6934200" y="419100"/>
-            <a:ext cx="4343400" cy="461665"/>
-          </a:xfrm>
-          <a:prstGeom prst="rect">
-            <a:avLst/>
-          </a:prstGeom>
-          <a:noFill/>
-        </p:spPr>
-        <p:txBody>
-          <a:bodyPr wrap="square" rtlCol="0">
-            <a:spAutoFit/>
-          </a:bodyPr>
-          <a:lstStyle/>
-          <a:p>
-            <a:r>
-              <a:rPr lang="ko-KR" altLang="en-US" sz="2400" b="1" dirty="0" smtClean="0">
-                <a:latin typeface="+mj-ea"/>
-                <a:ea typeface="+mj-ea"/>
-              </a:rPr>
-              <a:t>Ｃｌｕｓｔｅｒ별　국가들</a:t>
-            </a:r>
-            <a:endParaRPr lang="ko-KR" altLang="en-US" sz="2400" b="1" dirty="0">
-              <a:latin typeface="+mj-ea"/>
-              <a:ea typeface="+mj-ea"/>
-            </a:endParaRPr>
-          </a:p>
-        </p:txBody>
-      </p:sp>
-    </p:spTree>
-  </p:cSld>
-  <p:clrMapOvr>
-    <a:masterClrMapping/>
-  </p:clrMapOvr>
-  <p:timing>
-    <p:tnLst>
-      <p:par>
-        <p:cTn id="1" dur="indefinite" restart="never" nodeType="tmRoot"/>
-      </p:par>
-    </p:tnLst>
-  </p:timing>
-</p:sld>
-</file>
-
-<file path=ppt/slides/slide31.xml><?xml version="1.0" encoding="utf-8"?>
+<file path=ppt/slides/slide32.xml><?xml version="1.0" encoding="utf-8"?>
 <p:sld xmlns:a="http://schemas.openxmlformats.org/drawingml/2006/main" xmlns:r="http://schemas.openxmlformats.org/officeDocument/2006/relationships" xmlns:p="http://schemas.openxmlformats.org/presentationml/2006/main">
   <p:cSld>
     <p:bg>
@@ -22563,7 +23469,7 @@
 </p:sld>
 </file>
 
-<file path=ppt/slides/slide32.xml><?xml version="1.0" encoding="utf-8"?>
+<file path=ppt/slides/slide33.xml><?xml version="1.0" encoding="utf-8"?>
 <p:sld xmlns:a="http://schemas.openxmlformats.org/drawingml/2006/main" xmlns:r="http://schemas.openxmlformats.org/officeDocument/2006/relationships" xmlns:p="http://schemas.openxmlformats.org/presentationml/2006/main">
   <p:cSld>
     <p:bg>
@@ -23408,7 +24314,7 @@
 </p:sld>
 </file>
 
-<file path=ppt/slides/slide33.xml><?xml version="1.0" encoding="utf-8"?>
+<file path=ppt/slides/slide34.xml><?xml version="1.0" encoding="utf-8"?>
 <p:sld xmlns:a="http://schemas.openxmlformats.org/drawingml/2006/main" xmlns:r="http://schemas.openxmlformats.org/officeDocument/2006/relationships" xmlns:p="http://schemas.openxmlformats.org/presentationml/2006/main">
   <p:cSld>
     <p:bg>
